--- a/demo_site/files/slides/lecture2_analysis1_inkb.pptx
+++ b/demo_site/files/slides/lecture2_analysis1_inkb.pptx
@@ -5,61 +5,63 @@
     <p:sldMasterId id="2147483648" r:id="rId1"/>
   </p:sldMasterIdLst>
   <p:notesMasterIdLst>
-    <p:notesMasterId r:id="rId33"/>
+    <p:notesMasterId r:id="rId35"/>
   </p:notesMasterIdLst>
   <p:sldIdLst>
     <p:sldId id="256" r:id="rId2"/>
     <p:sldId id="422" r:id="rId3"/>
-    <p:sldId id="270" r:id="rId4"/>
-    <p:sldId id="417" r:id="rId5"/>
-    <p:sldId id="418" r:id="rId6"/>
-    <p:sldId id="419" r:id="rId7"/>
-    <p:sldId id="420" r:id="rId8"/>
-    <p:sldId id="274" r:id="rId9"/>
-    <p:sldId id="273" r:id="rId10"/>
-    <p:sldId id="261" r:id="rId11"/>
-    <p:sldId id="314" r:id="rId12"/>
-    <p:sldId id="353" r:id="rId13"/>
-    <p:sldId id="389" r:id="rId14"/>
-    <p:sldId id="390" r:id="rId15"/>
-    <p:sldId id="319" r:id="rId16"/>
-    <p:sldId id="316" r:id="rId17"/>
-    <p:sldId id="391" r:id="rId18"/>
-    <p:sldId id="392" r:id="rId19"/>
-    <p:sldId id="423" r:id="rId20"/>
-    <p:sldId id="424" r:id="rId21"/>
-    <p:sldId id="411" r:id="rId22"/>
-    <p:sldId id="425" r:id="rId23"/>
-    <p:sldId id="426" r:id="rId24"/>
-    <p:sldId id="394" r:id="rId25"/>
-    <p:sldId id="398" r:id="rId26"/>
-    <p:sldId id="427" r:id="rId27"/>
-    <p:sldId id="397" r:id="rId28"/>
-    <p:sldId id="410" r:id="rId29"/>
-    <p:sldId id="416" r:id="rId30"/>
-    <p:sldId id="415" r:id="rId31"/>
-    <p:sldId id="421" r:id="rId32"/>
+    <p:sldId id="267" r:id="rId4"/>
+    <p:sldId id="268" r:id="rId5"/>
+    <p:sldId id="279" r:id="rId6"/>
+    <p:sldId id="428" r:id="rId7"/>
+    <p:sldId id="429" r:id="rId8"/>
+    <p:sldId id="430" r:id="rId9"/>
+    <p:sldId id="431" r:id="rId10"/>
+    <p:sldId id="274" r:id="rId11"/>
+    <p:sldId id="273" r:id="rId12"/>
+    <p:sldId id="261" r:id="rId13"/>
+    <p:sldId id="314" r:id="rId14"/>
+    <p:sldId id="353" r:id="rId15"/>
+    <p:sldId id="389" r:id="rId16"/>
+    <p:sldId id="390" r:id="rId17"/>
+    <p:sldId id="319" r:id="rId18"/>
+    <p:sldId id="316" r:id="rId19"/>
+    <p:sldId id="391" r:id="rId20"/>
+    <p:sldId id="392" r:id="rId21"/>
+    <p:sldId id="423" r:id="rId22"/>
+    <p:sldId id="424" r:id="rId23"/>
+    <p:sldId id="411" r:id="rId24"/>
+    <p:sldId id="425" r:id="rId25"/>
+    <p:sldId id="426" r:id="rId26"/>
+    <p:sldId id="394" r:id="rId27"/>
+    <p:sldId id="398" r:id="rId28"/>
+    <p:sldId id="427" r:id="rId29"/>
+    <p:sldId id="397" r:id="rId30"/>
+    <p:sldId id="410" r:id="rId31"/>
+    <p:sldId id="416" r:id="rId32"/>
+    <p:sldId id="415" r:id="rId33"/>
+    <p:sldId id="421" r:id="rId34"/>
   </p:sldIdLst>
   <p:sldSz cx="12192000" cy="6858000"/>
   <p:notesSz cx="6858000" cy="9144000"/>
   <p:embeddedFontLst>
     <p:embeddedFont>
       <p:font typeface="Cambria Math" panose="02040503050406030204" pitchFamily="18" charset="0"/>
-      <p:regular r:id="rId34"/>
+      <p:regular r:id="rId36"/>
     </p:embeddedFont>
     <p:embeddedFont>
       <p:font typeface="Cascadia Code" panose="020B0609020000020004" pitchFamily="49" charset="0"/>
-      <p:regular r:id="rId35"/>
-      <p:bold r:id="rId36"/>
-      <p:italic r:id="rId37"/>
-      <p:boldItalic r:id="rId38"/>
+      <p:regular r:id="rId37"/>
+      <p:bold r:id="rId38"/>
+      <p:italic r:id="rId39"/>
+      <p:boldItalic r:id="rId40"/>
     </p:embeddedFont>
     <p:embeddedFont>
       <p:font typeface="Consolas" panose="020B0609020204030204" pitchFamily="49" charset="0"/>
-      <p:regular r:id="rId39"/>
-      <p:bold r:id="rId40"/>
-      <p:italic r:id="rId41"/>
-      <p:boldItalic r:id="rId42"/>
+      <p:regular r:id="rId41"/>
+      <p:bold r:id="rId42"/>
+      <p:italic r:id="rId43"/>
+      <p:boldItalic r:id="rId44"/>
     </p:embeddedFont>
   </p:embeddedFontLst>
   <p:defaultTextStyle>
@@ -187,7 +189,7 @@
           <inkml:channelProperty channel="T" name="resolution" value="1" units="1/dev"/>
         </inkml:channelProperties>
       </inkml:inkSource>
-      <inkml:timestamp xml:id="ts0" timeString="2026-01-07T23:47:37.706"/>
+      <inkml:timestamp xml:id="ts0" timeString="2026-04-01T22:44:11.128"/>
     </inkml:context>
     <inkml:brush xml:id="br0">
       <inkml:brushProperty name="width" value="0.05292" units="cm"/>
@@ -195,72 +197,213 @@
       <inkml:brushProperty name="color" value="#FF0000"/>
     </inkml:brush>
   </inkml:definitions>
-  <inkml:trace contextRef="#ctx0" brushRef="#br0">9047 8683 0,'0'0'0,"0"0"0,0 0 0,0 0 0,0 0 31,0 0-31,0 9 0,0 16 16,-8 43-1,8 51 1,0 17 0,8 0-16,9-42 0,0-52 31</inkml:trace>
-  <inkml:trace contextRef="#ctx0" brushRef="#br0" timeOffset="6970.77">7835 15155 0,'0'0'0,"0"0"0,0 0 0,17 17 16,9 8 0,8 18-1,17 17-15,17 25 0,18 25 16,-9-25 0,8 0-1,0 0-15,-25-25 16,-9-18-1,-25-16-15</inkml:trace>
-  <inkml:trace contextRef="#ctx0" brushRef="#br0" timeOffset="7255.03">8236 15223 0,'0'0'0,"-8"0"16,-18 17-16,-17 17 15,-16 17 1,-18 26-16,9 16 15,8 1-15,0 16 16,17 1 0,26-1-16,9-59 15</inkml:trace>
-  <inkml:trace contextRef="#ctx0" brushRef="#br0" timeOffset="7912.35">9081 15010 0,'0'0'0,"-8"0"16,-1 9-16,1-1 16,-1 1-1,-8 8-15,-9 17 16,1 17 0,-1 25-16,1 27 15,16-10 1,18-16-16,16-1 15,18-16 1,17-9-16,8-17 16,9-17-1,25-17-15,1-9 16,-35-16 0,0-1-16,-25 9 15,-18 0 1,-8 0-16,-8 0 15,-18 9-15,-8-9 16,-51 17 0,-60 25-1,0 18-15,9 8 16,16 0-16,26-17 16,43-17-1</inkml:trace>
-  <inkml:trace contextRef="#ctx0" brushRef="#br0" timeOffset="18474.58">1494 8632 0,'0'0'0,"0"0"0,0 0 16,0 0-16,0 0 15,0 17 1,17 17-16,0 17 16,25 26-1,10 8 1,16 0-16,-17-17 16,0-17-16,-8-9 15,8-8 1,-34-8-1,9-18-15,0 1 16,-9-1-16</inkml:trace>
-  <inkml:trace contextRef="#ctx0" brushRef="#br0" timeOffset="18774.11">2057 8215 0,'0'0'0,"0"0"0,0 0 16,-9 9-1,-16 25-15,-35 42 16,-77 60 0,-33 43-16,25 8 15,-17 9-15,33-18 16,95-110-16</inkml:trace>
-  <inkml:trace contextRef="#ctx0" brushRef="#br0" timeOffset="21162.95">8023 13395 0,'0'0'0,"0"0"0,0 0 0,0 0 16,0 0-1,0 0 1,0 0-16,0 0 15,17 25 1,0 9-16,17 17 16,9 9-16,17 8 15,-1-9 1,-16 1 0,0-18-16,-18 1 15,-16-18-15</inkml:trace>
-  <inkml:trace contextRef="#ctx0" brushRef="#br0" timeOffset="21449.94">8356 13429 0,'0'0'0,"0"0"0,0 0 15,-26-9 1,-17 9-16,-8 17 16,-9 26-16,-16 8 15,7 17 1,1 8 0,8 1-16,18-9 15,-1-9 1,26-25-16</inkml:trace>
-  <inkml:trace contextRef="#ctx0" brushRef="#br0" timeOffset="21673.79">9158 12782 0,'0'0'0,"-9"9"0,1 50 0,-18 60 16,-8 26-16,17 42 31,9 9-31,-18 110 16</inkml:trace>
-  <inkml:trace contextRef="#ctx0" brushRef="#br0" timeOffset="24786.97">10105 8785 0,'0'0'0,"0"0"0,0 0 16,0 0 0,0 9-16,0-9 15,0 0 1,0 0-16,9 8 15,8 1 1,9-1-16,8 1 16,8-9-1,1 8-15,-17 1 16,8 8 0,8 17-16,10 17 15,-10 0 1,-16 0-16,-26 0 15,-9 8 1,-8 1-16,-17-9 16,-34-9-1,-17-8-15,-1-17 16,9-17 0,35-8-16,16-9 15,26-9 1,34-8-1,43-17-15,26 9 16,25 8 0,34 25-16,-17 9 15,-17 9 1,17 16-16,137 43 16</inkml:trace>
-  <inkml:trace contextRef="#ctx0" brushRef="#br0" timeOffset="25479.61">9039 14798 0,'0'8'0,"17"43"0,25 60 16,18 42-1,17 17-15,-26 0 16,0 9-1,0 8-15,1-26 16,-10-33 0,-25-69-16</inkml:trace>
-  <inkml:trace contextRef="#ctx0" brushRef="#br0" timeOffset="25807.23">9610 15300 0,'0'0'0,"-34"0"0,-34 0 0,-17 0 31,-9 0-31,-9 17 16,-16 8 0,-9 26-16,25 0 15,18 0 1,25-8-16,35-9 16,25-26-1</inkml:trace>
-  <inkml:trace contextRef="#ctx0" brushRef="#br0" timeOffset="26243.57">10404 14815 0,'0'0'0,"0"0"0,0 0 15,0 0 1,0 8-16,17 9 16,9 9-1,16-1-15,10 1 16,16-1-1,0 1 1,0-18-16,-8 1 16,-9-1-1,-8 1-15,-9-9 16,-8 8 0,-1 1-16,-16-1 15,0 9-15,-9 17 16,-35 43-1,-33 34-15,-34 42 16,-18 17 0,18-17-16,68-94 15</inkml:trace>
-  <inkml:trace contextRef="#ctx0" brushRef="#br0" timeOffset="30410.64">2765 8547 0,'0'0'0,"0"0"0,-8 0 16,-1 25-1,-8 10-15,17 7 16,17 26-16,17 0 31,26 9-31,43 16 16,-1-16-16,0-18 15,-33 1-15,-1-1 16,0 9-16,1 0 16,-18 9-1,-17-18 1,-9 1-16,-16-34 31</inkml:trace>
-  <inkml:trace contextRef="#ctx0" brushRef="#br0" timeOffset="30644.35">3653 8624 0,'0'0'0,"0"0"0,-9 0 15,-33 34 1,-86 42-16,-77 52 16,-17 16-1,26 1-15,-18 25 16,-50 68 0</inkml:trace>
-  <inkml:trace contextRef="#ctx0" brushRef="#br0" timeOffset="31791.11">8629 13267 0,'0'0'0,"0"0"16,0 0-16,0 0 0,0 0 15,0 0 1,0 0 0,17 8-16,9 9 15,8 0-15,8 18 16,10-1-1,7 17 1,1 0 0,-9-9-16,0 9 15,18 0 1,-10-8-16,-7-18 16,-27-16-16,-16-1 15</inkml:trace>
-  <inkml:trace contextRef="#ctx0" brushRef="#br0" timeOffset="32050.64">9585 13284 0,'0'0'0,"-17"8"0,-43 26 16,-25 26 0,-18 17-16,18-18 15,-9-8 1,-17 9-16,34-1 16,52-33-16</inkml:trace>
-  <inkml:trace contextRef="#ctx0" brushRef="#br0" timeOffset="32737.1">10029 13020 0,'0'0'0,"0"0"0,8 9 16,1-1-1,-9-8-15,8 0 16,9 0 0,0 0-16,17 0 15,9 0 1,8 17-16,9-8 16,-9 8-1,9 17 1,-17 0-16,-9 17 15,-17 8-15,-17 27 16,-34 16 0,-17-9-1,-9-16-15,9-9 16,8-17-16,9-9 16,17-8-1,8 0-15,18-8 16,25 8-1,60 8-15,42-25 16,52-17 0,0-34-16,111-34 15</inkml:trace>
-  <inkml:trace contextRef="#ctx0" brushRef="#br0" timeOffset="36440.41">11488 8470 0,'0'0'0,"0"0"16,0 0-16,0 0 0,0 0 15,0 0 1,0 0 0,9 0-1,33 9-15,27-1 16,7 9-1,1 0 1,-17 0-16,-9 0 16,-25 0-1,-1 9-15,1 8 16,-9 0-16,-8 0 16,-1-8-1,1-1-15,-9 1 16,-9-1-1,-17 1 1,-16-1-16,8 1 16,0-1-16,16-16 15,1-1 1,9 1-16,8-1 16,0-8-1,8 17 1,18 9-16,17-1 15,-9 1 1,0 8-16,-8 0 16,-1 17-1,-16 0-15,-1 8 16,-16 1-16,-18-9 16,-25 0-1,-26-9-15,-25 1 16,50-26-1</inkml:trace>
-  <inkml:trace contextRef="#ctx0" brushRef="#br0" timeOffset="37349.4">10524 14738 0,'0'0'0,"0"0"0,0 0 16,0 0-16,0 0 15,0 0 1,0 0-16,0 0 15,0 17 1,17 17-16,25 26 16,35 42-1,17 8-15,8-8 16,1 1 0,-18-18-16,-25-9 15,0-8 1,-9 0-16,-25-34 15,-18-17 1,1-8-16</inkml:trace>
-  <inkml:trace contextRef="#ctx0" brushRef="#br0" timeOffset="37618.25">11121 14866 0,'0'0'0,"-9"0"0,-16 17 15,-43 8 1,-26 9-16,0 26 16,-9 16-1,1 1-15,8-18 16,34-16-1,18 0 1,25-18-16,17-8 16,0-8-16</inkml:trace>
-  <inkml:trace contextRef="#ctx0" brushRef="#br0" timeOffset="39372.41">12393 14874 0,'0'0'0,"0"0"0,0 0 16,-9 0 0,1 0-1,-18 0-15,-17 17 16,-16-8-1,-27 8-15,-8 17 16,9-9 0,0 1-16,25 8 15,9 0 1,17-9-16,-1 1 16,18-9-1,9 17-15,8 0 16,17 9-1,26 8-15,33 0 16,-7-9 0,-10 1-16,10 8 15,-10 0 1,-16 0-16,-9 0 16,-17 8-1,-34 9-15,-8-8 16,-9-9-1,-26-9-15,-26-8 16,1-17 0,0-25-16,-1-26 0,27-9 15,25-8 17,25-25-32,35-35 15,42-25-15,34-8 0,18 7 31,16-7-31,1-1 16,-26 26 0,-9 17-1,-51 51-15</inkml:trace>
-  <inkml:trace contextRef="#ctx0" brushRef="#br0" timeOffset="41676.79">4455 8930 0,'0'0'0,"0"0"0,0 8 0,26 18 32,25 16-32,17 9 15,26 9 1,9 8-16,-1-9 16,9 1-1,-9-1-15,-42-33 16</inkml:trace>
-  <inkml:trace contextRef="#ctx0" brushRef="#br0" timeOffset="42124.98">4865 8555 0,'0'0'0,"0"0"0,-17 9 15,-26 25-15,-51 43 16,-34 33-1,-17 43-15,17 0 16,34-25 0,17-1-1,43-59-15</inkml:trace>
-  <inkml:trace contextRef="#ctx0" brushRef="#br0" timeOffset="43507.59">11480 12774 0,'0'0'0,"0"0"15,8-9 1,35 1-16,16-18 0,18 9 31,0 0-31,-9 0 16,-25 9-1,-17 8-15,-1 0 16,-8 0 0,-8 0-16,-1 0 15,1 0 1,-1 0-16,1 0 15,-9 0 1,0 0-16,0 0 16,0 0-1,0-9-15,9 1 16</inkml:trace>
-  <inkml:trace contextRef="#ctx0" brushRef="#br0" timeOffset="43946.87">10199 13114 0,'0'0'0,"0"0"0,0 0 0,0 0 15,9 8 1,16 18-1,27 16 1,16 26-16,17 18 16,-8 16-1,-9 8-15,-8 26 16,-17-8 0,8-26-16,0-17 15,-8-26-15,-18-33 16,-16-18-1</inkml:trace>
-  <inkml:trace contextRef="#ctx0" brushRef="#br0" timeOffset="44198.15">11036 13207 0,'0'0'0,"-9"0"0,-16 26 16,-52 16-1,-34 44-15,-34 33 16,-26 17 0,26 0-16,34-43 15,34-16-15,17-26 31,35-26-31</inkml:trace>
-  <inkml:trace contextRef="#ctx0" brushRef="#br0" timeOffset="44989.08">11787 12621 0,'0'0'0,"0"0"0,-9 0 15,1 0-15,-1 0 16,1 0 0,-1 0-16,9 0 15,0 0 1,0-9-1,17 1-15,9-1 16,8 9-16,17 9 16,0 16-16,18 9 15,-10 17 1,1 0 0,-17 9-1,-9 8-15,-17 0 16,-17 0-16,-17 8 15,-9 1 1,-33-1 0,-18-8-16,8-16 15,18-18 1,17-9-16,17-16 16,0-1-16,8 1 15,9-1 1,0-8-1,9 0-15,25 9 16,17-1 0,18 9-16,7 0 15,-16 9-15,-17-1 16,0 9 0,-18 0-1,1 9-15,-18 8 16,-25 0-1,-43 25-15,-59 9 16,-52-17-16,-17-17 16,-110 26-1</inkml:trace>
-  <inkml:trace contextRef="#ctx0" brushRef="#br0" timeOffset="48061.63">13383 8607 0,'0'0'0,"0"0"0,-9 8 16,1 18-1,-18 16-15,-17 26 16,9 9 0,17-1-16,0 1 15,17 8-15,0-9 16,17-8 0,17 0-1,18-8-15,7-18 16,10-16-1,16-9-15,9-17 0,0-9 16,8-8 0,-8-8-1,-17 8-15,-9-9 16,-17 1 0,-17 8-16,-25 17 15</inkml:trace>
-  <inkml:trace contextRef="#ctx0" brushRef="#br0" timeOffset="48251.14">14049 8496 0,'0'0'0,"0"17"0,-18 94 16,-33 186 0,-51 128-16,-9-50 15,60-112 1,8 86-16</inkml:trace>
-  <inkml:trace contextRef="#ctx0" brushRef="#br0" timeOffset="51413.96">11454 14730 0,'0'0'0,"0"0"15,0 0-15,8 8 0,35 35 16,17 33 0,8 26-16,9 17 31,17 9-16,0 8-15,-9-17 16,-17-25 0,18-9-16,-1 0 15,-8-17 1,0-26-16,-18-25 16,-33-17-1,-9-8-15</inkml:trace>
-  <inkml:trace contextRef="#ctx0" brushRef="#br0" timeOffset="51646.7">12623 14730 0,'0'0'0,"-25"0"0,-44 25 16,-50 26-1,-60 43-15,-1 25 16,18 17 0,17 0-16,17-8 15,26-26-15,33-26 16,52-50 0</inkml:trace>
-  <inkml:trace contextRef="#ctx0" brushRef="#br0" timeOffset="52221.82">13716 15002 0,'0'0'0,"0"0"0,-9 0 16,-8 0-16,-26 0 31,-16-9-31,-27 9 16,-16 9-16,-1 8 15,10 17 1,24 8 0,27-16-16,25-1 15,17 1 1,8 8-16,35 0 16,34 0-16,25-8 15,17-18 1,1-16-1,8-1-15,-26 1 16,-33-1-16,-18 9 16,-26 0-1,-7 0 1,-10 9-16,-8 33 0,-43 69 31,-25 50-15,-9 9-16,18-8 15,24-52-15,35-50 16,9-43 0</inkml:trace>
-  <inkml:trace contextRef="#ctx0" brushRef="#br0" timeOffset="54630.05">5565 8360 0,'0'0'0,"0"0"0,0 0 15,0 0 1,0 0-16,0 0 15,0 8 1,0 18 0,17 42-16,43 25 15,51 27 1,17 33-16,-35-9 16,-50-42-1,17-8-15,17 25 16,-9-9-1,-8-16-15,-18-26 16,1-8-16,-9-18 16,-8-16-1,-1-9-15,-16-9 16</inkml:trace>
-  <inkml:trace contextRef="#ctx0" brushRef="#br0" timeOffset="54856.6">6504 8666 0,'0'0'0,"-9"0"0,1 0 15,-18 0-15,-34 17 16,-51 51-16,-94 111 15,-59 59 1,85 0-16,42 77 16</inkml:trace>
-  <inkml:trace contextRef="#ctx0" brushRef="#br0" timeOffset="56620.6">11701 12731 0,'0'0'0,"0"0"16,0 0-1,0 17-15,0 17 16,17 17 0,1 17-16,7 34 15,26 26 1,9-1-16,-17-33 15,-18-34 1,1-18-16,-9-8 16,-8-17-1,-1-8-15</inkml:trace>
-  <inkml:trace contextRef="#ctx0" brushRef="#br0" timeOffset="56896.39">12435 12782 0,'-8'0'0,"-9"0"16,-51 26-16,-52 42 15,-25 25 1,-43 60-16,26 0 15,51-42 1,34-26-16,9 0 16,17 9-1,34-43-15</inkml:trace>
-  <inkml:trace contextRef="#ctx0" brushRef="#br0" timeOffset="57539.13">13024 12952 0,'0'0'0,"-8"0"0,-1 0 16,-16 17 0,-1 0-1,0 17-15,-8 17 16,0 9-16,0 8 15,8-17 1,9-9-16,17-16 16,0 0-1,17-1 1,35-16-16,16-1 16,-8-16-1,25-9-15,34-18 16,10-7-16,-10 8 15,-51 8 1,-8 1 0,25-1-16,1 9 15,-1 0 1,-8 0-16,-17 0 16,-18 0-1,-25 9-15</inkml:trace>
-  <inkml:trace contextRef="#ctx0" brushRef="#br0" timeOffset="57768.88">13707 12859 0,'0'0'0,"0"0"0,0 0 16,-8 8-1,-18 35-15,-51 93 16,-8 59 0,42-41-16,43-27 15,43 26 1,85 111-16</inkml:trace>
-  <inkml:trace contextRef="#ctx0" brushRef="#br0" timeOffset="65345.13">14655 8368 0,'0'0'0,"0"0"0,0 0 16,0 0-16,0 0 15,0 0 1,-9 17-16,0 17 16,1 0-16,-1 17 15,-8 0 1,9-8-1,-1 0-15,1-1 0,-1 1 32,9-9-32,0-9 15,0 1 1,17-9-16,17 8 16,1-8-1,24 0-15,1 9 16,-9-9-1,-8 0-15,-18 0 16,1 17 0,0 17-1,-18 8-15,-25 9 16,-8-8-16,-1-18 16,0 1-1,9-26-15,0-9 16,9-16-16,-1 8 31</inkml:trace>
-  <inkml:trace contextRef="#ctx0" brushRef="#br0" timeOffset="65555.81">14484 8555 0,'0'0'0,"17"9"0,51 25 16,77-8-16,86-18 16,50-42-1,1-51-15,51-60 16</inkml:trace>
-  <inkml:trace contextRef="#ctx0" brushRef="#br0" timeOffset="70191.16">12871 14747 0,'0'0'0,"0"0"0,0 0 32,0 0-32,25 17 15,27 17 1,16 25-16,9 9 15,16 17 1,1 17-16,-8 26 16,8 17-1,-18-18-15,-16-16 16,17-9 0,0-9-16,-9-25 15,0-8 1,9-18-16,-34-25 0</inkml:trace>
-  <inkml:trace contextRef="#ctx0" brushRef="#br0" timeOffset="70456.75">14066 14874 0,'0'0'0,"-26"9"0,-51 50 16,-59 43-1,-18 9-15,0 17 16,-8-1-16,26-8 15,67-68-15</inkml:trace>
-  <inkml:trace contextRef="#ctx0" brushRef="#br0" timeOffset="78988.36">15209 15682 0,'0'0'0,"0"0"0,0 0 15,0 0 1,0 0-16</inkml:trace>
-  <inkml:trace contextRef="#ctx0" brushRef="#br0" timeOffset="79605.03">15278 15146 0,'0'0'0,"0"-8"0,0-1 16,0 9-16,0 0 16,0-8-1,0 8-15,-9-9 16,0 1-1,-8-1 1,-8-8-16,-1 0 16,-16 17-16,-1 0 15,-25 26 1,-18 25-16,1 17 16,8 17-1,-8 17 1,16-8-16,18 8 15,17 0 1,8 8-16,26-8 16,18-8-1,16-9 1,17-9-16,0-7 16,34-1-1,26-26-15,9-33 16,16-26-16,10-26 15,-1-25 1,-17-34-16,-17-9 16,-35-8-1,-16 17-15,-26 9 16,-17-1 0,-25 1-16,-26-1 15,-17 9-15,-26 9 16,-9 16-1,-33 9 1,-18 17 0,78 25-16</inkml:trace>
-  <inkml:trace contextRef="#ctx0" brushRef="#br0" timeOffset="84877.39">7536 8828 0,'0'0'0,"17"17"0,9 17 15,8 0-15,9 17 16,8 8-1,-8 1 1,-1-9-16,1 0 16,-9-9-1,0 1-15,-17-26 16</inkml:trace>
-  <inkml:trace contextRef="#ctx0" brushRef="#br0" timeOffset="85171.48">7886 8768 0,'0'0'0,"-17"0"16,-17 17-16,-9 17 16,-25 26-1,-17 33 1,-1 9 0,-16 17-16,-9 26 15,-60 110-15</inkml:trace>
-  <inkml:trace contextRef="#ctx0" brushRef="#br0" timeOffset="86038.4">12888 12893 0,'0'0'0,"0"0"0,8 8 16,18 35 0,17 8-16,8 17 15,9 8 1,33 26-16,10-8 15,8-9 1,-17-17-16,-18-17 16,1-8-1,0-9-15,-17-17 16,-35-17 0</inkml:trace>
-  <inkml:trace contextRef="#ctx0" brushRef="#br0" timeOffset="86280.46">13946 12935 0,'0'0'0,"-17"0"0,-17 0 15,-34 9 1,-43 8-16,-9 17 15,-42 25 1,-26 35-16,9 33 16,42-7-1,35-27-15,17-8 16,59-42 0</inkml:trace>
-  <inkml:trace contextRef="#ctx0" brushRef="#br0" timeOffset="87500.34">14663 12595 0,'0'0'0,"0"0"0,-8 0 16,-1 9-1,0 8-15,-16 8 16,-18 18-16,-8 8 16,0 8-1,8 1 1,9-9-16,0-9 16,17 1-1,0-9-15,17-9 16,17 1-16,8-1 15,27 1 1,16-9-16,0 0 16,-25 0-1,-1 0 1,1 17-16,0 8 16,-9 27-1,-17 24-15,-26 35 16,1 16-1,-18-16-15,1-52 16,-9-25 0,8-25-16,9-18 15,8 1 1</inkml:trace>
-  <inkml:trace contextRef="#ctx0" brushRef="#br0" timeOffset="87746.95">14689 12621 0,'0'0'0,"0"0"0,8 8 15,52 26-15,85 9 0,60-1 32,85-25-32,86-17 0</inkml:trace>
-  <inkml:trace contextRef="#ctx0" brushRef="#br0" timeOffset="100431.59">2211 6565 0,'0'0'0,"0"0"0,0 0 32,-9 0-32,0 0 0,-8 0 15,-8 0 1,8 0 0,0 9-16,0-1 15,0 1 1,-9-1-16,0 1 15,-16-1 1,-10 9-16,1 9 16,17 0-1,-9 8-15,-16 25 16,-1 1-16,-17-1 16,9 18-1,-9 8 1,-8 0-1,33-9-15,10-8 16,8 0 0,25 0-16,-17-8 15,18-1-15,8-16 16,0-18 0,8 10-16,18-1 15,25-9 1,1 1-1,24-18-15,10 1 16,-27-1 0,-16-16-16,8-1 15,18-16-15,-10-1 16,-25 9 0,-8 0-1,-17 0-15,-1-9 16,-25-8-16,0 0 15,-9 0 1,-59 9 0,-26 8-16,-17 17 15,9 8 1,25 18-16,0-9 16,51 0-16</inkml:trace>
-  <inkml:trace contextRef="#ctx0" brushRef="#br0" timeOffset="102131.07">14509 15214 0,'0'0'0,"9"0"0,25 26 16,51 34-16,35 16 16,16 26-1,1 17 1,8 26-16,9-9 15,-26-17-15,-17-34 32,-9-17-32,-8-26 0,-9-16 15,-42-26 1</inkml:trace>
-  <inkml:trace contextRef="#ctx0" brushRef="#br0" timeOffset="102429.41">15943 14713 0,'0'0'0,"-42"17"0,-61 51 15,-50 34 1,-61 42-16,-33 26 16,-1 18-1,1 33-15,50-9 16,35-42 0,51-34-16,77-76 15</inkml:trace>
-  <inkml:trace contextRef="#ctx0" brushRef="#br0" timeOffset="102882.28">16541 14815 0,'0'0'0,"0"0"16,0 0-16,0 17 15,-17 93 1,-9 111 0,0 26-16,1 0 15,33-9-15,18 85 16</inkml:trace>
-  <inkml:trace contextRef="#ctx0" brushRef="#br0" timeOffset="115449.58">8748 9874 0,'0'0'0,"0"0"0,0 17 16,0 0-16,0 8 31,0 1-31,9 8 16,-9 8 0,-9 18-16,1-9 15,-1 8 1,1-16-16,-1-9 15,1 0 1,8-9-16,0 1 16,0-9-16,0-9 0,0 1 31,0-1-31,0 1 16,0-1-1,8 1-15,1-1 16,16 9-1,18 1 1,17-10-16,-1 9 16,10-8-1,-1-1-15,9 1 16,-9 8 0,0 0-16,1-9 15,-10 1 1,-16-1-16,0 1 15,-9-1 1,0 1-16,0-1 16,0 1-1,9-1-15,8 1 16,18-9 0,7 0-16,10-9 15,8 1-15,-1-1 16,18 1-1,-8-1-15,8 1 16,8-1 0,1 1-16,16-9 15,9 17 1,9 0 0,0 8-16,-1 1 15,1-9-15,17 8 16,-1 9-1,-8 0-15,26-8 16,-9 8 0,1-9-1,25 1-15,-1-1 16,-24 1 0,33-9-16,17 8 15,9-16-15,-8-1 16,-18 1-1,1 8-15,-18 8 16,0 9 0,-17 0-1,-33 9-15,-10-18 16,-16 9 0,-9-8-16,-43-9 15,-43 0 1</inkml:trace>
-  <inkml:trace contextRef="#ctx0" brushRef="#br0" timeOffset="116584.13">2518 10273 0,'0'0'0,"0"0"0,0 9 0,0 16 32,-9 9-17,1 9-15,-1 8 16,1 9-1,-1-1-15,9-16 16,0-1 0,0-16-16,0-1 15,0-16 1,0-1-16,0 1 16,0-1-1,0-8-15,-8 9 16,-9-1-1,-18 1-15,-24-1 16,-27 1 0,-8 8-16,-17 0 15,-42 0 1,-18 8-16,18 1 16,-44-9-1,18 0-15,17-17 16,-137-26-16</inkml:trace>
-  <inkml:trace contextRef="#ctx0" brushRef="#br0" timeOffset="120605.33">22310 16873 0,'0'0'0,"0"0"0,0 0 16,0 0 0,0 0-16,0 0 15,0 0 1,0 0-16,-8 8 16,-1 18-1,-8 42-15,-8 51 16,-10 9-1,1-9-15,0-17 16,17-26 0,9-33-16</inkml:trace>
-  <inkml:trace contextRef="#ctx0" brushRef="#br0" timeOffset="121788.83">19665 15095 0,'0'0'0,"17"0"0,0-8 0,17-1 16,0 9 0,17 0-1,26 0-15,17 17 16,0 9 0,0 8-16,-18 8 15,-24-8 1,-18 1-16,-17 16 15,-17 17-15,-51 25 16,-52 18 0,-8-18-1,-8-25-15,8-25 16,17-9-16,34-17 16,26-9-1,17 1 1,8-1-16,9-8 15,18 0 1,50 9-16,51-9 0,9 0 16,17 8-1,-17 1 1,-34 8 0,-8 0-16,-44 0 15</inkml:trace>
-  <inkml:trace contextRef="#ctx0" brushRef="#br0" timeOffset="122747.43">18854 12604 0,'0'0'0,"0"0"16,0 0-16,0 0 0,0 0 15,17 0 1,8 0-16,18 17 31,17 0-31,0 8 16,-18-8-16,-8 9 15,-8-9 1,-18 8 0,1 9-16,-26 17 15,-26 9 1,1-18-16,7-16 16,18-18-16,0 1 15,9-1 1,8 1-16,0-9 15,0 0 1,17 8 0,8 9-16,18 17 15,8 17-15,-8 0 16,-17 17 0,-1 17-1,-25 1-15,-17 7 16,-26-8-1,-8-25-15,-8-1 16,7-25-16,27-17 16</inkml:trace>
-  <inkml:trace contextRef="#ctx0" brushRef="#br0" timeOffset="123375.8">20125 10222 0,'0'0'16,"0"0"-16,0 0 0,0 0 15,-8 0 1,-1 17-16,1 9 0,-9 8 31,0 0-31,0 17 16,0 0-1,-1-8-15,1-1 16,0 1 0,9 8-16,8 0 15,0 0 1,8-9-16,9 1 16,9-1-1,17 1-15,16-18 16,27 1-1,8-18-15,0-16 16,8-9 0,-17-9-16,-25-8 15,-34 17 1</inkml:trace>
-  <inkml:trace contextRef="#ctx0" brushRef="#br0" timeOffset="123636.04">20569 10741 0,'-8'17'0,"-9"51"16,-35 60-16,-16 8 15,-9 17 1,9 0-16,25-34 16,18-17-1,8-17 1,17-42-16</inkml:trace>
-  <inkml:trace contextRef="#ctx0" brushRef="#br0" timeOffset="124652.27">22413 8343 0,'0'0'0,"0"0"16,0 8-16,0 18 16,-9 16-16,-8 35 15,-26 25 1,9-17-16,0-8 16,0-18-16,17-8 31,0-8-31,17-18 15,8 1 1,18-1-16,17-8 16,25-8-16,0-1 0,1 1 31,-10-9-15,-16 8-16,0 9 15,-1 9 1,-16 33-16,-18 1 15,-25 16 1,-8 1-16,-9-26 16,8-17-1,0-9-15,1-16 16,-9-43 0,17 0-16</inkml:trace>
-  <inkml:trace contextRef="#ctx0" brushRef="#br0" timeOffset="124881.96">22353 7969 0,'0'0'0,"9"17"0,50 42 15,35 35 1,17-26-16,17-9 16,26 1-1,8-9-15,137 0 16</inkml:trace>
-  <inkml:trace contextRef="#ctx0" brushRef="#br0" timeOffset="126050.81">25152 8751 0,'0'0'0,"0"0"0,0 9 16,18 8 0,-1 0-1,0 0-15,0-9 16,-9 1-16,1-1 15,-1 1 1,1-9-16,-9 0 0,0 0 31,0 0-31,-17 0 16,-34 0 0,-43 8-16,-9 9 15,9 9 1,26-9-1,25 0-15,18 0 16,16-9-16,26 9 16,43-8-1,60-1 1,42-16-16,-17-18 16,-9-8-1,-25-8-15,-34 8 16,-43 17-16,-8 8 15,-17 1 1,-1 8-16,-25 0 16,-17 17-1,-43 8-15,-25 18 16,25-1 0,34-8-16,9-8 15,17-1 1,17 1-16,8-18 15,10 1 1,16-1-16,0 1 16,8-18-1,-16 9-15,-17 0 16,-1 0 0,-8 0-16,-25 9 15,-27 25 1,-7 17-1,-10 0-15,10-17 16,24-9-16,18-16 16,17-1-1,9-16-15,42-9 16,26-26 0,17-8-16,-26 17 15,-25 9 1,-26 8-16,-17 0 15,-77 8 1,-128 9-16,-51 26 16,43 8-1,59 0 1,94-17-16,35-9 16,33-16-1,78-35-15,195-76 16</inkml:trace>
-  <inkml:trace contextRef="#ctx0" brushRef="#br0" timeOffset="126768.37">25639 7169 0,'0'0'15,"0"0"-15,9 0 0,-1 0 16,-8 0 0,-8 0-16,-10 17 15,-24 9 1,-27 8-16,-16 17 16,0 8-1,-35 35-15,-16 25 16,33 0-1,18-8-15,8 16 16,43 9 0,25-17-16,35-34 15,51-8 1,42-18-16,26-33 16,9-43-1,0-17-15,-26-26 16,-43-8-1,-42 0-15,-26 9 16,-26-1 0,-67 9-16,-87 26 15,-59 42 1,-8 25-16,-77 52 16</inkml:trace>
+  <inkml:trace contextRef="#ctx0" brushRef="#br0">4814 4950 0,'0'0'0,"0"0"0,0 0 16,0 0 0,17 0-1,0 0 1,0-9-16,0-8 15,17-42 1,-8-26-16,-1-18 16,9 27-1,26 8-15,26 8 16,33-33-16,1-9 16,-9-17-1,42 0 1,9 34-16,-8 8 15,8-8-15,34-9 16,9 18 0,34-1-1,-8 1-15,16 16 16,26 18-16,-8 16 16,-9-8-1,17 0 1,17 17-16,26 0 15,0 9 1,-35 8-16,35 0 16,-17 8-1,0 1-15,-26 8 16,-26 17-16,1 8 16,-26 18-1,-34-9 1,-35 0-16,-25 8 15,-25 1 1,-18-1-16,-25-16 16,-26-18-1,-9-8-15,-16-8 16,0-1 0,-1 1-16,-16-9 0,-10-17 15,-16-26 1,0-25-1,0-25 1,17-1-16,0 26 16,17 17-16,0 17 15,0 9 1,0 8 0,17 17-16,17 0 15,17 17 1,18 17-16,16 17 15,0 17 1,-8-9-16,-9 9 16,9 9-1,-17-18-15,-9 1 16,-17-17 0,-8-18-16,-18 1 15,-8-9 1,-42 17-16,-120 42 15,-154 35 1,-102 25-16,34-9 16</inkml:trace>
+  <inkml:trace contextRef="#ctx0" brushRef="#br0" timeOffset="5729.82">5292 4465 0,'0'0'0,"0"17"0,0 68 16,8 25-1,-8-25-15,-8-8 16,-1 8-16,9 0 15,0-25 1,0-18-16,0-16 16,17-9-16,9-26 31,16-33-31,1-18 16,0-42-1,17-42-15,8 16 16,-25 51-16,-18 35 15,-8 25 1,-8 25 0,-9 77-16,-34 43 15,-1 25 1,10-8-16,8-35 16,17-42-1,0-34-15,0-17 16,0-17-1,34-34-15,17-42 16,0 8-16,-25 34 16,0 0-16,-18 17 15,1 0 1,-1 17-16,-8 0 31,0 42-31,-8 43 16,8 9-16,0-26 15,8-26 1,9-16 0,17-18-16,35-42 15,7-51 1,18-25-16,9 8 16,-9 0-1,0 8-15,-18 26 0,-33 42 31,-17 9-31,-9 26 16,-9 16 0,1 35-16,-9 17 15,0-9 1,0-34 0,0-9-16,0-16 15,0-18 1,17-42-16,8-34 15,10-17 1,7 17-16,-8 42 16,-17 18-16,-8 33 15,0 43 1,-27 60-16,-16 42 16,9-8-1,8-52-15,17-33 16,0-26-1,0-26-15,8-25 16,43-42 0,18-35-16,-1 18 15,-17-1 1,-17 18 0,-17 33-16,-8 9 15,-1 17-15,-16 9 0,-9 50 31,-17 43-15,0-8-16,16-35 16,1-25-1,17-17-15,0-25 16,17-52-16,18-16 16,16-1-1,-8 9-15,-18 26 16,-16 25-1,-1 17-15,-16 42 0,-18 120 16,-25 178 15</inkml:trace>
+  <inkml:trace contextRef="#ctx0" brushRef="#br0" timeOffset="7809.75">8057 3963 0,'9'17'0,"33"77"0,26 33 16,35 26-16,68 68 15,-18-34-15,9-25 16,94 68-1,-34-60 1,9-34 0,-18 34-16,-76-8 15,8-18-15,26-8 16,-52-25 0,-68-69-1,-17-25-15,26-42 16,-26-1-16</inkml:trace>
+  <inkml:trace contextRef="#ctx0" brushRef="#br0" timeOffset="8093.66">10370 3844 0,'0'0'0,"-17"9"0,-60 59 16,-111 59-16,-170 86 16,-43 42-1,51-9-15,-86 129 31,-67 67-31,-35-25 16,205-162-16</inkml:trace>
+  <inkml:trace contextRef="#ctx0" brushRef="#br0" timeOffset="34482.26">1570 15682 0,'0'0'0,"0"0"0,0 0 15,0 9-15,0 8 16,0 8-1,18 26-15,-1 26 16,8 25 0,-8-17-16,0-17 15,9 26 1,-18 25-16,1 17 16,0-26-1,-9-42-15,0 17 16,8-17-1,1-17-15,-9-25 16,0-18 0</inkml:trace>
+  <inkml:trace contextRef="#ctx0" brushRef="#br0" timeOffset="34785.35">1417 16516 0,'0'0'0,"-9"0"0,9 17 16,-25 0-1,8 8 1,0 1-16,17-1 16,0 9-16,17 26 15,-9 16 1,26 1-1,-8-18-15,8-16 16,9-9 0,-1-17-16,10-34 15,-1-17 1,26-26-16,34-8 16,17-8-16,128-77 15</inkml:trace>
+</inkml:ink>
+</file>
+
+<file path=ppt/ink/ink2.xml><?xml version="1.0" encoding="utf-8"?>
+<inkml:ink xmlns:inkml="http://www.w3.org/2003/InkML">
+  <inkml:definitions>
+    <inkml:context xml:id="ctx0">
+      <inkml:inkSource xml:id="inkSrc0">
+        <inkml:traceFormat>
+          <inkml:channel name="X" type="integer" max="3968" units="cm"/>
+          <inkml:channel name="Y" type="integer" max="2240" units="cm"/>
+          <inkml:channel name="T" type="integer" max="2.14748E9" units="dev"/>
+        </inkml:traceFormat>
+        <inkml:channelProperties>
+          <inkml:channelProperty channel="X" name="resolution" value="128.41425" units="1/cm"/>
+          <inkml:channelProperty channel="Y" name="resolution" value="128.73563" units="1/cm"/>
+          <inkml:channelProperty channel="T" name="resolution" value="1" units="1/dev"/>
+        </inkml:channelProperties>
+      </inkml:inkSource>
+      <inkml:timestamp xml:id="ts0" timeString="2026-04-01T22:50:47.472"/>
+    </inkml:context>
+    <inkml:brush xml:id="br0">
+      <inkml:brushProperty name="width" value="0.05292" units="cm"/>
+      <inkml:brushProperty name="height" value="0.05292" units="cm"/>
+      <inkml:brushProperty name="color" value="#FF0000"/>
+    </inkml:brush>
+  </inkml:definitions>
+  <inkml:trace contextRef="#ctx0" brushRef="#br0">11736 4831 0,'0'0'0,"0"17"16,0 42-16,0 43 16,-9 43-1,-8 8 1,0 0-16,-9 0 15,-8-17 1,0-51-16,17-51 16</inkml:trace>
+  <inkml:trace contextRef="#ctx0" brushRef="#br0" timeOffset="1621.81">4430 4975 0,'0'0'0,"0"0"0,0 0 16,0 0 0,0 0-16,-9 0 15,-17 9 1,-42 33-16,-51 43 16,8 9-1,42-9-15,10-17 16,16-26-1,26-8-15,0-8 16,17-9 0,0-9-16,17-16 15,43-9 1,42-17-16,18-26 16,-35 9-1,-42 17-15,-18 17 16,-8 0-1,-8 9-15,-9 8 16,-34 34 0,-35 34-16,-41 25 15,16 1 1,42-9-16,27-34 16,8-17-1,17-17-15,34-17 16,68-51-1,18-9-15,-43 1 16,-18 8 0,-7 8-16,-18 18 15,-17 8 1,-9 17-16,-8 0 16,-34 25-1,-51 43 1,-35 43-16,18-9 15,42-34-15,43-17 16,17-34 0</inkml:trace>
+  <inkml:trace contextRef="#ctx0" brushRef="#br0" timeOffset="2563">12965 4967 0,'0'0'0,"0"0"0,0 0 16,17 17-1,0 0 1,8-9-16,27 9 15,41 0 1,10 0-16,-9 17 16,-26 0-1,-25 0-15,-26 17 16,-26 9-16,-51 16 16,-33 18-1,16-18 1,34-25-16,9-17 15,17-8 1,8-18-16,9 1 16,34-9-16,103 8 15,0-16 1,-35-1 0,43-16-16,-77 8 15</inkml:trace>
+  <inkml:trace contextRef="#ctx0" brushRef="#br0" timeOffset="3418.38">6051 5383 0,'0'0'0,"0"0"0,0 0 15,-8 0 1,-9 17-16,-26 17 16,-25 17-16,-43 26 15,8-1 1,52-16-16,17-17 16,17-9-1,0-17 1,17-9-16,0-8 15,34-17 1,34-34-16,26-17 16,-17 17-1,-26 0-15,-17 17 16,-8 17 0,-18 0-16,1 17 15,-18 0 1,-8 0-16,-17 0 15,0 8 1,17-8-16,0 0 16,17 0-1,0-8-15,26-35 16,25-25 0,-9 0-16,-16 26 15,-17 8-15,-1 17 16,1 17-1,-9 17 1,-9 34-16,-8 25 16,0 9-1,17 0-15,17-17 16,0-34 0</inkml:trace>
+  <inkml:trace contextRef="#ctx0" brushRef="#br0" timeOffset="4351.93">14270 4856 0,'0'0'0,"0"0"0,0 0 16,0 0-16,9 9 15,8-1-15,9 9 16,16 0 0,35 9-1,17-1-15,-34-8 16,-18-8-1,-16-1-15,0 1 16,-18-1-16,1 9 16,-9 0-16,-26 26 15,-34 8 1,9-9 0,17-16-16,17-9 15,8-9 1,9 1-16,35 8 15,24-9 1,1 9 0,25 9-16,1-1 15,-35 1 1,-17-18-16,-25 9 16,-26 17-16,-35 17 15,-67 26 1,-95-1-1,-101 9-15</inkml:trace>
+  <inkml:trace contextRef="#ctx0" brushRef="#br0" timeOffset="5360.92">7477 4856 0,'0'0'0,"0"0"0,-9 0 16,-8 34 0,-26 34-1,-33 17 1,16 9 0,0-9-16,0-17 15,9-17 1,17-17-16,17-9 15,17-16 1,0-1-16,17-16 0,17-1 16,43-25-1,-9 0 1,-34 17-16,-8 0 16,-18 17-16,-25 17 31,-34 34-31,-43 60 15,-59 42 1,8-8-16,59-69 16,44-42-16,24-8 15,10-18-15,34-16 16,102-43 0,0-26-1,-26 18 1,17 7-16,-67 35 0</inkml:trace>
+  <inkml:trace contextRef="#ctx0" brushRef="#br0" timeOffset="6189.51">15431 5409 0,'0'0'0,"0"0"15,0 0-15,0 0 16,0 0 0,0 0-16,0 0 15,0 0 1,0 0-16,0 0 15,0 8 1,9 9-16,-1 17 16,-8 17-1,9 17-15,-1 9 16,9-17 0,0-1-16,1-16 15,24-9 1,18-9-16,0-25 15,42-8 1,43-18-16,-17-8 16,-25 0-1,-44 0-15,-16 9 16,-17-10 0,-9-7-16,-9 25 15</inkml:trace>
+  <inkml:trace contextRef="#ctx0" brushRef="#br0" timeOffset="6417.25">16242 5324 0,'0'0'0,"-9"0"15,-8 42-15,-34 43 16,-43 51-1,-8 18 1,25-27-16,-25-16 16,-9-9-1,0-9-15,25-33 16,52-35 0</inkml:trace>
+  <inkml:trace contextRef="#ctx0" brushRef="#br0" timeOffset="7225.98">8501 4984 0,'0'0'0,"0"0"0,0 0 16,0 0-16,-9 17 15,-8 17-15,-17 25 16,-9-8-16,9-8 31,9-9-15,8-9-16,0 1 15,17-1 1,17-8-16,25 9 16,44-18-16,16-16 15,-34-1 1,-34-8-1,-8 0-15,0 9 16,-18 8 0,1 0-16,-18 8 15,-25 26 1,-17 9-16,-9-9 16,9 0-1,25-17-15,18-9 16,8-8-16,51-8 15,34-9 1,35-26-16,16-8 16,-42 9-1,-34 25 1,-26 17-16,-25 8 16,-35 35-16,-59 76 15,-35 93 1,-16-41-16,76-120 15</inkml:trace>
+  <inkml:trace contextRef="#ctx0" brushRef="#br0" timeOffset="8104.89">17804 4924 0,'0'0'0,"0"0"0,0 0 0,-9 0 16,-8 17-16,-17 0 31,-17 17-31,-17 17 16,25-8-16,0 8 15,1-9-15,-1 1 16,9-9 0,8-9-1,9 1 1,9-1-16,8 1 16,17-1-16,-9 1 31,9-9-31,17 0 0,1 0 15,-10 0 1,1 0 0,-18 0-16,-8 25 15,-17 26 1,0 9-16,0-17 16,0-9-1,17-26-15,0-8 16,0-17-16,0 0 15</inkml:trace>
+  <inkml:trace contextRef="#ctx0" brushRef="#br0" timeOffset="8343.2">17556 4831 0,'0'0'0,"26"8"0,51 35 15,17 8 1,-17-17 0,-9-9-16,17-8 15,-8-8 1,-17-18-16,-35 1 15</inkml:trace>
+  <inkml:trace contextRef="#ctx0" brushRef="#br0" timeOffset="9200.27">10421 5069 0,'0'0'0,"0"0"15,0 0 1,0 8 0,-17 18-16,-26 25 15,-42 8-15,-17 1 31,8-18-31,34-16 16,26-1-16,8 1 16,9-18-16,0 1 15,17-1-15,9-16 32,33-18-32,44-25 15,8-17 1,-26 26-16,-34 25 15,-8 0-15,-18 8 16,1 9 0,-35 26-1,-42 33-15,-43 26 16,25-17 0,35-25-16,9-18 15,25 1 1,8-18-16,9-8 15,26-8-15,50-18 16,27-16 0,-9 8-1,-43 17-15,-25 17 16,-18 0 0,-25 34-16,-85 85 15,-120 136-15</inkml:trace>
+  <inkml:trace contextRef="#ctx0" brushRef="#br0" timeOffset="21998.82">2671 5817 0,'0'0'0,"0"0"0,0 0 15,0 0 1,9 17-1,0 26 1,-1 42-16,-16 25 16,-18 9-16,0 9 15,-8-26 1,17-26-16,0-8 16,8-8-1,9-17 1,9-1-16,17-8 15,25-17 1,60-25-16,68-26 16,9-9-16,8-8 15,9 8 1,17 1-16,0-9 16,17 17-1,17 8-15,17 9 0,0 0 16,17 17 15,17 0-31,-8 0 16,8 9-1,-8 8-15,0-9 16,-17 9 0,-9-8-16,0-1 15,17 1 1,-8-9-16,-1-9 0,-16 9 31,-26 9-31,0 8 16,-34 8-1,17 26-15,-9-8 16,-68-1 0,0-7-16,9-1 15,-43-9 1,-17 9-16,-18-8 15,-16-1 1,-9 1-16,18-1 16,-18 1-1,-17-9-15,-8-9 16,-18 1-16,1-1 16,-9-8-1,-9-8-15,-16-26 16,-1-17-1,0-51-15,1-18 16,16 61 0</inkml:trace>
+  <inkml:trace contextRef="#ctx0" brushRef="#br0" timeOffset="25265.6">4455 3368 0,'0'0'0,"0"0"0,0 0 0,0 0 31,0 0-31,0 0 16,0 0-16,-8 0 0,-26 0 16,-9-9-1,-8 1-15,-9 8 31,-25 0-15,8 8-16,26 9 0,-1 9 31,-16 16-31,0 26 16,8 9 0,17 8-16,26-9 15,26 10 1,16 16-16,18-17 15,-9-26 1,26 1-16,17-1 16,8-25-1,18-17-15,-27-17 16,-24-17 0,-18-8-16,-9-1 15,-8-8-15,-17 0 16,-59-8-1,-61 8-15,-25 17 16,-9 8 0,-144-16-1</inkml:trace>
+</inkml:ink>
+</file>
+
+<file path=ppt/ink/ink3.xml><?xml version="1.0" encoding="utf-8"?>
+<inkml:ink xmlns:inkml="http://www.w3.org/2003/InkML">
+  <inkml:definitions>
+    <inkml:context xml:id="ctx0">
+      <inkml:inkSource xml:id="inkSrc0">
+        <inkml:traceFormat>
+          <inkml:channel name="X" type="integer" max="3968" units="cm"/>
+          <inkml:channel name="Y" type="integer" max="2240" units="cm"/>
+          <inkml:channel name="T" type="integer" max="2.14748E9" units="dev"/>
+        </inkml:traceFormat>
+        <inkml:channelProperties>
+          <inkml:channelProperty channel="X" name="resolution" value="128.41425" units="1/cm"/>
+          <inkml:channelProperty channel="Y" name="resolution" value="128.73563" units="1/cm"/>
+          <inkml:channelProperty channel="T" name="resolution" value="1" units="1/dev"/>
+        </inkml:channelProperties>
+      </inkml:inkSource>
+      <inkml:timestamp xml:id="ts0" timeString="2026-04-01T22:51:33.624"/>
+    </inkml:context>
+    <inkml:brush xml:id="br0">
+      <inkml:brushProperty name="width" value="0.05292" units="cm"/>
+      <inkml:brushProperty name="height" value="0.05292" units="cm"/>
+      <inkml:brushProperty name="color" value="#FF0000"/>
+    </inkml:brush>
+  </inkml:definitions>
+  <inkml:trace contextRef="#ctx0" brushRef="#br0">9167 8462 0,'0'0'0,"-9"0"0,-8 17 16,-17 34-16,-17 34 15,-18 51 1,1 26-16,17-26 16,17-9-1,25-67-15</inkml:trace>
+  <inkml:trace contextRef="#ctx0" brushRef="#br0" timeOffset="797.75">22882 17587 0,'0'-8'0,"-8"-35"0,-26-144 15</inkml:trace>
+  <inkml:trace contextRef="#ctx0" brushRef="#br0" timeOffset="1071.08">22344 17026 0,'0'0'0,"0"0"15,0 0-15,0 0 16,0 0 0,9 0-16,-9 0 15,9 0 1,-9 8-16,-18 43 16,-33 77-1,-26 68 1,-16 42-16,-35 76 15,-18 44-15</inkml:trace>
+  <inkml:trace contextRef="#ctx0" brushRef="#br0" timeOffset="3302.43">2006 8955 0,'0'0'0,"0"9"15,0 42 1,-9 42-16,-33 35 15,-27 25 1,18-34-16,25-34 16,1-42-1,8-18-15,17-16 16,0-18 0,8-25-16,52-68 15,34-17 1,-9 8-16,1-8 15,-35 26 1,-34 42 0,-9 17-16,-16 17 15,-60 34 1,-52 42-16,-25 35 16,0 16-1,25 9-15,35-34 16,51-34-16,0-25 15,25-26 1,26-43-16,43-59 16,43-42-1,-27-18-15,-7 35 16,-18 50 0,-17 35-1,-8 16-15,-18 18 16,-16 8-1,-10 34-15,-41 42 16,-18 26 0,17-25-16,35-26 15,16-26 1,18-16-16,76-26 16,-34 0-1</inkml:trace>
+  <inkml:trace contextRef="#ctx0" brushRef="#br0" timeOffset="4354.14">25221 8785 0,'-17'9'0,"-26"16"0,-25 18 0,-9-1 16,17-8-1,26-8 1,17-18-16,8 1 16,9-1-1,18 1-15,75-9 16,87 8-1,-27-8-15,-67 0 16,-18 0 0,-8 9-16,-26-1 15,-26 1 1,-16-1-16,-69 18 16,-85 16-1,-35 1-15,27-18 16,59 1-1,43-18-15,33 1 16,27-9 0,51-17-16,85-17 15,59-26-15,1-8 16,-26 0 0,-34 26-1,-51 16-15,-43 9 16,-17 17-1,-34 0-15,-60 0 16,-110 17 0,-27 17-16,44 0 15,42-8 1,51-1-16,51-16 16,26-9-1,34-9-15,120-16 16,85-1-1,94 1-15</inkml:trace>
+  <inkml:trace contextRef="#ctx0" brushRef="#br0" timeOffset="5764.29">10054 8649 0,'0'0'0,"0"0"0,0 0 15,0 0-15,0 0 16,0 0-1,0 0 1,9 0-16,8 0 16,17 9-1,17 8-15,9 0 16,-17 8-16,-1 9 16,-16 17-1,-1 9 1,-8 8-16,-8 0 15,0-9 1,-9-8-16,0-8 0,-9-1 31,0-8-31,1 9 0,-9-18 16,0 1 0,17-18-1,0 1 1,0-1-16,8 1 0,44-18 31,50 1-31,26-1 0,-17 9 31,-17-8-31,-43 8 16</inkml:trace>
+  <inkml:trace contextRef="#ctx0" brushRef="#br0" timeOffset="6822.24">20211 15104 0,'0'0'0,"0"0"0,34 0 0,26 17 15,25 0 1,9 8-1,-34 1-15,-18-1 16,-8 10 0,-8-1-16,0 0 15,-18 0 1,1 34-16,-26 8 16,-17-16-1,-26-1-15,0 1 16,-8-9-16,-1-17 15,18-9 1,17-8-16,17-8 16,0-1-1,17 9 1,8 9-16,27 16 16,67 18-1,9-9-15,43 0 16,76 8-1,94 9-15</inkml:trace>
+  <inkml:trace contextRef="#ctx0" brushRef="#br0" timeOffset="9458.41">27739 10392 0,'0'0'0,"0"0"16,-17 9-16,-43 33 15,-26 35 1,-7-9-16,-1-17 15,25 17-15,18-8 16,17-18 0,17-8-1,17-8-15,51 16 16,111-8 0,69-17-16,16-25 15,-59-26-15,-60 0 31,-51 8-31,-43 18 16,-17 8-16,-34 0 16,-77 25-1,-102 26-15,-43 9 16,34 8 0,60-17-16,60-26 15,42 1 1,17-9-16,18-9 15,25 9-15,51 0 16,43-8 0,0-9-1,-9-9-15,-25 1 16,-26-1 0,-25 9-16,-17 0 15,-26 0 1,-77 17-1,-120 26-15,-110 25 16</inkml:trace>
+  <inkml:trace contextRef="#ctx0" brushRef="#br0" timeOffset="10418.07">3312 8853 0,'0'0'0,"0"0"0,-9 9 16,-8 16 0,-9 26-1,-16 17-15,-1-8 16,9-18-16,17-16 15,0-1 1,8-16 0,9-1-16,0-8 15,17-17 1,43-42-16,8-35 16,-25 1-16,0 25 15,-18 8 1,-16 26-16,-9 17 15,-9 17 1,-51 34 0,-68 85-16,-8 9 15,59-35-15,34-33 16,26-26 0,17-17-1,17-9-15,35-16 16,50-43-16,9-26 15,-51 1-15,-26 33 32,-17 18-32,-9 8 15,1 17-15,-9 17 16,0 51 0,0 0-1,0-43-15</inkml:trace>
+  <inkml:trace contextRef="#ctx0" brushRef="#br0" timeOffset="12321.77">19613 12459 0,'0'0'0,"0"0"16,0 0-16,0 0 15,0 0 1,0 9 0,0 8-16,0 0 15,26 8-15,34 9 16,8-8-1,-8-1-15,-1 1 16,-24-1 0,-10-8-1,-25 17-15,-34 17 16,-43 26 0,-25-9-16,-9-17 15,-43 8 1,18-16-16,50-18 15,35-8-15,17-8 16,17-1 0,0 1-1,0-1-15,17-8 16,0 0 0,0 0-16,8 0 15,26 0 1,43 9-16,17 25 15,-9 17-15,-25 17 16,-26-8 0,-25-1-1,-9-16-15,-17 8 16,-43 8 0,-42-8-16,-26-34 15,-69-42 1,-25-9-16,-68-9 15</inkml:trace>
+  <inkml:trace contextRef="#ctx0" brushRef="#br0" timeOffset="13925.16">4438 8921 0,'0'0'0,"0"0"15,-8 9 1,-18 16 0,-8 9-16,-9 17 15,1-8 1,7-1-16,1-16 16,17-1-1,9-16-15,8-1 16,17-8-1,34 9-15,9-18 16,25-16 0,17-18-16,-25 9 15,-43 17 1,-8 0-16,-17 17 16,-1 0-1,-34 26-15,-16 25 16,-9 0-1,-1 8-15,1-8 16,17-8 0,17-18-16,17-16 15,0-9 1,0-9-16,17-8 16,26-17-1,25-25-15,17-18 16,-16 1-1,-18 16-15,-26 26 16,-16 17 0,-1 17-16,-16 0 15,-43 9 1,-26 25-16,17 17 16,-8-9-1,25-16-15,26-18 16,9 1-1,8-18-15,0-33 16,42-35 0,27-8-16,-1 17 15,-17 26 1,-17 25-16,-17 8 16</inkml:trace>
+  <inkml:trace contextRef="#ctx0" brushRef="#br0" timeOffset="15146.79">28345 13369 0,'0'-8'0,"-9"-27"0,0-7 16,1 8-1,-1 0-15,1 0 16,-35 0-1,-51 0-15,-34 8 16,26 26 0,59 0-16,18 0 15,8 0 1,-1 0 0,27 0-16,76 0 15,43 0 1,17-8-16,9-9 15,-34 0-15,-44 8 16,-41 9 0,-10-8-1,-16 8-15,-43 0 16,-43 17 0,-43 0-16,-25 8 15,34 1 1,34-18-16,43 1 15,17-1 1,17-8-16,26-8 16,34-18-1,-1 1-15,18-1 16,0 1 0,-26 8-16,-25 8 15,-18 9 1,-16 0-1,-35 17-15,-68 17 16,-51 9-16,42-9 16,69-9-1,26-8-15,16-8 16</inkml:trace>
+  <inkml:trace contextRef="#ctx0" brushRef="#br0" timeOffset="16199.07">11599 8607 0,'0'0'0,"0"0"0,17 17 15,9-9 1,8 9 0,0-8-16,0-1 15,-8-8 1,-1 9-16,1-1 16,0 1-16,-9-9 15,-9 8 1,1 9-16,-1 9 15,-16 8 1,-9 25-16,-26 9 16,9-17-1,0-17 1,17-8-16,-1-1 16,18-8-1,0 0-15,26-8 16,17 8-16,17 0 15,-26-9 1,-9 1 0,1-1-16,-18 1 15,1-1 1,-26 18-16,-34 25 16,-52 25-16,1-16 15,59-35 1,26-16-1,9-9-15</inkml:trace>
+  <inkml:trace contextRef="#ctx0" brushRef="#br0" timeOffset="17143.99">13332 8751 0,'0'0'0,"0"0"15,-9 0-15,-8 26 16,-9 16 0,-8 9-16,0 0 15,17 9 1,0-1-16,0-16 16,8-18-1,9 1-15,0-9 16,17 0-1,52 0-15,50 0 16,-8-17 0,-51-9-16,0-8 15,16-8 1,-16-1-16,-26 9 16</inkml:trace>
+  <inkml:trace contextRef="#ctx0" brushRef="#br0" timeOffset="17366.87">13528 8921 0,'-9'17'0,"-25"51"0,-43 77 15,-8 50 1,17-25 0,25-59-16,26-68 15</inkml:trace>
+  <inkml:trace contextRef="#ctx0" brushRef="#br0" timeOffset="18350.5">20168 10205 0,'0'0'0,"-8"9"0,-10 25 16,-33 25-16,0 1 16,0-1-1,8-16 1,9 0-16,8-18 15,9 1-15,0-1 16,17 9 0,26 0-16,34 0 15,8 0 1,17 0 0,43-8-16,-17-1 15,-17-16 1,-17-1-16,-26-16 15,-25-1 1,-9 1-16</inkml:trace>
+  <inkml:trace contextRef="#ctx0" brushRef="#br0" timeOffset="18586.62">20578 10299 0,'-9'0'0,"-25"59"15,-68 78 1,-9 24 0,42-25-16,10 9 15,-18 8 1,-8-43-16,8-42 15,34-42-15</inkml:trace>
+  <inkml:trace contextRef="#ctx0" brushRef="#br0" timeOffset="19634.43">6085 8998 0,'0'0'0,"0"0"16,0 8-16,-8 18 15,-26 16 1,-17 18-16,-1-9 16,10-9-1,16-16-15,9-9 16,17-9 0,17-16-16,26-18 15,16-33 1,44-52-1,25 1-15,-51 25 16,-26 42-16,-17 18 16,-17 8-1,-8 8 1,-18 9-16,-59 43 16,-35 50-1,-16 26-15,-1-8 16,44-35-16,33-25 15,17-17 1,26-25-16,9-9 16,34-9-1,8-25-15,26-17 16,25-25 0,-8-1-16,-43 35 15,-25 16 1,-9 9-1,-9 17-15,-33 34 16,-35 51-16,-8 68 16,16 51-1,35-76-15,17-102 16</inkml:trace>
+  <inkml:trace contextRef="#ctx0" brushRef="#br0" timeOffset="20753.47">27704 15036 0,'0'0'0,"0"0"0,0 0 15,0 0 1,0 0-1,0 0-15,-8 0 16,-1 0-16,-16 17 16,-9 0-1,-9 17-15,-25 0 16,-18 8 0,27-8-16,24-8 15,18 0 1,0-1-16,0-8 15,17 0 1,17 0 0,26 0-16,25-8 15,18-1 1,-27-8-16,-16 0 16,-17 0-1,-18 0-15,1 0 16,-1 0-1,-25 0-15,-26 0 16,-8 0 0,-8 9-16,16-1 15,17-8 1,18 0-16,16 0 16,61 0-16,41 0 15,27 0-15,-17 0 16,-61 0-1,-25 0 1,-17 0 0,-42 9-16,-265 42 0,-111 17 31</inkml:trace>
+  <inkml:trace contextRef="#ctx0" brushRef="#br0" timeOffset="22979.29">22336 8326 0,'0'0'0,"0"0"0,0 0 16,0 0-16,0 17 15,-9 25 1,-8 43-16,-42 35 15,-27 16 1,-16-9-16,8-33 16,43-26-1,17-26 1,17-8-16,8-17 16,9-8-16,9-9 15,33 8 1,52 1-1,0-9-15,-34 0 16,-26 8 0,-9 1-16,1 8 15,-9 17-15,9 68 16,-9 68-16,-26-51 16,-16-59-1,-9-9 1,-1-17-1,18-17-15,9-17 16,8 0 0,0 0-16</inkml:trace>
+  <inkml:trace contextRef="#ctx0" brushRef="#br0" timeOffset="23208.55">22797 8343 0,'0'0'0,"8"17"0,9 34 16,9 8-1,42 1-15,60 17 16,9-18-1,17-25-15,170 17 16</inkml:trace>
+  <inkml:trace contextRef="#ctx0" brushRef="#br0" timeOffset="23846.64">14902 8624 0,'0'0'0,"0"0"0,-9 8 15,-8 18-15,-8 16 16,-1 18 0,1 25-16,-18 25 15,0-25 1,9-25-16,9-35 16,7 1-1,1-18-15,9 1 16,8-1-1,0-8-15</inkml:trace>
+  <inkml:trace contextRef="#ctx0" brushRef="#br0" timeOffset="24120.67">14595 8709 0,'0'0'0,"0"0"0,0 0 15,0 0-15,0 0 16,0 0 0,0 0-16,0 0 15,0 0 1,0 0-1,0 0-15,0 0 16,0 0 0,0 0-1,8 0-15,1 0 0</inkml:trace>
+  <inkml:trace contextRef="#ctx0" brushRef="#br0" timeOffset="24721.76">14817 8726 0,'0'0'0,"0"0"31,-9 0-31,1 17 16,-1 0 0,1 8-16,-1-8 15,0 9 1,1-1-16,-1-8 15,1 0 1,-1 9-16,1 8 16,-9-9-1,8 1-15,9-1 16,0 1 0,0-1-16,9 1 15,-1-1 1,1-8-16,-1 0 15,9 0 1,0 0-16,1 17 16,-1 17-1,-9 9-15,-16-1 16,-9 1 0,8-9-16,0-17 15,1-25 1,-18-9-16,1-26 15,16 9 1</inkml:trace>
+  <inkml:trace contextRef="#ctx0" brushRef="#br0" timeOffset="24925.12">14996 8666 0,'0'0'0,"0"0"0,8 9 16,52 33-1,8 18-15,35-9 16,76-9 0,-8-33-16,17-35 15,162-33-15</inkml:trace>
+  <inkml:trace contextRef="#ctx0" brushRef="#br0" timeOffset="26005.72">27218 6685 0,'0'0'0,"0"0"0,0 0 16,-9-9-16,-16 1 16,-52-10-1,-60 10-15,9 8 16,-17 26 0,-85 33-16,59 18 15,26 25 1,-26 8-1,18 18-15,42-1 16,60 1 0,25-18-16,35-8 15,59 1-15,60-18 16,-26-43 0,-25-25-1,25-17-15,-16-17 16,-18-8-1,-34-1-15,-17 1 16,-25-26 0,-35-9-16,-162 0 15,-162-16 1</inkml:trace>
+</inkml:ink>
+</file>
+
+<file path=ppt/ink/ink4.xml><?xml version="1.0" encoding="utf-8"?>
+<inkml:ink xmlns:inkml="http://www.w3.org/2003/InkML">
+  <inkml:definitions>
+    <inkml:context xml:id="ctx0">
+      <inkml:inkSource xml:id="inkSrc0">
+        <inkml:traceFormat>
+          <inkml:channel name="X" type="integer" max="3968" units="cm"/>
+          <inkml:channel name="Y" type="integer" max="2240" units="cm"/>
+          <inkml:channel name="T" type="integer" max="2.14748E9" units="dev"/>
+        </inkml:traceFormat>
+        <inkml:channelProperties>
+          <inkml:channelProperty channel="X" name="resolution" value="128.41425" units="1/cm"/>
+          <inkml:channelProperty channel="Y" name="resolution" value="128.73563" units="1/cm"/>
+          <inkml:channelProperty channel="T" name="resolution" value="1" units="1/dev"/>
+        </inkml:channelProperties>
+      </inkml:inkSource>
+      <inkml:timestamp xml:id="ts0" timeString="2026-04-01T22:52:30.212"/>
+    </inkml:context>
+    <inkml:brush xml:id="br0">
+      <inkml:brushProperty name="width" value="0.05292" units="cm"/>
+      <inkml:brushProperty name="height" value="0.05292" units="cm"/>
+      <inkml:brushProperty name="color" value="#FF0000"/>
+    </inkml:brush>
+  </inkml:definitions>
+  <inkml:trace contextRef="#ctx0" brushRef="#br0">15252 10971 0,'0'0'0,"-9"8"15,1 9-15,-1 0 16,1 9 0,-1-1-16,1 1 15,-1-1 1,1-8-16,-1 9 16,-8-1-1,0 9-15,0-8 16,0-1-16,8-8 15,1-8 1,8-1 0,0 1-16,0-1 15,0-8 1,17 9-16,17-1 16,9 1-16,25-9 15,9-9 1,8 1-1,9-9-15,-9 8 16,-16 9 0,-18 0-16,17 0 15,17 9 1,1-1-16,8 1 16,0-9-1,-18 8 1,27 1-16,8-1 0,-9 1 15,1-9 1,-10-9 0,1 1-16,17 8 15,-8 0 1,-1 0-16,-8 0 16,-17 0-1,17 8-15,0 1 16,0-1-1,8 1 1,-17-1-16,-8-8 16,8-8-1,-8-1-15,-17 9 16,-17 0-16,-1-8 16,1 8-1,-17 0 1,-1 0-16,1 0 0,-18 0 15,1 0 1,-1 0 0,-8 0-16,9 0 15,-9 0 1,9-9-16,-1 1 16,9-18-1,0-8-15,0-8 16,17-35-1,-17 26-15</inkml:trace>
+  <inkml:trace contextRef="#ctx0" brushRef="#br0" timeOffset="1802.15">20697 9636 0,'0'0'0,"0"0"0,-8 0 31,-9 0-31,-26 17 16,-17 0 0,-17 8-16,-25 26 0,8 0 15,17 26 16,-8 16-31,-17 9 16,16-17 0,-8 0-16,17-17 15,35-17-15,16-17 0,9-8 32,0-18-17,9-16-15,-1-9 16,0-17-1,1-26-15,8-8 0,0 26 32,0 16-32,0 9 15,0 9 1,0 8-16,-9 0 16,1 25-16,-18 9 15,9 9 1,0-1-1,17 1-15,0-1 16,9-8 0,-1-8-16,26 8 15,43-8-15,68-35 0,162-42 32</inkml:trace>
+  <inkml:trace contextRef="#ctx0" brushRef="#br0" timeOffset="6906.18">17591 11507 0,'0'0'0,"0"0"0,8 8 16,1 9-1,-1 0-15,-8 26 16,0 16-1,0 9-15,-8-17 16,-1-17 0,-8 9-1,0-1-15,8-8 16,9 9-16,0-9 16,9 0-1,8 0-15,9-9 16,8 1-1,34-9 1,17-17-16,-16-26 16,42-16-1,42-9-15,-16 17 16,-26 17 0,8 0-16,35 0 15,-1 17-15,-42 0 16,17 8-1,35 1-15,-18-1 16,-43 1 0,-8 8-1,26 8-15,8-8 16,-18 9 0,-33-18-16,-34 1 15,-17-1 1,-9-8-16,-9 0 15,1-8-15,-1-1 16,1 1 0,-1-9-1,1 8-15</inkml:trace>
+  <inkml:trace contextRef="#ctx0" brushRef="#br0" timeOffset="10380.29">21252 12051 0,'0'0'0,"0"0"0,0 0 15,0 0-15,0 0 16,9-9-1,33 1 1,27-18 0,41 9-16,-7 0 15,59 0 1,86 0 0,50 0-16,1 0 15,102-8 1,51-9-16,-85-9 15,9 9 1</inkml:trace>
+  <inkml:trace contextRef="#ctx0" brushRef="#br0" timeOffset="17063.58">14194 13854 0,'0'0'0,"17"0"0,68 0 16,69 0 0,42 0-1,34 8-15,-8-8 0,34-8 16,111 8 0</inkml:trace>
+  <inkml:trace contextRef="#ctx0" brushRef="#br0" timeOffset="18626.66">16925 14577 0,'0'0'0,"0"0"15</inkml:trace>
+  <inkml:trace contextRef="#ctx0" brushRef="#br0" timeOffset="20123.65">15465 14509 0,'0'0'0,"0"0"0,0 0 0,0 0 31,0 0-15,9 8-16,-9 9 16,0 9-1,0 25-15,0 0 16,8 8-16,1-8 16,8-8-1,0-1 1,17 1-16,17-1 15,1-16 1,-18-18-16,8 1 0,35-18 31,26-8-31,25-8 16,-17 8 0,-35 8-16,27 1 15,25-1-15,0 9 0,-17-8 31,-17-1-15,25 1-16,26-9 16,-17 0-1,-34 8-15,17 9 16,26 0 0,8 0-16,-34 0 15,-9 17-15,43-8 0,18-1 31,-35-8-15,0 0-16,34-8 16,-9-1-1,-25 9-15,9 0 16,51 0 0,-35-8-16,-8-1 15,35 1 1,-18-9-16,-26 0 15,1 8 1,25 1-16,-25 8 16,-43 8-1,8-8-15,26 9 16,-9-1-16,-8 1 16,-34-1-1,-26 1-15,9-1 16,8 1-1,-8-1 1,-9-8-16,-8 0 16,-17 0-1,-1-8-15,-16-1 16,-1-8-16,1-25 16,-18-18-1,1-16-15,-9-52 16,-34-161-1</inkml:trace>
+  <inkml:trace contextRef="#ctx0" brushRef="#br0" timeOffset="22112.53">18000 15487 0,'0'0'0,"0"0"0,0 0 16,0 0 0,0 0-1,0 0-15,0 0 16,0 0-16,17 8 15,26 1 1,34-1 0,51-8-16,-34-8 15,17-18 1,85-8-16,-34 0 16,17 0-1,69 0-15,-52 9 16,35-18-16,127-25 15</inkml:trace>
+  <inkml:trace contextRef="#ctx0" brushRef="#br0" timeOffset="23091.09">21679 15699 0,'0'0'0,"0"0"15,0 0-15,0 0 16,17 0-1,0 0 1,60-8-16,110 8 16,70-9-1,50 1-15,120-18 16,8-8-16,-34 0 16,34 0-1,-17 9 1,-25-9-16</inkml:trace>
+  <inkml:trace contextRef="#ctx0" brushRef="#br0" timeOffset="29425.2">15252 16286 0,'0'0'0,"0"0"0,0 0 15,0 0-15,0 9 16,-9 33-16,1 26 15,-1 9 1,-8-9 0,0-17-1,17-26-15,0 1 16,0-18-16,0 1 16,9-1-16,-1 1 15,1-1 1,16 1-1,35 8 1,68-9-16,9 1 16,-35-9-16,9 0 15,77 0-15,-26 0 32,-8 0-32,76 0 0,-42 8 31,17-8-31,34 9 15,-52-9 1,52 0-16,-34 8 16,0 1-16,43 8 15,-61 8 1,44 9-16,-43 0 16,-69-8-16,43 8 15,-8-9 1,-43-16-16,-51-1 31,-26-16-31,-9-1 16,-8-25-16,-8 0 15,-9-25 1,0 16 0</inkml:trace>
+  <inkml:trace contextRef="#ctx0" brushRef="#br0" timeOffset="32367.18">21235 17145 0,'0'0'15,"0"0"-15,0 0 0,0 0 16,0 0-1,0 0-15,-9 0 16,-16 0 0,-26 17-16,-26 17 15,-17 9 1,9 8 0,16 0-16,10 17 15,-10-9-15,18-16 16,8-18-1,9-16-15,9-1 16,8-16 0,-9-9-16,9-9 15,0-8 1,8 17-16,1 0 16,-1 0-1,9 9-15,0 8 16,0 0-1,-17 8-15,-26 26 16,-16 43 0,-1 8-16,17-17 15,26-34 1,0-9-16,17 1 16,9-18-1,59 9-15,77-8 16,162 16-16</inkml:trace>
+</inkml:ink>
+</file>
+
+<file path=ppt/ink/ink5.xml><?xml version="1.0" encoding="utf-8"?>
+<inkml:ink xmlns:inkml="http://www.w3.org/2003/InkML">
+  <inkml:definitions>
+    <inkml:context xml:id="ctx0">
+      <inkml:inkSource xml:id="inkSrc0">
+        <inkml:traceFormat>
+          <inkml:channel name="X" type="integer" max="3968" units="cm"/>
+          <inkml:channel name="Y" type="integer" max="2240" units="cm"/>
+          <inkml:channel name="T" type="integer" max="2.14748E9" units="dev"/>
+        </inkml:traceFormat>
+        <inkml:channelProperties>
+          <inkml:channelProperty channel="X" name="resolution" value="128.41425" units="1/cm"/>
+          <inkml:channelProperty channel="Y" name="resolution" value="128.73563" units="1/cm"/>
+          <inkml:channelProperty channel="T" name="resolution" value="1" units="1/dev"/>
+        </inkml:channelProperties>
+      </inkml:inkSource>
+      <inkml:timestamp xml:id="ts0" timeString="2026-04-01T22:53:23.108"/>
+    </inkml:context>
+    <inkml:brush xml:id="br0">
+      <inkml:brushProperty name="width" value="0.05292" units="cm"/>
+      <inkml:brushProperty name="height" value="0.05292" units="cm"/>
+      <inkml:brushProperty name="color" value="#FF0000"/>
+    </inkml:brush>
+  </inkml:definitions>
+  <inkml:trace contextRef="#ctx0" brushRef="#br0">14979 10648 0,'0'0'0,"0"0"0,8 0 0,35 0 0,17 0 16,17-9 15,51-8-31,68-8 16,-34-9-1,-8 0-15,51 0 16,-60 8 0,0 9-16,8 8 15,-25 9 1,-17-8-16,-42-1 15,-18-8 1,0-8-16,-25 8 16,-18 17-1</inkml:trace>
+  <inkml:trace contextRef="#ctx0" brushRef="#br0" timeOffset="304.13">16626 10180 0,'9'-9'0,"42"-8"15,77-17-15,51 0 16,-8 17 0,-35 9-16,-25 8 15,-17 0 1,-34 0-16,-17 8 15,-18 1-15,-16 16 16,-43 60 0,-103 94-1,-119 76-15,17-34 16,-9 0 0</inkml:trace>
+  <inkml:trace contextRef="#ctx0" brushRef="#br0" timeOffset="28415.75">15909 4754 0,'0'0'0,"0"8"0,-8 27 16,-1 33-1,-8 8 1,0 1-16,17-1 16,-9 1-16,9-18 15,0 1 1,0-9-16,0-34 16</inkml:trace>
+  <inkml:trace contextRef="#ctx0" brushRef="#br0" timeOffset="29077.12">17232 4499 0,'0'0'0,"0"0"16,0 0-1,17 17-15,17 0 16,0 8-1,-8 1 1,0-9-16,-18 0 16,1-9-16,-1 1 15,1 8-15,-1 0 16,1 17 0,-26 17-1,-17 26-15,-18-18 16,-7 1-1,16-9 1,17-17-16,9-9 16,17 1-1,0-1-15,43 1 16,17-1-16,8 1 16,34 8-1,86-9 1,145 9-16</inkml:trace>
+  <inkml:trace contextRef="#ctx0" brushRef="#br0" timeOffset="39932.12">18546 4116 0,'0'0'0,"0"0"0,0 0 16,0 0-1,0 0 1,0 0 0,0 0-16,0 0 15,0 0 1,0 0-16,0 0 15,0 0 1,0 0-16,0 0 16,18 0-1,16 17-15,17 0 16,26 9 0,25-1-16,9-8 15,26 0 1,50-8-16,27-1 15,25-8 1,17-8-16,51-9 16,26-17-1,-26 0-15,60 0 16,9 8 0,-43 18-16,85 8 15,0 8 1,-25 18-16,25-18 15,17-8 1,17-17-16,-42 9 16,0-9-1,-18-9-15,10 9 16,16 0 0,-34-8-16,-9 8 15,-8-9 1,9-8-16,-35 17 15,-8 0 1,17-25-16,-43-1 16,-25 17-16,-17-8 15,-52 0 1,-42 9-16,-52 16 16,-42-8-1,-26 17 1,-25 0-16,-18 0 15,1 0-15,-1 0 16,1 0 0,-1 0-1,-8 0-15,0 0 16,0 9-16,0 42 16,-8 43-1,-9 42 1,-9 34-16,-16 25 15,-10 9 1,-7 17-16,7 18 16,18-1-16,9-9 15,8-8 1,17-8 0,0-34-16,0-26 15,8-17 1,-8-26-16,9-25 15,-1-25 1,-8-18-16,0-16 16,0-9-1,0-8 1,0-1-16,0 1 0,-8-1 16,-9 1-1,-26-18 1,-34 1-16,-42-9 15,-35 0 1,9-18 0,-51 1-16,-1 0 15,18 0-15,-43 0 16,-8 9 0,-35-1-1,-8 1-15,-26-1 16,-8 9-1,-9-8-15,-34 8 16,43 8-16,8 1 16,-8 8-1,-26 8 1,-42 1-16,50 8 16,-8-9-1,-8-16-15,25-1 16,-25-8-16,25 0 15,0 0 1,-59 17-16,59-8 16,9-1-1,17 1-15,16-18 16,-7-8 0,-1-17-1,9 0-15,0-8 16,8 16-1,-16 1-15,-10 8 16,18 17 0,17 0-16,9-17 15,16 0 1,78 0-16,-9-9 16,25 9-1,94 17-15</inkml:trace>
+  <inkml:trace contextRef="#ctx0" brushRef="#br0" timeOffset="51306.49">3090 5502 0,'0'0'0,"0"0"0,0 9 16,-9 42 0,1 34-16,-1 17 15,1-25 1,-1-26-16,9-9 15,0-16-15,0-1 16,9 1-16,-1-1 16,9-16-1,9-1-15,16-8 16,-16 0 0</inkml:trace>
+  <inkml:trace contextRef="#ctx0" brushRef="#br0" timeOffset="53479.14">3371 5485 0,'0'0'0,"0"0"0,-8 0 31,-1 0-31,-8 26 16,-8 25-1,7 34-15,1 17 16,17-25-1,0-26-15,17-17 0,1 17 16,-1 8-16,0 1 16,25 16-1,18 1 1,-9-18-16,-8-8 31,0-8-31,-18-1 16,9-16-1,1-1-15,16 1 16,-9-18 0,35 9-16,68-8 15,18-9 1,-1-9-16,43 18 16,-9-1-1,-8 1-15,51-1 16,-35 1-1,70 8-15,-27 0 16,26 8 0,0 1-16,-8 8 15,-1-8 1,-76-1-16,68 9 16,-77 0-1,69-8-15,-35-18 16,-76-8-1,102-17-15,-51-17 16,-94 9 0,85-26-16,9 8 15,-95 26 1,18-9-16,43 9 16,0 9-1,-52 16-15,-42 1 16,17-9-1,25-9-15,-8 1 16,0 8 0,-17 0-16,-26 8 15,-8-8 1,-18 0-16,1 0 16,-18 0-1,1 0-15,-1 0 16,1 0-1</inkml:trace>
+  <inkml:trace contextRef="#ctx0" brushRef="#br0" timeOffset="54386.31">15568 5902 0,'0'0'0,"0"0"0,0 9 15,-9 8 1,-8 34 0,-8 42-16,-1 18 15,9-18 1,17-25 0,17-17-16,9-8 15,42 8 1,9-9-16,-1 1 15,52 8-15,60-8 16,-68-26 0,-9-9-16,68 1 15,-8-1-15,-78 1 32,10 8-32,51 17 15,25 0-15,-68 0 16,-52-17-1,27 17-15,16 8 16,-8-16-16,-17-18 16,-26 1-1,-25-1-15,-1-8 16,10-8 0,-1-26-1,-9-26 1,1-16-16,-1-9 15,-7-18-15,-1-75 16,8-145-16</inkml:trace>
+  <inkml:trace contextRef="#ctx0" brushRef="#br0" timeOffset="55972.34">19571 6685 0,'0'17'0,"0"85"15,0 59-15,17 1 16,17-26 0,9-9-16,8-16 15,17-18 1,34-7-16,61-1 15,50-26 1,52-25-16,59-42 16,17-43-1,35-17-15,16 0 16,10-1 0,7 1-16,27 9 15,16 16 1,17 18-1,52 8-15,8 25 16,17 9-16,-8 17 16,0 17-1,-18 0-15,-50 0 16,-26 1 0,-18 7-1,-33 9-15,68 26 16,-69 16-16,-118-33 15,33-1 1,-77-8-16,-102-17 16,-34-8-1,-17-9-15,-43-9 16,-8-16 0,-1-26-16,1-34 15,0-94 1,-1-169-1</inkml:trace>
+  <inkml:trace contextRef="#ctx0" brushRef="#br0" timeOffset="65683.49">25861 9780 0,'0'0'0,"0"0"0,-9 0 16,-16 0-16,-18 0 16,9 0-1,8 0 1,1 0-16,8 9 0,0 8 15,0 8 1,-9 26 0,0 26-1,-8 25-15,9-17 16,7-34 0,18 25-16,0 9 15,0 0 1,9 1-16,0-10 15,-9-8 1,-9 0-16,9 0 16,-9 9-1,9-9-15,0-17 0,0-9 16,9-16 0,8-1-16,17 1 15,35-1 1,41-16-16,18-9 31,-17-9-31,43-25 16,42-8-16,-25-9 15,17 8 1,17 1 0,-18 25-16,27 8 15,-43 26 1,-1 26-16,52 8 15,-51-9-15,-60-8 16,17-8 0,-9-9-16,-25-9 15,-17 1 1,-26-9 0,-8-9-16,-18 1 0,-7-9 31,-1-9-31,0-25 15,-9-8 1,9-26-16,0-43 16,-8 1-1,-9 25-15,-9 25 16,9 17 0,0 9-16,0 9 15,0 8 1,0 0-16,0 17 15,0 0 1,0 0-16,0 8 16,0 1-1,0 8-15,-8-9 16,-18 1 0,-8-18-16,-17 1 15,-52-18 1,-7-8-1,-36-8-15,-50-9 16,-26 0 0,-25 8-16,-69-16 15,-17 8 1,-43 0-16,-42 16 0,-8 18 16,33 17-1</inkml:trace>
+</inkml:ink>
+</file>
+
+<file path=ppt/ink/ink6.xml><?xml version="1.0" encoding="utf-8"?>
+<inkml:ink xmlns:inkml="http://www.w3.org/2003/InkML">
+  <inkml:definitions>
+    <inkml:context xml:id="ctx0">
+      <inkml:inkSource xml:id="inkSrc0">
+        <inkml:traceFormat>
+          <inkml:channel name="X" type="integer" max="3968" units="cm"/>
+          <inkml:channel name="Y" type="integer" max="2240" units="cm"/>
+          <inkml:channel name="T" type="integer" max="2.14748E9" units="dev"/>
+        </inkml:traceFormat>
+        <inkml:channelProperties>
+          <inkml:channelProperty channel="X" name="resolution" value="128.41425" units="1/cm"/>
+          <inkml:channelProperty channel="Y" name="resolution" value="128.73563" units="1/cm"/>
+          <inkml:channelProperty channel="T" name="resolution" value="1" units="1/dev"/>
+        </inkml:channelProperties>
+      </inkml:inkSource>
+      <inkml:timestamp xml:id="ts0" timeString="2026-04-01T23:05:02.257"/>
+    </inkml:context>
+    <inkml:brush xml:id="br0">
+      <inkml:brushProperty name="width" value="0.05292" units="cm"/>
+      <inkml:brushProperty name="height" value="0.05292" units="cm"/>
+      <inkml:brushProperty name="color" value="#FF0000"/>
+    </inkml:brush>
+  </inkml:definitions>
+  <inkml:trace contextRef="#ctx0" brushRef="#br0">3875 9499 0,'0'-17'0,"34"-144"0</inkml:trace>
+  <inkml:trace contextRef="#ctx0" brushRef="#br0" timeOffset="1172.95">4430 9185 0,'0'0'0,"0"0"0,0 0 16,0 0 0,0 17-16,0 17 15,0 17 1,0 34-16,-9 25 31,1-16-31,-1-26 16,0 9-16,1 8 15,8-9 1,0-8-16,0-17 16,0-8-1,8-18 1,1-16-16,0-1 0,25-8 16,34-8-1,34-18-15,18 1 16,-35 8-1,-8 0 1,34 0-16,17 8 16,0-8-1,-17 0-15,26 0 16,25 9-16,-26 8 16,-50 0-1,-1 0-15,9 8 16,-26 1-1,-17-1-15,-8 1 16,-17-1 0,-9 1-1,-9-18 1,9-8-16,-8-8 16,-1-35-16,1 18 15</inkml:trace>
+  <inkml:trace contextRef="#ctx0" brushRef="#br0" timeOffset="5555.8">4225 13539 0,'0'0'0,"0"0"0,0 0 0,0 0 31,0 0-31,0 0 16,-9 0-16,1 17 15,-1 0 1,1 9-1,-1 8-15,1 8 16,-1 9 0,9 0-16,0 9 0,0-1 31,0-8-31,0-8 16,0-1-16,9-16 15,8-1 1,17 1-16,17-1 15,17-16 1,43-18 0,43-16-16,17-1 15,-1-8 1,18 0-16,-34 0 16,-26 17-1,17 17-15,8 0 16,-16 17-16,-35 0 15,-16 0 1,-9-8 0,-26-1-16,-26 1 15,1-1-15,-17-8 16,-9-8 0,0-18-1,-18-84-15,-24-26 16,25 85-16</inkml:trace>
+  <inkml:trace contextRef="#ctx0" brushRef="#br0" timeOffset="8898.45">3918 11524 0,'0'0'0,"0"0"0,0 0 16,0 0-1,0 0 1,0 0-16,0 0 16,0 0-1,0 0-15,0 0 16,0 0-16,0 8 15,0 18-15,8 8 16,1 8 0,-1 9-1,1-8 1,-1-1-16,1 1 16,-9-1-16,0 1 15,-9-1 1,9 1-1,0-1-15,9-16 16,8-1-16,0 1 16,26-9-16,16-9 15,27-8 1,25-17 0,17-8-1,17-1-15,8 1 16,1 8-1,17 0-15,-1 17 16,27 0-16,-10 0 16,1 0-1,-9 8-15,-8 9 16,-34 0 0,-1 0-1,-16 0-15,-35 0 0,-17 0 16,-16-8-1,-10-1 1,-16-8 0,8-8-16,0-26 15,0-17-15,9-43 16,8-67 0,43-137-1</inkml:trace>
+  <inkml:trace contextRef="#ctx0" brushRef="#br0" timeOffset="19858.25">4353 15682 0,'0'0'0,"0"0"0,0 0 16,0 0 0,0 0-16,0 9 15,0 16 1,-9 43-16,1 26 15,-1 8 1,-8-26-16,0-16 16,17-18-1,0-8-15,0-8 16,9 0 0,8-9-16,0 0 15,0-9 1,17 1-16,26-1 15,25-16 1,26-9-16,0 0 16,17-9-16,26-17 15,16 1 1,-16 8-16,-17 17 16,8 8-1,-9 9-15,-8 9 16,-8 8-1,-1 8-15,-8 1 16,0-18 0,-9 1-1,-8-9-15,-8-9 16,-27 1 0,-16-1-16,0-8 15,-18 0-15,1 0 16,0-8-1,-9-1 1,0-25-16,8-34 16,-8 34-1</inkml:trace>
 </inkml:ink>
 </file>
 
@@ -346,7 +489,7 @@
           <a:p>
             <a:fld id="{8F1DDF0B-ACD3-4CCE-9D96-FD5CAF21C13D}" type="datetimeFigureOut">
               <a:rPr lang="en-US" smtClean="0"/>
-              <a:t>1/7/2026</a:t>
+              <a:t>4/1/2026</a:t>
             </a:fld>
             <a:endParaRPr lang="en-US"/>
           </a:p>
@@ -681,7 +824,7 @@
           <a:p>
             <a:fld id="{98DA50AE-6676-4050-BB67-AE6E697DAE8C}" type="slidenum">
               <a:rPr lang="en-US" smtClean="0"/>
-              <a:t>30</a:t>
+              <a:t>32</a:t>
             </a:fld>
             <a:endParaRPr lang="en-US"/>
           </a:p>
@@ -847,7 +990,7 @@
           <a:p>
             <a:fld id="{2DB93FBE-67AC-4C5C-B62E-CFFDEAF9BE53}" type="datetimeFigureOut">
               <a:rPr lang="en-US" smtClean="0"/>
-              <a:t>1/7/2026</a:t>
+              <a:t>4/1/2026</a:t>
             </a:fld>
             <a:endParaRPr lang="en-US"/>
           </a:p>
@@ -1045,7 +1188,7 @@
           <a:p>
             <a:fld id="{2DB93FBE-67AC-4C5C-B62E-CFFDEAF9BE53}" type="datetimeFigureOut">
               <a:rPr lang="en-US" smtClean="0"/>
-              <a:t>1/7/2026</a:t>
+              <a:t>4/1/2026</a:t>
             </a:fld>
             <a:endParaRPr lang="en-US"/>
           </a:p>
@@ -1253,7 +1396,7 @@
           <a:p>
             <a:fld id="{2DB93FBE-67AC-4C5C-B62E-CFFDEAF9BE53}" type="datetimeFigureOut">
               <a:rPr lang="en-US" smtClean="0"/>
-              <a:t>1/7/2026</a:t>
+              <a:t>4/1/2026</a:t>
             </a:fld>
             <a:endParaRPr lang="en-US"/>
           </a:p>
@@ -1451,7 +1594,7 @@
           <a:p>
             <a:fld id="{2DB93FBE-67AC-4C5C-B62E-CFFDEAF9BE53}" type="datetimeFigureOut">
               <a:rPr lang="en-US" smtClean="0"/>
-              <a:t>1/7/2026</a:t>
+              <a:t>4/1/2026</a:t>
             </a:fld>
             <a:endParaRPr lang="en-US"/>
           </a:p>
@@ -1726,7 +1869,7 @@
           <a:p>
             <a:fld id="{2DB93FBE-67AC-4C5C-B62E-CFFDEAF9BE53}" type="datetimeFigureOut">
               <a:rPr lang="en-US" smtClean="0"/>
-              <a:t>1/7/2026</a:t>
+              <a:t>4/1/2026</a:t>
             </a:fld>
             <a:endParaRPr lang="en-US"/>
           </a:p>
@@ -1991,7 +2134,7 @@
           <a:p>
             <a:fld id="{2DB93FBE-67AC-4C5C-B62E-CFFDEAF9BE53}" type="datetimeFigureOut">
               <a:rPr lang="en-US" smtClean="0"/>
-              <a:t>1/7/2026</a:t>
+              <a:t>4/1/2026</a:t>
             </a:fld>
             <a:endParaRPr lang="en-US"/>
           </a:p>
@@ -2403,7 +2546,7 @@
           <a:p>
             <a:fld id="{2DB93FBE-67AC-4C5C-B62E-CFFDEAF9BE53}" type="datetimeFigureOut">
               <a:rPr lang="en-US" smtClean="0"/>
-              <a:t>1/7/2026</a:t>
+              <a:t>4/1/2026</a:t>
             </a:fld>
             <a:endParaRPr lang="en-US"/>
           </a:p>
@@ -2544,7 +2687,7 @@
           <a:p>
             <a:fld id="{2DB93FBE-67AC-4C5C-B62E-CFFDEAF9BE53}" type="datetimeFigureOut">
               <a:rPr lang="en-US" smtClean="0"/>
-              <a:t>1/7/2026</a:t>
+              <a:t>4/1/2026</a:t>
             </a:fld>
             <a:endParaRPr lang="en-US"/>
           </a:p>
@@ -2657,7 +2800,7 @@
           <a:p>
             <a:fld id="{2DB93FBE-67AC-4C5C-B62E-CFFDEAF9BE53}" type="datetimeFigureOut">
               <a:rPr lang="en-US" smtClean="0"/>
-              <a:t>1/7/2026</a:t>
+              <a:t>4/1/2026</a:t>
             </a:fld>
             <a:endParaRPr lang="en-US"/>
           </a:p>
@@ -2968,7 +3111,7 @@
           <a:p>
             <a:fld id="{2DB93FBE-67AC-4C5C-B62E-CFFDEAF9BE53}" type="datetimeFigureOut">
               <a:rPr lang="en-US" smtClean="0"/>
-              <a:t>1/7/2026</a:t>
+              <a:t>4/1/2026</a:t>
             </a:fld>
             <a:endParaRPr lang="en-US"/>
           </a:p>
@@ -3256,7 +3399,7 @@
           <a:p>
             <a:fld id="{2DB93FBE-67AC-4C5C-B62E-CFFDEAF9BE53}" type="datetimeFigureOut">
               <a:rPr lang="en-US" smtClean="0"/>
-              <a:t>1/7/2026</a:t>
+              <a:t>4/1/2026</a:t>
             </a:fld>
             <a:endParaRPr lang="en-US"/>
           </a:p>
@@ -3497,7 +3640,7 @@
           <a:p>
             <a:fld id="{2DB93FBE-67AC-4C5C-B62E-CFFDEAF9BE53}" type="datetimeFigureOut">
               <a:rPr lang="en-US" smtClean="0"/>
-              <a:t>1/7/2026</a:t>
+              <a:t>4/1/2026</a:t>
             </a:fld>
             <a:endParaRPr lang="en-US"/>
           </a:p>
@@ -3939,7 +4082,7 @@
           <a:p>
             <a:r>
               <a:rPr lang="en-US" dirty="0"/>
-              <a:t>CSE 332 Winter 2026</a:t>
+              <a:t>CSE 332 Spring 2026</a:t>
             </a:r>
             <a:br>
               <a:rPr lang="en-US" dirty="0"/>
@@ -4029,6 +4172,336 @@
           <p:cNvPr id="2" name="Title 1">
             <a:extLst>
               <a:ext uri="{FF2B5EF4-FFF2-40B4-BE49-F238E27FC236}">
+                <a16:creationId xmlns:a16="http://schemas.microsoft.com/office/drawing/2014/main" id="{FB3450B6-F0B1-452F-736A-CBAD5DE567E1}"/>
+              </a:ext>
+            </a:extLst>
+          </p:cNvPr>
+          <p:cNvSpPr>
+            <a:spLocks noGrp="1"/>
+          </p:cNvSpPr>
+          <p:nvPr>
+            <p:ph type="title"/>
+          </p:nvPr>
+        </p:nvSpPr>
+        <p:spPr/>
+        <p:txBody>
+          <a:bodyPr/>
+          <a:lstStyle/>
+          <a:p>
+            <a:r>
+              <a:rPr lang="en-US" dirty="0"/>
+              <a:t>Linked Nodes vs. Circular Array</a:t>
+            </a:r>
+          </a:p>
+        </p:txBody>
+      </p:sp>
+      <p:sp>
+        <p:nvSpPr>
+          <p:cNvPr id="3" name="Content Placeholder 2">
+            <a:extLst>
+              <a:ext uri="{FF2B5EF4-FFF2-40B4-BE49-F238E27FC236}">
+                <a16:creationId xmlns:a16="http://schemas.microsoft.com/office/drawing/2014/main" id="{E1FB6DFD-BFD3-6A83-79CC-23335BC24C61}"/>
+              </a:ext>
+            </a:extLst>
+          </p:cNvPr>
+          <p:cNvSpPr>
+            <a:spLocks noGrp="1"/>
+          </p:cNvSpPr>
+          <p:nvPr>
+            <p:ph idx="1"/>
+          </p:nvPr>
+        </p:nvSpPr>
+        <p:spPr/>
+        <p:txBody>
+          <a:bodyPr/>
+          <a:lstStyle/>
+          <a:p>
+            <a:r>
+              <a:rPr lang="en-US" dirty="0"/>
+              <a:t>Let’s Summarize some benefits and drawbacks of each</a:t>
+            </a:r>
+          </a:p>
+          <a:p>
+            <a:pPr lvl="1"/>
+            <a:r>
+              <a:rPr lang="en-US" dirty="0"/>
+              <a:t>Arrays have a lot to do when you need to resize</a:t>
+            </a:r>
+          </a:p>
+          <a:p>
+            <a:pPr lvl="1"/>
+            <a:r>
+              <a:rPr lang="en-US" dirty="0"/>
+              <a:t>Maybe circular arrays take up more space (at least immediately after resized)</a:t>
+            </a:r>
+          </a:p>
+          <a:p>
+            <a:pPr lvl="2"/>
+            <a:r>
+              <a:rPr lang="en-US" dirty="0"/>
+              <a:t>The space needed for linked nodes more exactly matches the size</a:t>
+            </a:r>
+          </a:p>
+          <a:p>
+            <a:pPr lvl="1"/>
+            <a:r>
+              <a:rPr lang="en-US" dirty="0"/>
+              <a:t>If we wanted some behaviors in addition to the ADT</a:t>
+            </a:r>
+          </a:p>
+          <a:p>
+            <a:pPr lvl="1"/>
+            <a:r>
+              <a:rPr lang="en-US" dirty="0"/>
+              <a:t>Contiguous memory vs. non-contiguous</a:t>
+            </a:r>
+          </a:p>
+        </p:txBody>
+      </p:sp>
+    </p:spTree>
+    <p:extLst>
+      <p:ext uri="{BB962C8B-B14F-4D97-AF65-F5344CB8AC3E}">
+        <p14:creationId xmlns:p14="http://schemas.microsoft.com/office/powerpoint/2010/main" val="1374528974"/>
+      </p:ext>
+    </p:extLst>
+  </p:cSld>
+  <p:clrMapOvr>
+    <a:masterClrMapping/>
+  </p:clrMapOvr>
+</p:sld>
+</file>
+
+<file path=ppt/slides/slide11.xml><?xml version="1.0" encoding="utf-8"?>
+<p:sld xmlns:a="http://schemas.openxmlformats.org/drawingml/2006/main" xmlns:r="http://schemas.openxmlformats.org/officeDocument/2006/relationships" xmlns:p="http://schemas.openxmlformats.org/presentationml/2006/main">
+  <p:cSld>
+    <p:spTree>
+      <p:nvGrpSpPr>
+        <p:cNvPr id="1" name=""/>
+        <p:cNvGrpSpPr/>
+        <p:nvPr/>
+      </p:nvGrpSpPr>
+      <p:grpSpPr>
+        <a:xfrm>
+          <a:off x="0" y="0"/>
+          <a:ext cx="0" cy="0"/>
+          <a:chOff x="0" y="0"/>
+          <a:chExt cx="0" cy="0"/>
+        </a:xfrm>
+      </p:grpSpPr>
+      <p:sp>
+        <p:nvSpPr>
+          <p:cNvPr id="2" name="Title 1">
+            <a:extLst>
+              <a:ext uri="{FF2B5EF4-FFF2-40B4-BE49-F238E27FC236}">
+                <a16:creationId xmlns:a16="http://schemas.microsoft.com/office/drawing/2014/main" id="{D70D41E5-465C-EBB5-E9CD-029376B833DF}"/>
+              </a:ext>
+            </a:extLst>
+          </p:cNvPr>
+          <p:cNvSpPr>
+            <a:spLocks noGrp="1"/>
+          </p:cNvSpPr>
+          <p:nvPr>
+            <p:ph type="title"/>
+          </p:nvPr>
+        </p:nvSpPr>
+        <p:spPr/>
+        <p:txBody>
+          <a:bodyPr/>
+          <a:lstStyle/>
+          <a:p>
+            <a:r>
+              <a:rPr lang="en-US" dirty="0"/>
+              <a:t>ADT: Stack</a:t>
+            </a:r>
+          </a:p>
+        </p:txBody>
+      </p:sp>
+      <p:sp>
+        <p:nvSpPr>
+          <p:cNvPr id="3" name="Content Placeholder 2">
+            <a:extLst>
+              <a:ext uri="{FF2B5EF4-FFF2-40B4-BE49-F238E27FC236}">
+                <a16:creationId xmlns:a16="http://schemas.microsoft.com/office/drawing/2014/main" id="{B5EF048E-DA88-5227-7793-0EE138E7390F}"/>
+              </a:ext>
+            </a:extLst>
+          </p:cNvPr>
+          <p:cNvSpPr>
+            <a:spLocks noGrp="1"/>
+          </p:cNvSpPr>
+          <p:nvPr>
+            <p:ph idx="1"/>
+          </p:nvPr>
+        </p:nvSpPr>
+        <p:spPr/>
+        <p:txBody>
+          <a:bodyPr>
+            <a:normAutofit/>
+          </a:bodyPr>
+          <a:lstStyle/>
+          <a:p>
+            <a:r>
+              <a:rPr lang="en-US" dirty="0"/>
+              <a:t>What is it?</a:t>
+            </a:r>
+          </a:p>
+          <a:p>
+            <a:pPr lvl="1"/>
+            <a:r>
+              <a:rPr lang="en-US" dirty="0"/>
+              <a:t>A “Last In First Out” (LIFO) collection of items (sometimes called FILO)</a:t>
+            </a:r>
+          </a:p>
+          <a:p>
+            <a:r>
+              <a:rPr lang="en-US" dirty="0"/>
+              <a:t>What operations do we need?</a:t>
+            </a:r>
+          </a:p>
+          <a:p>
+            <a:pPr lvl="1"/>
+            <a:r>
+              <a:rPr lang="en-US" dirty="0"/>
+              <a:t>push</a:t>
+            </a:r>
+          </a:p>
+          <a:p>
+            <a:pPr lvl="2"/>
+            <a:r>
+              <a:rPr lang="en-US" dirty="0"/>
+              <a:t>Add a new item onto the stack</a:t>
+            </a:r>
+          </a:p>
+          <a:p>
+            <a:pPr lvl="1"/>
+            <a:r>
+              <a:rPr lang="en-US" dirty="0"/>
+              <a:t>peek</a:t>
+            </a:r>
+          </a:p>
+          <a:p>
+            <a:pPr lvl="2"/>
+            <a:r>
+              <a:rPr lang="en-US" dirty="0"/>
+              <a:t>Return the value of the most recently pushed item</a:t>
+            </a:r>
+          </a:p>
+          <a:p>
+            <a:pPr lvl="1"/>
+            <a:r>
+              <a:rPr lang="en-US" dirty="0"/>
+              <a:t>pop</a:t>
+            </a:r>
+          </a:p>
+          <a:p>
+            <a:pPr lvl="2"/>
+            <a:r>
+              <a:rPr lang="en-US" dirty="0"/>
+              <a:t>Return the value of the most recently pushed item and remove it from the stack</a:t>
+            </a:r>
+          </a:p>
+          <a:p>
+            <a:pPr lvl="1"/>
+            <a:r>
+              <a:rPr lang="en-US" dirty="0" err="1"/>
+              <a:t>isEmpty</a:t>
+            </a:r>
+            <a:endParaRPr lang="en-US" dirty="0"/>
+          </a:p>
+          <a:p>
+            <a:pPr lvl="2"/>
+            <a:r>
+              <a:rPr lang="en-US" dirty="0"/>
+              <a:t>Indicate whether or not there are items still on the stack</a:t>
+            </a:r>
+          </a:p>
+        </p:txBody>
+      </p:sp>
+      <mc:AlternateContent xmlns:mc="http://schemas.openxmlformats.org/markup-compatibility/2006">
+        <mc:Choice xmlns:p14="http://schemas.microsoft.com/office/powerpoint/2010/main" Requires="p14">
+          <p:contentPart p14:bwMode="auto" r:id="rId2">
+            <p14:nvContentPartPr>
+              <p14:cNvPr id="4" name="Ink 3">
+                <a:extLst>
+                  <a:ext uri="{FF2B5EF4-FFF2-40B4-BE49-F238E27FC236}">
+                    <a16:creationId xmlns:a16="http://schemas.microsoft.com/office/drawing/2014/main" id="{8948C7DA-AB49-7F74-5C97-DC28E6105F97}"/>
+                  </a:ext>
+                </a:extLst>
+              </p14:cNvPr>
+              <p14:cNvContentPartPr/>
+              <p14:nvPr/>
+            </p14:nvContentPartPr>
+            <p14:xfrm>
+              <a:off x="1395000" y="3306600"/>
+              <a:ext cx="1161720" cy="2562840"/>
+            </p14:xfrm>
+          </p:contentPart>
+        </mc:Choice>
+        <mc:Fallback>
+          <p:pic>
+            <p:nvPicPr>
+              <p:cNvPr id="4" name="Ink 3">
+                <a:extLst>
+                  <a:ext uri="{FF2B5EF4-FFF2-40B4-BE49-F238E27FC236}">
+                    <a16:creationId xmlns:a16="http://schemas.microsoft.com/office/drawing/2014/main" id="{8948C7DA-AB49-7F74-5C97-DC28E6105F97}"/>
+                  </a:ext>
+                </a:extLst>
+              </p:cNvPr>
+              <p:cNvPicPr/>
+              <p:nvPr/>
+            </p:nvPicPr>
+            <p:blipFill>
+              <a:blip r:embed="rId3"/>
+              <a:stretch>
+                <a:fillRect/>
+              </a:stretch>
+            </p:blipFill>
+            <p:spPr>
+              <a:xfrm>
+                <a:off x="1385640" y="3297240"/>
+                <a:ext cx="1180440" cy="2581560"/>
+              </a:xfrm>
+              <a:prstGeom prst="rect">
+                <a:avLst/>
+              </a:prstGeom>
+            </p:spPr>
+          </p:pic>
+        </mc:Fallback>
+      </mc:AlternateContent>
+    </p:spTree>
+    <p:extLst>
+      <p:ext uri="{BB962C8B-B14F-4D97-AF65-F5344CB8AC3E}">
+        <p14:creationId xmlns:p14="http://schemas.microsoft.com/office/powerpoint/2010/main" val="39125618"/>
+      </p:ext>
+    </p:extLst>
+  </p:cSld>
+  <p:clrMapOvr>
+    <a:masterClrMapping/>
+  </p:clrMapOvr>
+</p:sld>
+</file>
+
+<file path=ppt/slides/slide12.xml><?xml version="1.0" encoding="utf-8"?>
+<p:sld xmlns:a="http://schemas.openxmlformats.org/drawingml/2006/main" xmlns:r="http://schemas.openxmlformats.org/officeDocument/2006/relationships" xmlns:p="http://schemas.openxmlformats.org/presentationml/2006/main">
+  <p:cSld>
+    <p:spTree>
+      <p:nvGrpSpPr>
+        <p:cNvPr id="1" name=""/>
+        <p:cNvGrpSpPr/>
+        <p:nvPr/>
+      </p:nvGrpSpPr>
+      <p:grpSpPr>
+        <a:xfrm>
+          <a:off x="0" y="0"/>
+          <a:ext cx="0" cy="0"/>
+          <a:chOff x="0" y="0"/>
+          <a:chExt cx="0" cy="0"/>
+        </a:xfrm>
+      </p:grpSpPr>
+      <p:sp>
+        <p:nvSpPr>
+          <p:cNvPr id="2" name="Title 1">
+            <a:extLst>
+              <a:ext uri="{FF2B5EF4-FFF2-40B4-BE49-F238E27FC236}">
                 <a16:creationId xmlns:a16="http://schemas.microsoft.com/office/drawing/2014/main" id="{149F71B3-2D7D-74A2-E5C3-63EBD2C239C8}"/>
               </a:ext>
             </a:extLst>
@@ -4090,7 +4563,7 @@
 </p:sld>
 </file>
 
-<file path=ppt/slides/slide11.xml><?xml version="1.0" encoding="utf-8"?>
+<file path=ppt/slides/slide13.xml><?xml version="1.0" encoding="utf-8"?>
 <p:sld xmlns:a="http://schemas.openxmlformats.org/drawingml/2006/main" xmlns:r="http://schemas.openxmlformats.org/officeDocument/2006/relationships" xmlns:p="http://schemas.openxmlformats.org/presentationml/2006/main">
   <p:cSld>
     <p:spTree>
@@ -4219,7 +4692,7 @@
       </p:sp>
       <p:grpSp>
         <p:nvGrpSpPr>
-          <p:cNvPr id="7" name="Group 6">
+          <p:cNvPr id="7" name="Group 6" descr="Depicts the problem of trying to find the end of the yarn from a pile. There is a blanket which possesses one end of the yarn. The other end is in a tangled pile. We need to find the end from among that tangled pile.">
             <a:extLst>
               <a:ext uri="{FF2B5EF4-FFF2-40B4-BE49-F238E27FC236}">
                 <a16:creationId xmlns:a16="http://schemas.microsoft.com/office/drawing/2014/main" id="{494A9C52-F5D2-C88A-3A31-49852E7FE19D}"/>
@@ -6604,7 +7077,7 @@
 </p:sld>
 </file>
 
-<file path=ppt/slides/slide12.xml><?xml version="1.0" encoding="utf-8"?>
+<file path=ppt/slides/slide14.xml><?xml version="1.0" encoding="utf-8"?>
 <p:sld xmlns:a="http://schemas.openxmlformats.org/drawingml/2006/main" xmlns:r="http://schemas.openxmlformats.org/officeDocument/2006/relationships" xmlns:p="http://schemas.openxmlformats.org/presentationml/2006/main">
   <p:cSld>
     <p:spTree>
@@ -6690,6 +7163,9 @@
             <a:extLst>
               <a:ext uri="{FF2B5EF4-FFF2-40B4-BE49-F238E27FC236}">
                 <a16:creationId xmlns:a16="http://schemas.microsoft.com/office/drawing/2014/main" id="{2F972420-6B26-4271-AD3A-A848D46D6A0E}"/>
+              </a:ext>
+              <a:ext uri="{C183D7F6-B498-43B3-948B-1728B52AA6E4}">
+                <adec:decorative xmlns:adec="http://schemas.microsoft.com/office/drawing/2017/decorative" val="1"/>
               </a:ext>
             </a:extLst>
           </p:cNvPr>
@@ -9071,7 +9547,7 @@
 </p:sld>
 </file>
 
-<file path=ppt/slides/slide13.xml><?xml version="1.0" encoding="utf-8"?>
+<file path=ppt/slides/slide15.xml><?xml version="1.0" encoding="utf-8"?>
 <p:sld xmlns:a="http://schemas.openxmlformats.org/drawingml/2006/main" xmlns:r="http://schemas.openxmlformats.org/officeDocument/2006/relationships" xmlns:p="http://schemas.openxmlformats.org/presentationml/2006/main">
   <p:cSld>
     <p:spTree>
@@ -9118,7 +9594,7 @@
       </p:sp>
       <p:pic>
         <p:nvPicPr>
-          <p:cNvPr id="14" name="Picture 13">
+          <p:cNvPr id="14" name="Picture 13" descr="Input: the blanket with one end of yarn, the pile with the other end.">
             <a:extLst>
               <a:ext uri="{FF2B5EF4-FFF2-40B4-BE49-F238E27FC236}">
                 <a16:creationId xmlns:a16="http://schemas.microsoft.com/office/drawing/2014/main" id="{EEAE774A-BB99-6245-DF87-E1B9D0363D2A}"/>
@@ -9160,7 +9636,7 @@
       </p:pic>
       <p:pic>
         <p:nvPicPr>
-          <p:cNvPr id="12" name="Picture 11" descr="A picture containing whistle, key&#10;&#10;Description automatically generated">
+          <p:cNvPr id="12" name="Picture 11" descr="step 1: split the pile in half, count the number of strands between them. If there is an even number then that means the end of the yarn must be in the half-pile which connects to the blanket.">
             <a:extLst>
               <a:ext uri="{FF2B5EF4-FFF2-40B4-BE49-F238E27FC236}">
                 <a16:creationId xmlns:a16="http://schemas.microsoft.com/office/drawing/2014/main" id="{3B6BBC2D-A66F-DB9C-04C2-A9C2963A4EF2}"/>
@@ -9202,7 +9678,7 @@
       </p:pic>
       <p:pic>
         <p:nvPicPr>
-          <p:cNvPr id="10" name="Picture 9">
+          <p:cNvPr id="10" name="Picture 9" descr="In the previous step we had 7 strands crossing, so we next repeat the process of dividing the pile in half on the pile that does not attach to the blanket. In the next step we again count the crossing strands. If it's even then we continue with the pile that connects to the previously discarded pile.">
             <a:extLst>
               <a:ext uri="{FF2B5EF4-FFF2-40B4-BE49-F238E27FC236}">
                 <a16:creationId xmlns:a16="http://schemas.microsoft.com/office/drawing/2014/main" id="{58BED0D0-21C6-FBC0-34A7-7C88AC53F1FB}"/>
@@ -9244,7 +9720,7 @@
       </p:pic>
       <p:pic>
         <p:nvPicPr>
-          <p:cNvPr id="8" name="Content Placeholder 7" descr="A picture containing accessory, key&#10;&#10;Description automatically generated">
+          <p:cNvPr id="8" name="Content Placeholder 7" descr="We continue until we pile is small enough that we can simply spot the end.">
             <a:extLst>
               <a:ext uri="{FF2B5EF4-FFF2-40B4-BE49-F238E27FC236}">
                 <a16:creationId xmlns:a16="http://schemas.microsoft.com/office/drawing/2014/main" id="{7559EE6A-C753-DE43-1417-771D507A9974}"/>
@@ -9309,7 +9785,7 @@
           <a:p>
             <a:fld id="{F4E8603E-186F-4CC7-B8E2-5FD613D3E28C}" type="slidenum">
               <a:rPr lang="en-US" smtClean="0"/>
-              <a:t>13</a:t>
+              <a:t>15</a:t>
             </a:fld>
             <a:endParaRPr lang="en-US" dirty="0"/>
           </a:p>
@@ -9570,7 +10046,7 @@
 </p:sld>
 </file>
 
-<file path=ppt/slides/slide14.xml><?xml version="1.0" encoding="utf-8"?>
+<file path=ppt/slides/slide16.xml><?xml version="1.0" encoding="utf-8"?>
 <p:sld xmlns:a="http://schemas.openxmlformats.org/drawingml/2006/main" xmlns:r="http://schemas.openxmlformats.org/officeDocument/2006/relationships" xmlns:p="http://schemas.openxmlformats.org/presentationml/2006/main">
   <p:cSld>
     <p:spTree>
@@ -9696,6 +10172,9 @@
             <a:extLst>
               <a:ext uri="{FF2B5EF4-FFF2-40B4-BE49-F238E27FC236}">
                 <a16:creationId xmlns:a16="http://schemas.microsoft.com/office/drawing/2014/main" id="{4D1B2CB4-59D7-A41F-E296-7ABCB1DC156F}"/>
+              </a:ext>
+              <a:ext uri="{C183D7F6-B498-43B3-948B-1728B52AA6E4}">
+                <adec:decorative xmlns:adec="http://schemas.microsoft.com/office/drawing/2017/decorative" val="1"/>
               </a:ext>
             </a:extLst>
           </p:cNvPr>
@@ -12066,7 +12545,7 @@
       </p:grpSp>
       <p:grpSp>
         <p:nvGrpSpPr>
-          <p:cNvPr id="18" name="Group 17">
+          <p:cNvPr id="18" name="Group 17" descr="Pile A refers to the pile that connects to the blanket. Pile B is the other pile.">
             <a:extLst>
               <a:ext uri="{FF2B5EF4-FFF2-40B4-BE49-F238E27FC236}">
                 <a16:creationId xmlns:a16="http://schemas.microsoft.com/office/drawing/2014/main" id="{1A47E06E-C41F-E698-74B1-DFA8100725AB}"/>
@@ -13621,6 +14100,9 @@
               <a:ext uri="{FF2B5EF4-FFF2-40B4-BE49-F238E27FC236}">
                 <a16:creationId xmlns:a16="http://schemas.microsoft.com/office/drawing/2014/main" id="{7CFFEF35-1F9B-40D0-9482-87780E141A1F}"/>
               </a:ext>
+              <a:ext uri="{C183D7F6-B498-43B3-948B-1728B52AA6E4}">
+                <adec:decorative xmlns:adec="http://schemas.microsoft.com/office/drawing/2017/decorative" val="1"/>
+              </a:ext>
             </a:extLst>
           </p:cNvPr>
           <p:cNvSpPr/>
@@ -13768,7 +14250,7 @@
           <a:p>
             <a:fld id="{F4E8603E-186F-4CC7-B8E2-5FD613D3E28C}" type="slidenum">
               <a:rPr lang="en-US" smtClean="0"/>
-              <a:t>14</a:t>
+              <a:t>16</a:t>
             </a:fld>
             <a:endParaRPr lang="en-US" dirty="0"/>
           </a:p>
@@ -13787,7 +14269,7 @@
 </p:sld>
 </file>
 
-<file path=ppt/slides/slide15.xml><?xml version="1.0" encoding="utf-8"?>
+<file path=ppt/slides/slide17.xml><?xml version="1.0" encoding="utf-8"?>
 <p:sld xmlns:a="http://schemas.openxmlformats.org/drawingml/2006/main" xmlns:r="http://schemas.openxmlformats.org/officeDocument/2006/relationships" xmlns:p="http://schemas.openxmlformats.org/presentationml/2006/main">
   <p:cSld>
     <p:spTree>
@@ -13876,7 +14358,7 @@
 </p:sld>
 </file>
 
-<file path=ppt/slides/slide16.xml><?xml version="1.0" encoding="utf-8"?>
+<file path=ppt/slides/slide18.xml><?xml version="1.0" encoding="utf-8"?>
 <p:sld xmlns:a="http://schemas.openxmlformats.org/drawingml/2006/main" xmlns:r="http://schemas.openxmlformats.org/officeDocument/2006/relationships" xmlns:p="http://schemas.openxmlformats.org/presentationml/2006/main">
   <p:cSld>
     <p:spTree>
@@ -14013,7 +14495,7 @@
 </p:sld>
 </file>
 
-<file path=ppt/slides/slide17.xml><?xml version="1.0" encoding="utf-8"?>
+<file path=ppt/slides/slide19.xml><?xml version="1.0" encoding="utf-8"?>
 <p:sld xmlns:a="http://schemas.openxmlformats.org/drawingml/2006/main" xmlns:r="http://schemas.openxmlformats.org/officeDocument/2006/relationships" xmlns:p="http://schemas.openxmlformats.org/presentationml/2006/main">
   <p:cSld>
     <p:spTree>
@@ -14165,7 +14647,153 @@
 </p:sld>
 </file>
 
-<file path=ppt/slides/slide18.xml><?xml version="1.0" encoding="utf-8"?>
+<file path=ppt/slides/slide2.xml><?xml version="1.0" encoding="utf-8"?>
+<p:sld xmlns:a="http://schemas.openxmlformats.org/drawingml/2006/main" xmlns:r="http://schemas.openxmlformats.org/officeDocument/2006/relationships" xmlns:p="http://schemas.openxmlformats.org/presentationml/2006/main">
+  <p:cSld>
+    <p:spTree>
+      <p:nvGrpSpPr>
+        <p:cNvPr id="1" name=""/>
+        <p:cNvGrpSpPr/>
+        <p:nvPr/>
+      </p:nvGrpSpPr>
+      <p:grpSpPr>
+        <a:xfrm>
+          <a:off x="0" y="0"/>
+          <a:ext cx="0" cy="0"/>
+          <a:chOff x="0" y="0"/>
+          <a:chExt cx="0" cy="0"/>
+        </a:xfrm>
+      </p:grpSpPr>
+      <p:sp>
+        <p:nvSpPr>
+          <p:cNvPr id="2" name="Title 1">
+            <a:extLst>
+              <a:ext uri="{FF2B5EF4-FFF2-40B4-BE49-F238E27FC236}">
+                <a16:creationId xmlns:a16="http://schemas.microsoft.com/office/drawing/2014/main" id="{06138DD4-06E1-4997-10CD-58E9D69CC843}"/>
+              </a:ext>
+            </a:extLst>
+          </p:cNvPr>
+          <p:cNvSpPr>
+            <a:spLocks noGrp="1"/>
+          </p:cNvSpPr>
+          <p:nvPr>
+            <p:ph type="title"/>
+          </p:nvPr>
+        </p:nvSpPr>
+        <p:spPr/>
+        <p:txBody>
+          <a:bodyPr/>
+          <a:lstStyle/>
+          <a:p>
+            <a:r>
+              <a:rPr lang="en-US" dirty="0"/>
+              <a:t>Announcements</a:t>
+            </a:r>
+          </a:p>
+        </p:txBody>
+      </p:sp>
+      <p:sp>
+        <p:nvSpPr>
+          <p:cNvPr id="3" name="Content Placeholder 2">
+            <a:extLst>
+              <a:ext uri="{FF2B5EF4-FFF2-40B4-BE49-F238E27FC236}">
+                <a16:creationId xmlns:a16="http://schemas.microsoft.com/office/drawing/2014/main" id="{2B4BBE2C-C693-B1FE-74D0-68C0E05A99A1}"/>
+              </a:ext>
+            </a:extLst>
+          </p:cNvPr>
+          <p:cNvSpPr>
+            <a:spLocks noGrp="1"/>
+          </p:cNvSpPr>
+          <p:nvPr>
+            <p:ph idx="1"/>
+          </p:nvPr>
+        </p:nvSpPr>
+        <p:spPr/>
+        <p:txBody>
+          <a:bodyPr/>
+          <a:lstStyle/>
+          <a:p>
+            <a:r>
+              <a:rPr lang="en-US" dirty="0"/>
+              <a:t>Exercise 0 released</a:t>
+            </a:r>
+          </a:p>
+          <a:p>
+            <a:pPr lvl="1"/>
+            <a:r>
+              <a:rPr lang="en-US" dirty="0"/>
+              <a:t>Due Wednesday 4/8</a:t>
+            </a:r>
+          </a:p>
+          <a:p>
+            <a:pPr lvl="1"/>
+            <a:r>
+              <a:rPr lang="en-US" dirty="0"/>
+              <a:t>There are 2 separate </a:t>
+            </a:r>
+            <a:r>
+              <a:rPr lang="en-US" dirty="0" err="1"/>
+              <a:t>gradescope</a:t>
+            </a:r>
+            <a:r>
+              <a:rPr lang="en-US" dirty="0"/>
+              <a:t> submissions</a:t>
+            </a:r>
+          </a:p>
+          <a:p>
+            <a:r>
+              <a:rPr lang="en-US" dirty="0"/>
+              <a:t>Concept check 0 released</a:t>
+            </a:r>
+          </a:p>
+          <a:p>
+            <a:pPr lvl="1"/>
+            <a:r>
+              <a:rPr lang="en-US" dirty="0"/>
+              <a:t>Helps us to get more familiar with each other!</a:t>
+            </a:r>
+          </a:p>
+          <a:p>
+            <a:pPr lvl="1"/>
+            <a:r>
+              <a:rPr lang="en-US" dirty="0" err="1"/>
+              <a:t>Gradescope</a:t>
+            </a:r>
+            <a:r>
+              <a:rPr lang="en-US" dirty="0"/>
+              <a:t> submission due 4/10</a:t>
+            </a:r>
+          </a:p>
+          <a:p>
+            <a:pPr lvl="1"/>
+            <a:r>
+              <a:rPr lang="en-US" dirty="0"/>
+              <a:t>Meet the staff activity due by 5/1</a:t>
+            </a:r>
+          </a:p>
+          <a:p>
+            <a:pPr lvl="2"/>
+            <a:r>
+              <a:rPr lang="en-US" dirty="0"/>
+              <a:t>Come to any office hours, chat with us, ask us to mark you off for this</a:t>
+            </a:r>
+          </a:p>
+        </p:txBody>
+      </p:sp>
+    </p:spTree>
+    <p:extLst>
+      <p:ext uri="{BB962C8B-B14F-4D97-AF65-F5344CB8AC3E}">
+        <p14:creationId xmlns:p14="http://schemas.microsoft.com/office/powerpoint/2010/main" val="3210885505"/>
+      </p:ext>
+    </p:extLst>
+  </p:cSld>
+  <p:clrMapOvr>
+    <a:masterClrMapping/>
+  </p:clrMapOvr>
+</p:sld>
+</file>
+
+<file path=ppt/slides/slide20.xml><?xml version="1.0" encoding="utf-8"?>
 <p:sld xmlns:a="http://schemas.openxmlformats.org/drawingml/2006/main" xmlns:r="http://schemas.openxmlformats.org/officeDocument/2006/relationships" xmlns:p="http://schemas.openxmlformats.org/presentationml/2006/main">
   <p:cSld>
     <p:spTree>
@@ -14440,7 +15068,7 @@
 </p:sld>
 </file>
 
-<file path=ppt/slides/slide19.xml><?xml version="1.0" encoding="utf-8"?>
+<file path=ppt/slides/slide21.xml><?xml version="1.0" encoding="utf-8"?>
 <p:sld xmlns:a="http://schemas.openxmlformats.org/drawingml/2006/main" xmlns:r="http://schemas.openxmlformats.org/officeDocument/2006/relationships" xmlns:p="http://schemas.openxmlformats.org/presentationml/2006/main">
   <p:cSld>
     <p:spTree>
@@ -14745,153 +15373,7 @@
 </p:sld>
 </file>
 
-<file path=ppt/slides/slide2.xml><?xml version="1.0" encoding="utf-8"?>
-<p:sld xmlns:a="http://schemas.openxmlformats.org/drawingml/2006/main" xmlns:r="http://schemas.openxmlformats.org/officeDocument/2006/relationships" xmlns:p="http://schemas.openxmlformats.org/presentationml/2006/main">
-  <p:cSld>
-    <p:spTree>
-      <p:nvGrpSpPr>
-        <p:cNvPr id="1" name=""/>
-        <p:cNvGrpSpPr/>
-        <p:nvPr/>
-      </p:nvGrpSpPr>
-      <p:grpSpPr>
-        <a:xfrm>
-          <a:off x="0" y="0"/>
-          <a:ext cx="0" cy="0"/>
-          <a:chOff x="0" y="0"/>
-          <a:chExt cx="0" cy="0"/>
-        </a:xfrm>
-      </p:grpSpPr>
-      <p:sp>
-        <p:nvSpPr>
-          <p:cNvPr id="2" name="Title 1">
-            <a:extLst>
-              <a:ext uri="{FF2B5EF4-FFF2-40B4-BE49-F238E27FC236}">
-                <a16:creationId xmlns:a16="http://schemas.microsoft.com/office/drawing/2014/main" id="{06138DD4-06E1-4997-10CD-58E9D69CC843}"/>
-              </a:ext>
-            </a:extLst>
-          </p:cNvPr>
-          <p:cNvSpPr>
-            <a:spLocks noGrp="1"/>
-          </p:cNvSpPr>
-          <p:nvPr>
-            <p:ph type="title"/>
-          </p:nvPr>
-        </p:nvSpPr>
-        <p:spPr/>
-        <p:txBody>
-          <a:bodyPr/>
-          <a:lstStyle/>
-          <a:p>
-            <a:r>
-              <a:rPr lang="en-US" dirty="0"/>
-              <a:t>Announcements</a:t>
-            </a:r>
-          </a:p>
-        </p:txBody>
-      </p:sp>
-      <p:sp>
-        <p:nvSpPr>
-          <p:cNvPr id="3" name="Content Placeholder 2">
-            <a:extLst>
-              <a:ext uri="{FF2B5EF4-FFF2-40B4-BE49-F238E27FC236}">
-                <a16:creationId xmlns:a16="http://schemas.microsoft.com/office/drawing/2014/main" id="{2B4BBE2C-C693-B1FE-74D0-68C0E05A99A1}"/>
-              </a:ext>
-            </a:extLst>
-          </p:cNvPr>
-          <p:cNvSpPr>
-            <a:spLocks noGrp="1"/>
-          </p:cNvSpPr>
-          <p:nvPr>
-            <p:ph idx="1"/>
-          </p:nvPr>
-        </p:nvSpPr>
-        <p:spPr/>
-        <p:txBody>
-          <a:bodyPr/>
-          <a:lstStyle/>
-          <a:p>
-            <a:r>
-              <a:rPr lang="en-US" dirty="0"/>
-              <a:t>Exercise 0 released</a:t>
-            </a:r>
-          </a:p>
-          <a:p>
-            <a:pPr lvl="1"/>
-            <a:r>
-              <a:rPr lang="en-US" dirty="0"/>
-              <a:t>Due Wednesday 1/14</a:t>
-            </a:r>
-          </a:p>
-          <a:p>
-            <a:pPr lvl="1"/>
-            <a:r>
-              <a:rPr lang="en-US" dirty="0"/>
-              <a:t>There are 2 separate </a:t>
-            </a:r>
-            <a:r>
-              <a:rPr lang="en-US" dirty="0" err="1"/>
-              <a:t>gradescope</a:t>
-            </a:r>
-            <a:r>
-              <a:rPr lang="en-US" dirty="0"/>
-              <a:t> submissions</a:t>
-            </a:r>
-          </a:p>
-          <a:p>
-            <a:r>
-              <a:rPr lang="en-US" dirty="0"/>
-              <a:t>Concept check 0 released</a:t>
-            </a:r>
-          </a:p>
-          <a:p>
-            <a:pPr lvl="1"/>
-            <a:r>
-              <a:rPr lang="en-US" dirty="0"/>
-              <a:t>Helps us to get more familiar with each other!</a:t>
-            </a:r>
-          </a:p>
-          <a:p>
-            <a:pPr lvl="1"/>
-            <a:r>
-              <a:rPr lang="en-US" dirty="0" err="1"/>
-              <a:t>Gradescope</a:t>
-            </a:r>
-            <a:r>
-              <a:rPr lang="en-US" dirty="0"/>
-              <a:t> submission due 1/15</a:t>
-            </a:r>
-          </a:p>
-          <a:p>
-            <a:pPr lvl="1"/>
-            <a:r>
-              <a:rPr lang="en-US" dirty="0"/>
-              <a:t>Meet the staff activity due by 1/30</a:t>
-            </a:r>
-          </a:p>
-          <a:p>
-            <a:pPr lvl="2"/>
-            <a:r>
-              <a:rPr lang="en-US" dirty="0"/>
-              <a:t>Come to any office hours, chat with us, ask us to mark you off for this</a:t>
-            </a:r>
-          </a:p>
-        </p:txBody>
-      </p:sp>
-    </p:spTree>
-    <p:extLst>
-      <p:ext uri="{BB962C8B-B14F-4D97-AF65-F5344CB8AC3E}">
-        <p14:creationId xmlns:p14="http://schemas.microsoft.com/office/powerpoint/2010/main" val="3210885505"/>
-      </p:ext>
-    </p:extLst>
-  </p:cSld>
-  <p:clrMapOvr>
-    <a:masterClrMapping/>
-  </p:clrMapOvr>
-</p:sld>
-</file>
-
-<file path=ppt/slides/slide20.xml><?xml version="1.0" encoding="utf-8"?>
+<file path=ppt/slides/slide22.xml><?xml version="1.0" encoding="utf-8"?>
 <p:sld xmlns:a="http://schemas.openxmlformats.org/drawingml/2006/main" xmlns:r="http://schemas.openxmlformats.org/officeDocument/2006/relationships" xmlns:p="http://schemas.openxmlformats.org/presentationml/2006/main">
   <p:cSld>
     <p:spTree>
@@ -15172,7 +15654,7 @@
 </p:sld>
 </file>
 
-<file path=ppt/slides/slide21.xml><?xml version="1.0" encoding="utf-8"?>
+<file path=ppt/slides/slide23.xml><?xml version="1.0" encoding="utf-8"?>
 <p:sld xmlns:a="http://schemas.openxmlformats.org/drawingml/2006/main" xmlns:r="http://schemas.openxmlformats.org/officeDocument/2006/relationships" xmlns:p="http://schemas.openxmlformats.org/presentationml/2006/main">
   <p:cSld>
     <p:spTree>
@@ -15655,7 +16137,7 @@
 </p:sld>
 </file>
 
-<file path=ppt/slides/slide22.xml><?xml version="1.0" encoding="utf-8"?>
+<file path=ppt/slides/slide24.xml><?xml version="1.0" encoding="utf-8"?>
 <p:sld xmlns:a="http://schemas.openxmlformats.org/drawingml/2006/main" xmlns:r="http://schemas.openxmlformats.org/officeDocument/2006/relationships" xmlns:p="http://schemas.openxmlformats.org/presentationml/2006/main">
   <p:cSld>
     <p:spTree>
@@ -15925,7 +16407,7 @@
 </p:sld>
 </file>
 
-<file path=ppt/slides/slide23.xml><?xml version="1.0" encoding="utf-8"?>
+<file path=ppt/slides/slide25.xml><?xml version="1.0" encoding="utf-8"?>
 <p:sld xmlns:a="http://schemas.openxmlformats.org/drawingml/2006/main" xmlns:r="http://schemas.openxmlformats.org/officeDocument/2006/relationships" xmlns:p="http://schemas.openxmlformats.org/presentationml/2006/main">
   <p:cSld>
     <p:spTree>
@@ -15976,7 +16458,7 @@
           <a:p>
             <a:r>
               <a:rPr lang="en-US" dirty="0"/>
-              <a:t>Worst Case Running Time - Example</a:t>
+              <a:t>Worst Case – Example 1 (Questions)</a:t>
             </a:r>
           </a:p>
         </p:txBody>
@@ -16393,7 +16875,7 @@
 </p:sld>
 </file>
 
-<file path=ppt/slides/slide24.xml><?xml version="1.0" encoding="utf-8"?>
+<file path=ppt/slides/slide26.xml><?xml version="1.0" encoding="utf-8"?>
 <p:sld xmlns:a="http://schemas.openxmlformats.org/drawingml/2006/main" xmlns:r="http://schemas.openxmlformats.org/officeDocument/2006/relationships" xmlns:p="http://schemas.openxmlformats.org/presentationml/2006/main">
   <p:cSld>
     <p:spTree>
@@ -16438,7 +16920,7 @@
           <a:p>
             <a:r>
               <a:rPr lang="en-US" dirty="0"/>
-              <a:t>Worst Case Running Time - Example</a:t>
+              <a:t>Worst Case – Example 1 (Answers)</a:t>
             </a:r>
           </a:p>
         </p:txBody>
@@ -16990,7 +17472,7 @@
 </p:sld>
 </file>
 
-<file path=ppt/slides/slide25.xml><?xml version="1.0" encoding="utf-8"?>
+<file path=ppt/slides/slide27.xml><?xml version="1.0" encoding="utf-8"?>
 <p:sld xmlns:a="http://schemas.openxmlformats.org/drawingml/2006/main" xmlns:r="http://schemas.openxmlformats.org/officeDocument/2006/relationships" xmlns:p="http://schemas.openxmlformats.org/presentationml/2006/main">
   <p:cSld>
     <p:spTree>
@@ -17035,7 +17517,7 @@
           <a:p>
             <a:r>
               <a:rPr lang="en-US" dirty="0"/>
-              <a:t>Worst Case Running Time – Example 2</a:t>
+              <a:t>Worst Case – Example 2 (Questions)</a:t>
             </a:r>
           </a:p>
         </p:txBody>
@@ -17347,7 +17829,7 @@
 </p:sld>
 </file>
 
-<file path=ppt/slides/slide26.xml><?xml version="1.0" encoding="utf-8"?>
+<file path=ppt/slides/slide28.xml><?xml version="1.0" encoding="utf-8"?>
 <p:sld xmlns:a="http://schemas.openxmlformats.org/drawingml/2006/main" xmlns:r="http://schemas.openxmlformats.org/officeDocument/2006/relationships" xmlns:p="http://schemas.openxmlformats.org/presentationml/2006/main">
   <p:cSld>
     <p:spTree>
@@ -17398,7 +17880,7 @@
           <a:p>
             <a:r>
               <a:rPr lang="en-US" dirty="0"/>
-              <a:t>Worst Case Running Time – Example 2</a:t>
+              <a:t>Worst Case – Example 2 (Answers)</a:t>
             </a:r>
           </a:p>
         </p:txBody>
@@ -17821,7 +18303,7 @@
 </p:sld>
 </file>
 
-<file path=ppt/slides/slide27.xml><?xml version="1.0" encoding="utf-8"?>
+<file path=ppt/slides/slide29.xml><?xml version="1.0" encoding="utf-8"?>
 <p:sld xmlns:a="http://schemas.openxmlformats.org/drawingml/2006/main" xmlns:r="http://schemas.openxmlformats.org/officeDocument/2006/relationships" xmlns:p="http://schemas.openxmlformats.org/presentationml/2006/main">
   <p:cSld>
     <p:spTree>
@@ -18006,7 +18488,149 @@
 </p:sld>
 </file>
 
-<file path=ppt/slides/slide28.xml><?xml version="1.0" encoding="utf-8"?>
+<file path=ppt/slides/slide3.xml><?xml version="1.0" encoding="utf-8"?>
+<p:sld xmlns:a="http://schemas.openxmlformats.org/drawingml/2006/main" xmlns:r="http://schemas.openxmlformats.org/officeDocument/2006/relationships" xmlns:p="http://schemas.openxmlformats.org/presentationml/2006/main">
+  <p:cSld>
+    <p:spTree>
+      <p:nvGrpSpPr>
+        <p:cNvPr id="1" name=""/>
+        <p:cNvGrpSpPr/>
+        <p:nvPr/>
+      </p:nvGrpSpPr>
+      <p:grpSpPr>
+        <a:xfrm>
+          <a:off x="0" y="0"/>
+          <a:ext cx="0" cy="0"/>
+          <a:chOff x="0" y="0"/>
+          <a:chExt cx="0" cy="0"/>
+        </a:xfrm>
+      </p:grpSpPr>
+      <p:sp>
+        <p:nvSpPr>
+          <p:cNvPr id="2" name="Title 1">
+            <a:extLst>
+              <a:ext uri="{FF2B5EF4-FFF2-40B4-BE49-F238E27FC236}">
+                <a16:creationId xmlns:a16="http://schemas.microsoft.com/office/drawing/2014/main" id="{D70D41E5-465C-EBB5-E9CD-029376B833DF}"/>
+              </a:ext>
+            </a:extLst>
+          </p:cNvPr>
+          <p:cNvSpPr>
+            <a:spLocks noGrp="1"/>
+          </p:cNvSpPr>
+          <p:nvPr>
+            <p:ph type="title"/>
+          </p:nvPr>
+        </p:nvSpPr>
+        <p:spPr/>
+        <p:txBody>
+          <a:bodyPr/>
+          <a:lstStyle/>
+          <a:p>
+            <a:r>
+              <a:rPr lang="en-US" dirty="0"/>
+              <a:t>ADT: Queue</a:t>
+            </a:r>
+          </a:p>
+        </p:txBody>
+      </p:sp>
+      <p:sp>
+        <p:nvSpPr>
+          <p:cNvPr id="3" name="Content Placeholder 2">
+            <a:extLst>
+              <a:ext uri="{FF2B5EF4-FFF2-40B4-BE49-F238E27FC236}">
+                <a16:creationId xmlns:a16="http://schemas.microsoft.com/office/drawing/2014/main" id="{B5EF048E-DA88-5227-7793-0EE138E7390F}"/>
+              </a:ext>
+            </a:extLst>
+          </p:cNvPr>
+          <p:cNvSpPr>
+            <a:spLocks noGrp="1"/>
+          </p:cNvSpPr>
+          <p:nvPr>
+            <p:ph idx="1"/>
+          </p:nvPr>
+        </p:nvSpPr>
+        <p:spPr/>
+        <p:txBody>
+          <a:bodyPr/>
+          <a:lstStyle/>
+          <a:p>
+            <a:r>
+              <a:rPr lang="en-US" dirty="0"/>
+              <a:t>What is it?</a:t>
+            </a:r>
+          </a:p>
+          <a:p>
+            <a:pPr lvl="1"/>
+            <a:r>
+              <a:rPr lang="en-US" dirty="0"/>
+              <a:t>A collection of items that we interact with in a “First In First Out” (FIFO) way</a:t>
+            </a:r>
+          </a:p>
+          <a:p>
+            <a:r>
+              <a:rPr lang="en-US" dirty="0"/>
+              <a:t>What operations do we need?</a:t>
+            </a:r>
+          </a:p>
+          <a:p>
+            <a:pPr lvl="1"/>
+            <a:r>
+              <a:rPr lang="en-US" dirty="0"/>
+              <a:t>Enqueue</a:t>
+            </a:r>
+          </a:p>
+          <a:p>
+            <a:pPr lvl="2"/>
+            <a:r>
+              <a:rPr lang="en-US" dirty="0"/>
+              <a:t>Add a new item to the queue</a:t>
+            </a:r>
+          </a:p>
+          <a:p>
+            <a:pPr lvl="1"/>
+            <a:r>
+              <a:rPr lang="en-US" dirty="0"/>
+              <a:t>Dequeue</a:t>
+            </a:r>
+          </a:p>
+          <a:p>
+            <a:pPr lvl="2"/>
+            <a:r>
+              <a:rPr lang="en-US" dirty="0"/>
+              <a:t>Remove the “oldest” item from the queue</a:t>
+            </a:r>
+          </a:p>
+          <a:p>
+            <a:pPr lvl="1"/>
+            <a:r>
+              <a:rPr lang="en-US" dirty="0" err="1"/>
+              <a:t>IsEmpty</a:t>
+            </a:r>
+            <a:endParaRPr lang="en-US" dirty="0"/>
+          </a:p>
+          <a:p>
+            <a:pPr lvl="2"/>
+            <a:r>
+              <a:rPr lang="en-US" dirty="0"/>
+              <a:t>Indicate whether or not there are items still on the queue</a:t>
+            </a:r>
+          </a:p>
+        </p:txBody>
+      </p:sp>
+    </p:spTree>
+    <p:extLst>
+      <p:ext uri="{BB962C8B-B14F-4D97-AF65-F5344CB8AC3E}">
+        <p14:creationId xmlns:p14="http://schemas.microsoft.com/office/powerpoint/2010/main" val="438875024"/>
+      </p:ext>
+    </p:extLst>
+  </p:cSld>
+  <p:clrMapOvr>
+    <a:masterClrMapping/>
+  </p:clrMapOvr>
+</p:sld>
+</file>
+
+<file path=ppt/slides/slide30.xml><?xml version="1.0" encoding="utf-8"?>
 <p:sld xmlns:a="http://schemas.openxmlformats.org/drawingml/2006/main" xmlns:r="http://schemas.openxmlformats.org/officeDocument/2006/relationships" xmlns:p="http://schemas.openxmlformats.org/presentationml/2006/main">
   <p:cSld>
     <p:spTree>
@@ -18145,7 +18769,7 @@
 </p:sld>
 </file>
 
-<file path=ppt/slides/slide29.xml><?xml version="1.0" encoding="utf-8"?>
+<file path=ppt/slides/slide31.xml><?xml version="1.0" encoding="utf-8"?>
 <p:sld xmlns:a="http://schemas.openxmlformats.org/drawingml/2006/main" xmlns:r="http://schemas.openxmlformats.org/officeDocument/2006/relationships" xmlns:p="http://schemas.openxmlformats.org/presentationml/2006/main">
   <p:cSld>
     <p:spTree>
@@ -18184,14 +18808,693 @@
           <a:lstStyle/>
           <a:p>
             <a:r>
-              <a:rPr lang="en-US" dirty="0"/>
-              <a:t>Amortized Complexity Example - </a:t>
-            </a:r>
-            <a:r>
               <a:rPr lang="en-US" dirty="0" err="1"/>
               <a:t>ArrayList</a:t>
             </a:r>
-            <a:endParaRPr lang="en-US" dirty="0"/>
+            <a:r>
+              <a:rPr lang="en-US" dirty="0"/>
+              <a:t> - Worst Case Time of Add</a:t>
+            </a:r>
+          </a:p>
+        </p:txBody>
+      </p:sp>
+      <p:sp>
+        <p:nvSpPr>
+          <p:cNvPr id="5" name="Content Placeholder 2">
+            <a:extLst>
+              <a:ext uri="{FF2B5EF4-FFF2-40B4-BE49-F238E27FC236}">
+                <a16:creationId xmlns:a16="http://schemas.microsoft.com/office/drawing/2014/main" id="{EBE0DF2B-2C50-08CC-5BA6-B5A1FBAD4B25}"/>
+              </a:ext>
+            </a:extLst>
+          </p:cNvPr>
+          <p:cNvSpPr>
+            <a:spLocks noGrp="1"/>
+          </p:cNvSpPr>
+          <p:nvPr>
+            <p:ph sz="half" idx="1"/>
+          </p:nvPr>
+        </p:nvSpPr>
+        <p:spPr>
+          <a:xfrm>
+            <a:off x="349135" y="1825625"/>
+            <a:ext cx="5670665" cy="4667250"/>
+          </a:xfrm>
+        </p:spPr>
+        <p:txBody>
+          <a:bodyPr>
+            <a:normAutofit/>
+          </a:bodyPr>
+          <a:lstStyle/>
+          <a:p>
+            <a:pPr marL="0" indent="0">
+              <a:buNone/>
+            </a:pPr>
+            <a:r>
+              <a:rPr lang="en-US" sz="1600" b="0" dirty="0">
+                <a:solidFill>
+                  <a:srgbClr val="0000FF"/>
+                </a:solidFill>
+                <a:effectLst/>
+                <a:highlight>
+                  <a:srgbClr val="FFFFFF"/>
+                </a:highlight>
+                <a:latin typeface="Consolas" panose="020B0609020204030204" pitchFamily="49" charset="0"/>
+              </a:rPr>
+              <a:t>public</a:t>
+            </a:r>
+            <a:r>
+              <a:rPr lang="en-US" sz="1600" b="0" dirty="0">
+                <a:solidFill>
+                  <a:srgbClr val="000000"/>
+                </a:solidFill>
+                <a:effectLst/>
+                <a:highlight>
+                  <a:srgbClr val="FFFFFF"/>
+                </a:highlight>
+                <a:latin typeface="Consolas" panose="020B0609020204030204" pitchFamily="49" charset="0"/>
+              </a:rPr>
+              <a:t> </a:t>
+            </a:r>
+            <a:r>
+              <a:rPr lang="en-US" sz="1600" b="0" dirty="0">
+                <a:solidFill>
+                  <a:srgbClr val="0000FF"/>
+                </a:solidFill>
+                <a:effectLst/>
+                <a:highlight>
+                  <a:srgbClr val="FFFFFF"/>
+                </a:highlight>
+                <a:latin typeface="Consolas" panose="020B0609020204030204" pitchFamily="49" charset="0"/>
+              </a:rPr>
+              <a:t>void</a:t>
+            </a:r>
+            <a:r>
+              <a:rPr lang="en-US" sz="1600" b="0" dirty="0">
+                <a:solidFill>
+                  <a:srgbClr val="000000"/>
+                </a:solidFill>
+                <a:effectLst/>
+                <a:highlight>
+                  <a:srgbClr val="FFFFFF"/>
+                </a:highlight>
+                <a:latin typeface="Consolas" panose="020B0609020204030204" pitchFamily="49" charset="0"/>
+              </a:rPr>
+              <a:t> add(</a:t>
+            </a:r>
+            <a:r>
+              <a:rPr lang="en-US" sz="1600" dirty="0">
+                <a:solidFill>
+                  <a:srgbClr val="0000FF"/>
+                </a:solidFill>
+                <a:highlight>
+                  <a:srgbClr val="FFFFFF"/>
+                </a:highlight>
+                <a:latin typeface="Consolas" panose="020B0609020204030204" pitchFamily="49" charset="0"/>
+              </a:rPr>
+              <a:t>int</a:t>
+            </a:r>
+            <a:r>
+              <a:rPr lang="en-US" sz="1600" b="0" dirty="0">
+                <a:solidFill>
+                  <a:srgbClr val="000000"/>
+                </a:solidFill>
+                <a:effectLst/>
+                <a:highlight>
+                  <a:srgbClr val="FFFFFF"/>
+                </a:highlight>
+                <a:latin typeface="Consolas" panose="020B0609020204030204" pitchFamily="49" charset="0"/>
+              </a:rPr>
+              <a:t> value){</a:t>
+            </a:r>
+          </a:p>
+          <a:p>
+            <a:pPr marL="0" indent="0">
+              <a:buNone/>
+            </a:pPr>
+            <a:r>
+              <a:rPr lang="en-US" sz="1600" b="0" dirty="0">
+                <a:solidFill>
+                  <a:srgbClr val="000000"/>
+                </a:solidFill>
+                <a:effectLst/>
+                <a:highlight>
+                  <a:srgbClr val="FFFFFF"/>
+                </a:highlight>
+                <a:latin typeface="Consolas" panose="020B0609020204030204" pitchFamily="49" charset="0"/>
+              </a:rPr>
+              <a:t>    </a:t>
+            </a:r>
+            <a:r>
+              <a:rPr lang="en-US" sz="1600" b="0" dirty="0">
+                <a:solidFill>
+                  <a:srgbClr val="0000FF"/>
+                </a:solidFill>
+                <a:effectLst/>
+                <a:highlight>
+                  <a:srgbClr val="FFFFFF"/>
+                </a:highlight>
+                <a:latin typeface="Consolas" panose="020B0609020204030204" pitchFamily="49" charset="0"/>
+              </a:rPr>
+              <a:t>if</a:t>
+            </a:r>
+            <a:r>
+              <a:rPr lang="en-US" sz="1600" b="0" dirty="0">
+                <a:solidFill>
+                  <a:srgbClr val="000000"/>
+                </a:solidFill>
+                <a:effectLst/>
+                <a:highlight>
+                  <a:srgbClr val="FFFFFF"/>
+                </a:highlight>
+                <a:latin typeface="Consolas" panose="020B0609020204030204" pitchFamily="49" charset="0"/>
+              </a:rPr>
+              <a:t>(</a:t>
+            </a:r>
+            <a:r>
+              <a:rPr lang="en-US" sz="1600" b="0" dirty="0" err="1">
+                <a:solidFill>
+                  <a:srgbClr val="000000"/>
+                </a:solidFill>
+                <a:effectLst/>
+                <a:highlight>
+                  <a:srgbClr val="FFFFFF"/>
+                </a:highlight>
+                <a:latin typeface="Consolas" panose="020B0609020204030204" pitchFamily="49" charset="0"/>
+              </a:rPr>
+              <a:t>data.length</a:t>
+            </a:r>
+            <a:r>
+              <a:rPr lang="en-US" sz="1600" b="0" dirty="0">
+                <a:solidFill>
+                  <a:srgbClr val="000000"/>
+                </a:solidFill>
+                <a:effectLst/>
+                <a:highlight>
+                  <a:srgbClr val="FFFFFF"/>
+                </a:highlight>
+                <a:latin typeface="Consolas" panose="020B0609020204030204" pitchFamily="49" charset="0"/>
+              </a:rPr>
+              <a:t> == size)</a:t>
+            </a:r>
+          </a:p>
+          <a:p>
+            <a:pPr marL="0" indent="0">
+              <a:buNone/>
+            </a:pPr>
+            <a:r>
+              <a:rPr lang="en-US" sz="1600" b="0" dirty="0">
+                <a:solidFill>
+                  <a:srgbClr val="000000"/>
+                </a:solidFill>
+                <a:effectLst/>
+                <a:highlight>
+                  <a:srgbClr val="FFFFFF"/>
+                </a:highlight>
+                <a:latin typeface="Consolas" panose="020B0609020204030204" pitchFamily="49" charset="0"/>
+              </a:rPr>
+              <a:t>        resize();</a:t>
+            </a:r>
+          </a:p>
+          <a:p>
+            <a:pPr marL="0" indent="0">
+              <a:buNone/>
+            </a:pPr>
+            <a:r>
+              <a:rPr lang="en-US" sz="1600" b="0" dirty="0">
+                <a:solidFill>
+                  <a:srgbClr val="000000"/>
+                </a:solidFill>
+                <a:effectLst/>
+                <a:highlight>
+                  <a:srgbClr val="FFFFFF"/>
+                </a:highlight>
+                <a:latin typeface="Consolas" panose="020B0609020204030204" pitchFamily="49" charset="0"/>
+              </a:rPr>
+              <a:t>    data[size] = value;</a:t>
+            </a:r>
+          </a:p>
+          <a:p>
+            <a:pPr marL="0" indent="0">
+              <a:buNone/>
+            </a:pPr>
+            <a:r>
+              <a:rPr lang="en-US" sz="1600" b="0" dirty="0">
+                <a:solidFill>
+                  <a:srgbClr val="000000"/>
+                </a:solidFill>
+                <a:effectLst/>
+                <a:highlight>
+                  <a:srgbClr val="FFFFFF"/>
+                </a:highlight>
+                <a:latin typeface="Consolas" panose="020B0609020204030204" pitchFamily="49" charset="0"/>
+              </a:rPr>
+              <a:t>    size++;</a:t>
+            </a:r>
+          </a:p>
+          <a:p>
+            <a:pPr marL="0" indent="0">
+              <a:buNone/>
+            </a:pPr>
+            <a:r>
+              <a:rPr lang="en-US" sz="1600" b="0" dirty="0">
+                <a:solidFill>
+                  <a:srgbClr val="000000"/>
+                </a:solidFill>
+                <a:effectLst/>
+                <a:highlight>
+                  <a:srgbClr val="FFFFFF"/>
+                </a:highlight>
+                <a:latin typeface="Consolas" panose="020B0609020204030204" pitchFamily="49" charset="0"/>
+              </a:rPr>
+              <a:t>}</a:t>
+            </a:r>
+            <a:endParaRPr lang="en-US" sz="1600" dirty="0">
+              <a:solidFill>
+                <a:srgbClr val="0000FF"/>
+              </a:solidFill>
+              <a:latin typeface="Consolas" panose="020B0609020204030204" pitchFamily="49" charset="0"/>
+            </a:endParaRPr>
+          </a:p>
+          <a:p>
+            <a:pPr marL="0" indent="0">
+              <a:buNone/>
+            </a:pPr>
+            <a:r>
+              <a:rPr lang="en-US" sz="1600" b="0" dirty="0">
+                <a:solidFill>
+                  <a:srgbClr val="0000FF"/>
+                </a:solidFill>
+                <a:effectLst/>
+                <a:latin typeface="Consolas" panose="020B0609020204030204" pitchFamily="49" charset="0"/>
+              </a:rPr>
+              <a:t>private</a:t>
+            </a:r>
+            <a:r>
+              <a:rPr lang="en-US" sz="1600" b="0" dirty="0">
+                <a:solidFill>
+                  <a:srgbClr val="000000"/>
+                </a:solidFill>
+                <a:effectLst/>
+                <a:latin typeface="Consolas" panose="020B0609020204030204" pitchFamily="49" charset="0"/>
+              </a:rPr>
+              <a:t> </a:t>
+            </a:r>
+            <a:r>
+              <a:rPr lang="en-US" sz="1600" b="0" dirty="0">
+                <a:solidFill>
+                  <a:srgbClr val="0000FF"/>
+                </a:solidFill>
+                <a:effectLst/>
+                <a:latin typeface="Consolas" panose="020B0609020204030204" pitchFamily="49" charset="0"/>
+              </a:rPr>
+              <a:t>void</a:t>
+            </a:r>
+            <a:r>
+              <a:rPr lang="en-US" sz="1600" b="0" dirty="0">
+                <a:solidFill>
+                  <a:srgbClr val="000000"/>
+                </a:solidFill>
+                <a:effectLst/>
+                <a:latin typeface="Consolas" panose="020B0609020204030204" pitchFamily="49" charset="0"/>
+              </a:rPr>
+              <a:t> resize(){</a:t>
+            </a:r>
+          </a:p>
+          <a:p>
+            <a:pPr marL="0" indent="0">
+              <a:buNone/>
+            </a:pPr>
+            <a:r>
+              <a:rPr lang="en-US" sz="1600" b="0" dirty="0">
+                <a:solidFill>
+                  <a:srgbClr val="000000"/>
+                </a:solidFill>
+                <a:effectLst/>
+                <a:latin typeface="Consolas" panose="020B0609020204030204" pitchFamily="49" charset="0"/>
+              </a:rPr>
+              <a:t>    </a:t>
+            </a:r>
+            <a:r>
+              <a:rPr lang="en-US" sz="1600" b="0" dirty="0">
+                <a:solidFill>
+                  <a:srgbClr val="0000FF"/>
+                </a:solidFill>
+                <a:effectLst/>
+                <a:latin typeface="Consolas" panose="020B0609020204030204" pitchFamily="49" charset="0"/>
+              </a:rPr>
+              <a:t>int</a:t>
+            </a:r>
+            <a:r>
+              <a:rPr lang="en-US" sz="1600" b="0" dirty="0">
+                <a:solidFill>
+                  <a:srgbClr val="000000"/>
+                </a:solidFill>
+                <a:effectLst/>
+                <a:latin typeface="Consolas" panose="020B0609020204030204" pitchFamily="49" charset="0"/>
+              </a:rPr>
+              <a:t>[] </a:t>
+            </a:r>
+            <a:r>
+              <a:rPr lang="en-US" sz="1600" b="0" dirty="0" err="1">
+                <a:solidFill>
+                  <a:srgbClr val="000000"/>
+                </a:solidFill>
+                <a:effectLst/>
+                <a:latin typeface="Consolas" panose="020B0609020204030204" pitchFamily="49" charset="0"/>
+              </a:rPr>
+              <a:t>oldData</a:t>
+            </a:r>
+            <a:r>
+              <a:rPr lang="en-US" sz="1600" b="0" dirty="0">
+                <a:solidFill>
+                  <a:srgbClr val="000000"/>
+                </a:solidFill>
+                <a:effectLst/>
+                <a:latin typeface="Consolas" panose="020B0609020204030204" pitchFamily="49" charset="0"/>
+              </a:rPr>
+              <a:t> = data;</a:t>
+            </a:r>
+          </a:p>
+          <a:p>
+            <a:pPr marL="0" indent="0">
+              <a:buNone/>
+            </a:pPr>
+            <a:r>
+              <a:rPr lang="en-US" sz="1600" b="0" dirty="0">
+                <a:solidFill>
+                  <a:srgbClr val="000000"/>
+                </a:solidFill>
+                <a:effectLst/>
+                <a:latin typeface="Consolas" panose="020B0609020204030204" pitchFamily="49" charset="0"/>
+              </a:rPr>
+              <a:t>    data = </a:t>
+            </a:r>
+            <a:r>
+              <a:rPr lang="en-US" sz="1600" b="0" dirty="0">
+                <a:solidFill>
+                  <a:srgbClr val="0000FF"/>
+                </a:solidFill>
+                <a:effectLst/>
+                <a:latin typeface="Consolas" panose="020B0609020204030204" pitchFamily="49" charset="0"/>
+              </a:rPr>
+              <a:t>new int</a:t>
+            </a:r>
+            <a:r>
+              <a:rPr lang="en-US" sz="1600" b="0" dirty="0">
+                <a:solidFill>
+                  <a:srgbClr val="000000"/>
+                </a:solidFill>
+                <a:effectLst/>
+                <a:latin typeface="Consolas" panose="020B0609020204030204" pitchFamily="49" charset="0"/>
+              </a:rPr>
+              <a:t>[</a:t>
+            </a:r>
+            <a:r>
+              <a:rPr lang="en-US" sz="1600" b="0" dirty="0" err="1">
+                <a:solidFill>
+                  <a:srgbClr val="000000"/>
+                </a:solidFill>
+                <a:effectLst/>
+                <a:latin typeface="Consolas" panose="020B0609020204030204" pitchFamily="49" charset="0"/>
+              </a:rPr>
+              <a:t>data.length</a:t>
+            </a:r>
+            <a:r>
+              <a:rPr lang="en-US" sz="1600" b="0" dirty="0">
+                <a:solidFill>
+                  <a:srgbClr val="000000"/>
+                </a:solidFill>
+                <a:effectLst/>
+                <a:latin typeface="Consolas" panose="020B0609020204030204" pitchFamily="49" charset="0"/>
+              </a:rPr>
+              <a:t>*</a:t>
+            </a:r>
+            <a:r>
+              <a:rPr lang="en-US" sz="1600" b="0" dirty="0">
+                <a:solidFill>
+                  <a:srgbClr val="098658"/>
+                </a:solidFill>
+                <a:effectLst/>
+                <a:latin typeface="Consolas" panose="020B0609020204030204" pitchFamily="49" charset="0"/>
+              </a:rPr>
+              <a:t>2</a:t>
+            </a:r>
+            <a:r>
+              <a:rPr lang="en-US" sz="1600" b="0" dirty="0">
+                <a:solidFill>
+                  <a:srgbClr val="000000"/>
+                </a:solidFill>
+                <a:effectLst/>
+                <a:latin typeface="Consolas" panose="020B0609020204030204" pitchFamily="49" charset="0"/>
+              </a:rPr>
+              <a:t>];</a:t>
+            </a:r>
+          </a:p>
+          <a:p>
+            <a:pPr marL="0" indent="0">
+              <a:buNone/>
+            </a:pPr>
+            <a:r>
+              <a:rPr lang="en-US" sz="1600" b="0" dirty="0">
+                <a:solidFill>
+                  <a:srgbClr val="000000"/>
+                </a:solidFill>
+                <a:effectLst/>
+                <a:latin typeface="Consolas" panose="020B0609020204030204" pitchFamily="49" charset="0"/>
+              </a:rPr>
+              <a:t>    </a:t>
+            </a:r>
+            <a:r>
+              <a:rPr lang="en-US" sz="1600" b="0" dirty="0">
+                <a:solidFill>
+                  <a:srgbClr val="0000FF"/>
+                </a:solidFill>
+                <a:effectLst/>
+                <a:latin typeface="Consolas" panose="020B0609020204030204" pitchFamily="49" charset="0"/>
+              </a:rPr>
+              <a:t>for</a:t>
+            </a:r>
+            <a:r>
+              <a:rPr lang="en-US" sz="1600" b="0" dirty="0">
+                <a:solidFill>
+                  <a:srgbClr val="000000"/>
+                </a:solidFill>
+                <a:effectLst/>
+                <a:latin typeface="Consolas" panose="020B0609020204030204" pitchFamily="49" charset="0"/>
+              </a:rPr>
+              <a:t>(</a:t>
+            </a:r>
+            <a:r>
+              <a:rPr lang="en-US" sz="1600" b="0" dirty="0">
+                <a:solidFill>
+                  <a:srgbClr val="0000FF"/>
+                </a:solidFill>
+                <a:effectLst/>
+                <a:latin typeface="Consolas" panose="020B0609020204030204" pitchFamily="49" charset="0"/>
+              </a:rPr>
+              <a:t>int</a:t>
+            </a:r>
+            <a:r>
+              <a:rPr lang="en-US" sz="1600" b="0" dirty="0">
+                <a:solidFill>
+                  <a:srgbClr val="000000"/>
+                </a:solidFill>
+                <a:effectLst/>
+                <a:latin typeface="Consolas" panose="020B0609020204030204" pitchFamily="49" charset="0"/>
+              </a:rPr>
+              <a:t> </a:t>
+            </a:r>
+            <a:r>
+              <a:rPr lang="en-US" sz="1600" b="0" dirty="0" err="1">
+                <a:solidFill>
+                  <a:srgbClr val="000000"/>
+                </a:solidFill>
+                <a:effectLst/>
+                <a:latin typeface="Consolas" panose="020B0609020204030204" pitchFamily="49" charset="0"/>
+              </a:rPr>
+              <a:t>i</a:t>
+            </a:r>
+            <a:r>
+              <a:rPr lang="en-US" sz="1600" b="0" dirty="0">
+                <a:solidFill>
+                  <a:srgbClr val="000000"/>
+                </a:solidFill>
+                <a:effectLst/>
+                <a:latin typeface="Consolas" panose="020B0609020204030204" pitchFamily="49" charset="0"/>
+              </a:rPr>
+              <a:t> = </a:t>
+            </a:r>
+            <a:r>
+              <a:rPr lang="en-US" sz="1600" b="0" dirty="0">
+                <a:solidFill>
+                  <a:srgbClr val="098658"/>
+                </a:solidFill>
+                <a:effectLst/>
+                <a:latin typeface="Consolas" panose="020B0609020204030204" pitchFamily="49" charset="0"/>
+              </a:rPr>
+              <a:t>0</a:t>
+            </a:r>
+            <a:r>
+              <a:rPr lang="en-US" sz="1600" b="0" dirty="0">
+                <a:solidFill>
+                  <a:srgbClr val="000000"/>
+                </a:solidFill>
+                <a:effectLst/>
+                <a:latin typeface="Consolas" panose="020B0609020204030204" pitchFamily="49" charset="0"/>
+              </a:rPr>
+              <a:t>; </a:t>
+            </a:r>
+            <a:r>
+              <a:rPr lang="en-US" sz="1600" b="0" dirty="0" err="1">
+                <a:solidFill>
+                  <a:srgbClr val="000000"/>
+                </a:solidFill>
+                <a:effectLst/>
+                <a:latin typeface="Consolas" panose="020B0609020204030204" pitchFamily="49" charset="0"/>
+              </a:rPr>
+              <a:t>i</a:t>
+            </a:r>
+            <a:r>
+              <a:rPr lang="en-US" sz="1600" b="0" dirty="0">
+                <a:solidFill>
+                  <a:srgbClr val="000000"/>
+                </a:solidFill>
+                <a:effectLst/>
+                <a:latin typeface="Consolas" panose="020B0609020204030204" pitchFamily="49" charset="0"/>
+              </a:rPr>
+              <a:t> &lt; </a:t>
+            </a:r>
+            <a:r>
+              <a:rPr lang="en-US" sz="1600" b="0" dirty="0" err="1">
+                <a:solidFill>
+                  <a:srgbClr val="000000"/>
+                </a:solidFill>
+                <a:effectLst/>
+                <a:latin typeface="Consolas" panose="020B0609020204030204" pitchFamily="49" charset="0"/>
+              </a:rPr>
+              <a:t>oldData.length</a:t>
+            </a:r>
+            <a:r>
+              <a:rPr lang="en-US" sz="1600" b="0" dirty="0">
+                <a:solidFill>
+                  <a:srgbClr val="000000"/>
+                </a:solidFill>
+                <a:effectLst/>
+                <a:latin typeface="Consolas" panose="020B0609020204030204" pitchFamily="49" charset="0"/>
+              </a:rPr>
+              <a:t>; </a:t>
+            </a:r>
+            <a:r>
+              <a:rPr lang="en-US" sz="1600" b="0" dirty="0" err="1">
+                <a:solidFill>
+                  <a:srgbClr val="000000"/>
+                </a:solidFill>
+                <a:effectLst/>
+                <a:latin typeface="Consolas" panose="020B0609020204030204" pitchFamily="49" charset="0"/>
+              </a:rPr>
+              <a:t>i</a:t>
+            </a:r>
+            <a:r>
+              <a:rPr lang="en-US" sz="1600" b="0" dirty="0">
+                <a:solidFill>
+                  <a:srgbClr val="000000"/>
+                </a:solidFill>
+                <a:effectLst/>
+                <a:latin typeface="Consolas" panose="020B0609020204030204" pitchFamily="49" charset="0"/>
+              </a:rPr>
+              <a:t>++)</a:t>
+            </a:r>
+          </a:p>
+          <a:p>
+            <a:pPr marL="0" indent="0">
+              <a:buNone/>
+            </a:pPr>
+            <a:r>
+              <a:rPr lang="en-US" sz="1600" b="0" dirty="0">
+                <a:solidFill>
+                  <a:srgbClr val="000000"/>
+                </a:solidFill>
+                <a:effectLst/>
+                <a:latin typeface="Consolas" panose="020B0609020204030204" pitchFamily="49" charset="0"/>
+              </a:rPr>
+              <a:t>        data[</a:t>
+            </a:r>
+            <a:r>
+              <a:rPr lang="en-US" sz="1600" b="0" dirty="0" err="1">
+                <a:solidFill>
+                  <a:srgbClr val="000000"/>
+                </a:solidFill>
+                <a:effectLst/>
+                <a:latin typeface="Consolas" panose="020B0609020204030204" pitchFamily="49" charset="0"/>
+              </a:rPr>
+              <a:t>i</a:t>
+            </a:r>
+            <a:r>
+              <a:rPr lang="en-US" sz="1600" b="0" dirty="0">
+                <a:solidFill>
+                  <a:srgbClr val="000000"/>
+                </a:solidFill>
+                <a:effectLst/>
+                <a:latin typeface="Consolas" panose="020B0609020204030204" pitchFamily="49" charset="0"/>
+              </a:rPr>
+              <a:t>] = </a:t>
+            </a:r>
+            <a:r>
+              <a:rPr lang="en-US" sz="1600" b="0" dirty="0" err="1">
+                <a:solidFill>
+                  <a:srgbClr val="000000"/>
+                </a:solidFill>
+                <a:effectLst/>
+                <a:latin typeface="Consolas" panose="020B0609020204030204" pitchFamily="49" charset="0"/>
+              </a:rPr>
+              <a:t>oldData</a:t>
+            </a:r>
+            <a:r>
+              <a:rPr lang="en-US" sz="1600" b="0" dirty="0">
+                <a:solidFill>
+                  <a:srgbClr val="000000"/>
+                </a:solidFill>
+                <a:effectLst/>
+                <a:latin typeface="Consolas" panose="020B0609020204030204" pitchFamily="49" charset="0"/>
+              </a:rPr>
+              <a:t>[</a:t>
+            </a:r>
+            <a:r>
+              <a:rPr lang="en-US" sz="1600" b="0" dirty="0" err="1">
+                <a:solidFill>
+                  <a:srgbClr val="000000"/>
+                </a:solidFill>
+                <a:effectLst/>
+                <a:latin typeface="Consolas" panose="020B0609020204030204" pitchFamily="49" charset="0"/>
+              </a:rPr>
+              <a:t>i</a:t>
+            </a:r>
+            <a:r>
+              <a:rPr lang="en-US" sz="1600" b="0" dirty="0">
+                <a:solidFill>
+                  <a:srgbClr val="000000"/>
+                </a:solidFill>
+                <a:effectLst/>
+                <a:latin typeface="Consolas" panose="020B0609020204030204" pitchFamily="49" charset="0"/>
+              </a:rPr>
+              <a:t>];</a:t>
+            </a:r>
+          </a:p>
+          <a:p>
+            <a:pPr marL="0" indent="0">
+              <a:buNone/>
+            </a:pPr>
+            <a:r>
+              <a:rPr lang="en-US" sz="1600" b="0" dirty="0">
+                <a:solidFill>
+                  <a:srgbClr val="000000"/>
+                </a:solidFill>
+                <a:effectLst/>
+                <a:latin typeface="Consolas" panose="020B0609020204030204" pitchFamily="49" charset="0"/>
+              </a:rPr>
+              <a:t>}</a:t>
+            </a:r>
+            <a:endParaRPr lang="en-US" sz="1600" dirty="0"/>
           </a:p>
         </p:txBody>
       </p:sp>
@@ -18313,12 +19616,74 @@
           </p:sp>
         </mc:Fallback>
       </mc:AlternateContent>
+    </p:spTree>
+    <p:extLst>
+      <p:ext uri="{BB962C8B-B14F-4D97-AF65-F5344CB8AC3E}">
+        <p14:creationId xmlns:p14="http://schemas.microsoft.com/office/powerpoint/2010/main" val="1158566627"/>
+      </p:ext>
+    </p:extLst>
+  </p:cSld>
+  <p:clrMapOvr>
+    <a:masterClrMapping/>
+  </p:clrMapOvr>
+</p:sld>
+</file>
+
+<file path=ppt/slides/slide32.xml><?xml version="1.0" encoding="utf-8"?>
+<p:sld xmlns:a="http://schemas.openxmlformats.org/drawingml/2006/main" xmlns:r="http://schemas.openxmlformats.org/officeDocument/2006/relationships" xmlns:p="http://schemas.openxmlformats.org/presentationml/2006/main">
+  <p:cSld>
+    <p:spTree>
+      <p:nvGrpSpPr>
+        <p:cNvPr id="1" name=""/>
+        <p:cNvGrpSpPr/>
+        <p:nvPr/>
+      </p:nvGrpSpPr>
+      <p:grpSpPr>
+        <a:xfrm>
+          <a:off x="0" y="0"/>
+          <a:ext cx="0" cy="0"/>
+          <a:chOff x="0" y="0"/>
+          <a:chExt cx="0" cy="0"/>
+        </a:xfrm>
+      </p:grpSpPr>
       <p:sp>
         <p:nvSpPr>
-          <p:cNvPr id="5" name="Content Placeholder 2">
+          <p:cNvPr id="2" name="Title 1">
             <a:extLst>
               <a:ext uri="{FF2B5EF4-FFF2-40B4-BE49-F238E27FC236}">
-                <a16:creationId xmlns:a16="http://schemas.microsoft.com/office/drawing/2014/main" id="{EBE0DF2B-2C50-08CC-5BA6-B5A1FBAD4B25}"/>
+                <a16:creationId xmlns:a16="http://schemas.microsoft.com/office/drawing/2014/main" id="{22E69A94-1220-2804-63AB-870822DBD0D0}"/>
+              </a:ext>
+            </a:extLst>
+          </p:cNvPr>
+          <p:cNvSpPr>
+            <a:spLocks noGrp="1"/>
+          </p:cNvSpPr>
+          <p:nvPr>
+            <p:ph type="title"/>
+          </p:nvPr>
+        </p:nvSpPr>
+        <p:spPr/>
+        <p:txBody>
+          <a:bodyPr/>
+          <a:lstStyle/>
+          <a:p>
+            <a:r>
+              <a:rPr lang="en-US" dirty="0" err="1"/>
+              <a:t>ArrayList</a:t>
+            </a:r>
+            <a:r>
+              <a:rPr lang="en-US" dirty="0"/>
+              <a:t> – Amortized Time of Add</a:t>
+            </a:r>
+          </a:p>
+        </p:txBody>
+      </p:sp>
+      <p:sp>
+        <p:nvSpPr>
+          <p:cNvPr id="14" name="Content Placeholder 2">
+            <a:extLst>
+              <a:ext uri="{FF2B5EF4-FFF2-40B4-BE49-F238E27FC236}">
+                <a16:creationId xmlns:a16="http://schemas.microsoft.com/office/drawing/2014/main" id="{959D7957-B208-5E47-448C-922F4E81772F}"/>
               </a:ext>
             </a:extLst>
           </p:cNvPr>
@@ -18345,11 +19710,10 @@
               <a:buNone/>
             </a:pPr>
             <a:r>
-              <a:rPr lang="en-US" sz="1600" b="0" dirty="0">
+              <a:rPr lang="en-US" sz="1600" dirty="0">
                 <a:solidFill>
                   <a:srgbClr val="0000FF"/>
                 </a:solidFill>
-                <a:effectLst/>
                 <a:highlight>
                   <a:srgbClr val="FFFFFF"/>
                 </a:highlight>
@@ -18358,11 +19722,10 @@
               <a:t>public</a:t>
             </a:r>
             <a:r>
-              <a:rPr lang="en-US" sz="1600" b="0" dirty="0">
+              <a:rPr lang="en-US" sz="1600" dirty="0">
                 <a:solidFill>
                   <a:srgbClr val="000000"/>
                 </a:solidFill>
-                <a:effectLst/>
                 <a:highlight>
                   <a:srgbClr val="FFFFFF"/>
                 </a:highlight>
@@ -18371,11 +19734,10 @@
               <a:t> </a:t>
             </a:r>
             <a:r>
-              <a:rPr lang="en-US" sz="1600" b="0" dirty="0">
+              <a:rPr lang="en-US" sz="1600" dirty="0">
                 <a:solidFill>
                   <a:srgbClr val="0000FF"/>
                 </a:solidFill>
-                <a:effectLst/>
                 <a:highlight>
                   <a:srgbClr val="FFFFFF"/>
                 </a:highlight>
@@ -18384,11 +19746,10 @@
               <a:t>void</a:t>
             </a:r>
             <a:r>
-              <a:rPr lang="en-US" sz="1600" b="0" dirty="0">
+              <a:rPr lang="en-US" sz="1600" dirty="0">
                 <a:solidFill>
                   <a:srgbClr val="000000"/>
                 </a:solidFill>
-                <a:effectLst/>
                 <a:highlight>
                   <a:srgbClr val="FFFFFF"/>
                 </a:highlight>
@@ -18409,11 +19770,10 @@
               <a:t>int</a:t>
             </a:r>
             <a:r>
-              <a:rPr lang="en-US" sz="1600" b="0" dirty="0">
+              <a:rPr lang="en-US" sz="1600" dirty="0">
                 <a:solidFill>
                   <a:srgbClr val="000000"/>
                 </a:solidFill>
-                <a:effectLst/>
                 <a:highlight>
                   <a:srgbClr val="FFFFFF"/>
                 </a:highlight>
@@ -18427,11 +19787,10 @@
               <a:buNone/>
             </a:pPr>
             <a:r>
-              <a:rPr lang="en-US" sz="1600" b="0" dirty="0">
+              <a:rPr lang="en-US" sz="1600" dirty="0">
                 <a:solidFill>
                   <a:srgbClr val="000000"/>
                 </a:solidFill>
-                <a:effectLst/>
                 <a:highlight>
                   <a:srgbClr val="FFFFFF"/>
                 </a:highlight>
@@ -18440,11 +19799,10 @@
               <a:t>    </a:t>
             </a:r>
             <a:r>
-              <a:rPr lang="en-US" sz="1600" b="0" dirty="0">
+              <a:rPr lang="en-US" sz="1600" dirty="0">
                 <a:solidFill>
                   <a:srgbClr val="0000FF"/>
                 </a:solidFill>
-                <a:effectLst/>
                 <a:highlight>
                   <a:srgbClr val="FFFFFF"/>
                 </a:highlight>
@@ -18453,11 +19811,10 @@
               <a:t>if</a:t>
             </a:r>
             <a:r>
-              <a:rPr lang="en-US" sz="1600" b="0" dirty="0">
+              <a:rPr lang="en-US" sz="1600" dirty="0">
                 <a:solidFill>
                   <a:srgbClr val="000000"/>
                 </a:solidFill>
-                <a:effectLst/>
                 <a:highlight>
                   <a:srgbClr val="FFFFFF"/>
                 </a:highlight>
@@ -18466,11 +19823,10 @@
               <a:t>(</a:t>
             </a:r>
             <a:r>
-              <a:rPr lang="en-US" sz="1600" b="0" dirty="0" err="1">
+              <a:rPr lang="en-US" sz="1600" dirty="0" err="1">
                 <a:solidFill>
                   <a:srgbClr val="000000"/>
                 </a:solidFill>
-                <a:effectLst/>
                 <a:highlight>
                   <a:srgbClr val="FFFFFF"/>
                 </a:highlight>
@@ -18479,11 +19835,10 @@
               <a:t>data.length</a:t>
             </a:r>
             <a:r>
-              <a:rPr lang="en-US" sz="1600" b="0" dirty="0">
+              <a:rPr lang="en-US" sz="1600" dirty="0">
                 <a:solidFill>
                   <a:srgbClr val="000000"/>
                 </a:solidFill>
-                <a:effectLst/>
                 <a:highlight>
                   <a:srgbClr val="FFFFFF"/>
                 </a:highlight>
@@ -18497,11 +19852,10 @@
               <a:buNone/>
             </a:pPr>
             <a:r>
-              <a:rPr lang="en-US" sz="1600" b="0" dirty="0">
+              <a:rPr lang="en-US" sz="1600" dirty="0">
                 <a:solidFill>
                   <a:srgbClr val="000000"/>
                 </a:solidFill>
-                <a:effectLst/>
                 <a:highlight>
                   <a:srgbClr val="FFFFFF"/>
                 </a:highlight>
@@ -18515,11 +19869,10 @@
               <a:buNone/>
             </a:pPr>
             <a:r>
-              <a:rPr lang="en-US" sz="1600" b="0" dirty="0">
+              <a:rPr lang="en-US" sz="1600" dirty="0">
                 <a:solidFill>
                   <a:srgbClr val="000000"/>
                 </a:solidFill>
-                <a:effectLst/>
                 <a:highlight>
                   <a:srgbClr val="FFFFFF"/>
                 </a:highlight>
@@ -18533,11 +19886,10 @@
               <a:buNone/>
             </a:pPr>
             <a:r>
-              <a:rPr lang="en-US" sz="1600" b="0" dirty="0">
+              <a:rPr lang="en-US" sz="1600" dirty="0">
                 <a:solidFill>
                   <a:srgbClr val="000000"/>
                 </a:solidFill>
-                <a:effectLst/>
                 <a:highlight>
                   <a:srgbClr val="FFFFFF"/>
                 </a:highlight>
@@ -18551,11 +19903,10 @@
               <a:buNone/>
             </a:pPr>
             <a:r>
-              <a:rPr lang="en-US" sz="1600" b="0" dirty="0">
+              <a:rPr lang="en-US" sz="1600" dirty="0">
                 <a:solidFill>
                   <a:srgbClr val="000000"/>
                 </a:solidFill>
-                <a:effectLst/>
                 <a:highlight>
                   <a:srgbClr val="FFFFFF"/>
                 </a:highlight>
@@ -18567,6 +19918,9 @@
               <a:solidFill>
                 <a:srgbClr val="0000FF"/>
               </a:solidFill>
+              <a:highlight>
+                <a:srgbClr val="FFFFFF"/>
+              </a:highlight>
               <a:latin typeface="Consolas" panose="020B0609020204030204" pitchFamily="49" charset="0"/>
             </a:endParaRPr>
           </a:p>
@@ -18575,41 +19929,49 @@
               <a:buNone/>
             </a:pPr>
             <a:r>
-              <a:rPr lang="en-US" sz="1600" b="0" dirty="0">
+              <a:rPr lang="en-US" sz="1600" dirty="0">
                 <a:solidFill>
                   <a:srgbClr val="0000FF"/>
                 </a:solidFill>
-                <a:effectLst/>
+                <a:highlight>
+                  <a:srgbClr val="FFFFFF"/>
+                </a:highlight>
                 <a:latin typeface="Consolas" panose="020B0609020204030204" pitchFamily="49" charset="0"/>
               </a:rPr>
               <a:t>private</a:t>
             </a:r>
             <a:r>
-              <a:rPr lang="en-US" sz="1600" b="0" dirty="0">
+              <a:rPr lang="en-US" sz="1600" dirty="0">
                 <a:solidFill>
                   <a:srgbClr val="000000"/>
                 </a:solidFill>
-                <a:effectLst/>
+                <a:highlight>
+                  <a:srgbClr val="FFFFFF"/>
+                </a:highlight>
                 <a:latin typeface="Consolas" panose="020B0609020204030204" pitchFamily="49" charset="0"/>
               </a:rPr>
               <a:t> </a:t>
             </a:r>
             <a:r>
-              <a:rPr lang="en-US" sz="1600" b="0" dirty="0">
+              <a:rPr lang="en-US" sz="1600" dirty="0">
                 <a:solidFill>
                   <a:srgbClr val="0000FF"/>
                 </a:solidFill>
-                <a:effectLst/>
+                <a:highlight>
+                  <a:srgbClr val="FFFFFF"/>
+                </a:highlight>
                 <a:latin typeface="Consolas" panose="020B0609020204030204" pitchFamily="49" charset="0"/>
               </a:rPr>
               <a:t>void</a:t>
             </a:r>
             <a:r>
-              <a:rPr lang="en-US" sz="1600" b="0" dirty="0">
+              <a:rPr lang="en-US" sz="1600" dirty="0">
                 <a:solidFill>
                   <a:srgbClr val="000000"/>
                 </a:solidFill>
-                <a:effectLst/>
+                <a:highlight>
+                  <a:srgbClr val="FFFFFF"/>
+                </a:highlight>
                 <a:latin typeface="Consolas" panose="020B0609020204030204" pitchFamily="49" charset="0"/>
               </a:rPr>
               <a:t> resize(){</a:t>
@@ -18620,51 +19982,61 @@
               <a:buNone/>
             </a:pPr>
             <a:r>
-              <a:rPr lang="en-US" sz="1600" b="0" dirty="0">
+              <a:rPr lang="en-US" sz="1600" dirty="0">
                 <a:solidFill>
                   <a:srgbClr val="000000"/>
                 </a:solidFill>
-                <a:effectLst/>
+                <a:highlight>
+                  <a:srgbClr val="FFFFFF"/>
+                </a:highlight>
                 <a:latin typeface="Consolas" panose="020B0609020204030204" pitchFamily="49" charset="0"/>
               </a:rPr>
               <a:t>    </a:t>
             </a:r>
             <a:r>
-              <a:rPr lang="en-US" sz="1600" b="0" dirty="0">
+              <a:rPr lang="en-US" sz="1600" dirty="0">
                 <a:solidFill>
                   <a:srgbClr val="0000FF"/>
                 </a:solidFill>
-                <a:effectLst/>
+                <a:highlight>
+                  <a:srgbClr val="FFFFFF"/>
+                </a:highlight>
                 <a:latin typeface="Consolas" panose="020B0609020204030204" pitchFamily="49" charset="0"/>
               </a:rPr>
               <a:t>int</a:t>
             </a:r>
             <a:r>
-              <a:rPr lang="en-US" sz="1600" b="0" dirty="0">
+              <a:rPr lang="en-US" sz="1600" dirty="0">
                 <a:solidFill>
                   <a:srgbClr val="000000"/>
                 </a:solidFill>
-                <a:effectLst/>
+                <a:highlight>
+                  <a:srgbClr val="FFFFFF"/>
+                </a:highlight>
                 <a:latin typeface="Consolas" panose="020B0609020204030204" pitchFamily="49" charset="0"/>
               </a:rPr>
               <a:t>[] </a:t>
             </a:r>
             <a:r>
-              <a:rPr lang="en-US" sz="1600" b="0" dirty="0" err="1">
+              <a:rPr lang="en-US" sz="1600" dirty="0" err="1">
                 <a:solidFill>
                   <a:srgbClr val="000000"/>
                 </a:solidFill>
-                <a:effectLst/>
+                <a:highlight>
+                  <a:srgbClr val="FFFFFF"/>
+                </a:highlight>
                 <a:latin typeface="Consolas" panose="020B0609020204030204" pitchFamily="49" charset="0"/>
               </a:rPr>
               <a:t>oldData</a:t>
             </a:r>
             <a:r>
-              <a:rPr lang="en-US" sz="1600" b="0" dirty="0">
+              <a:rPr lang="en-US" sz="1600" dirty="0">
                 <a:solidFill>
                   <a:srgbClr val="000000"/>
                 </a:solidFill>
-                <a:effectLst/>
+                <a:highlight>
+                  <a:srgbClr val="FFFFFF"/>
+                </a:highlight>
                 <a:latin typeface="Consolas" panose="020B0609020204030204" pitchFamily="49" charset="0"/>
               </a:rPr>
               <a:t> = data;</a:t>
@@ -18675,71 +20047,85 @@
               <a:buNone/>
             </a:pPr>
             <a:r>
-              <a:rPr lang="en-US" sz="1600" b="0" dirty="0">
+              <a:rPr lang="en-US" sz="1600" dirty="0">
                 <a:solidFill>
                   <a:srgbClr val="000000"/>
                 </a:solidFill>
-                <a:effectLst/>
+                <a:highlight>
+                  <a:srgbClr val="FFFFFF"/>
+                </a:highlight>
                 <a:latin typeface="Consolas" panose="020B0609020204030204" pitchFamily="49" charset="0"/>
               </a:rPr>
               <a:t>    data = </a:t>
             </a:r>
             <a:r>
-              <a:rPr lang="en-US" sz="1600" b="0" dirty="0">
+              <a:rPr lang="en-US" sz="1600" dirty="0">
                 <a:solidFill>
                   <a:srgbClr val="0000FF"/>
                 </a:solidFill>
-                <a:effectLst/>
+                <a:highlight>
+                  <a:srgbClr val="FFFFFF"/>
+                </a:highlight>
                 <a:latin typeface="Consolas" panose="020B0609020204030204" pitchFamily="49" charset="0"/>
               </a:rPr>
               <a:t>new int</a:t>
             </a:r>
             <a:r>
-              <a:rPr lang="en-US" sz="1600" b="0" dirty="0">
+              <a:rPr lang="en-US" sz="1600" dirty="0">
                 <a:solidFill>
                   <a:srgbClr val="000000"/>
                 </a:solidFill>
-                <a:effectLst/>
+                <a:highlight>
+                  <a:srgbClr val="FFFFFF"/>
+                </a:highlight>
                 <a:latin typeface="Consolas" panose="020B0609020204030204" pitchFamily="49" charset="0"/>
               </a:rPr>
               <a:t>[</a:t>
             </a:r>
             <a:r>
-              <a:rPr lang="en-US" sz="1600" b="0" dirty="0" err="1">
+              <a:rPr lang="en-US" sz="1600" dirty="0" err="1">
                 <a:solidFill>
                   <a:srgbClr val="000000"/>
                 </a:solidFill>
-                <a:effectLst/>
+                <a:highlight>
+                  <a:srgbClr val="FFFFFF"/>
+                </a:highlight>
                 <a:latin typeface="Consolas" panose="020B0609020204030204" pitchFamily="49" charset="0"/>
               </a:rPr>
               <a:t>data.length</a:t>
             </a:r>
             <a:r>
-              <a:rPr lang="en-US" sz="1600" b="0" dirty="0">
+              <a:rPr lang="en-US" sz="1600" dirty="0">
                 <a:solidFill>
                   <a:srgbClr val="000000"/>
                 </a:solidFill>
-                <a:effectLst/>
+                <a:highlight>
+                  <a:srgbClr val="FFFFFF"/>
+                </a:highlight>
                 <a:latin typeface="Consolas" panose="020B0609020204030204" pitchFamily="49" charset="0"/>
               </a:rPr>
               <a:t>*</a:t>
             </a:r>
             <a:r>
-              <a:rPr lang="en-US" sz="1600" b="0" dirty="0">
+              <a:rPr lang="en-US" sz="1600" dirty="0">
                 <a:solidFill>
                   <a:srgbClr val="098658"/>
                 </a:solidFill>
-                <a:effectLst/>
+                <a:highlight>
+                  <a:srgbClr val="FFFFFF"/>
+                </a:highlight>
                 <a:latin typeface="Consolas" panose="020B0609020204030204" pitchFamily="49" charset="0"/>
               </a:rPr>
               <a:t>2</a:t>
             </a:r>
             <a:r>
-              <a:rPr lang="en-US" sz="1600" b="0" dirty="0">
+              <a:rPr lang="en-US" sz="1600" dirty="0">
                 <a:solidFill>
                   <a:srgbClr val="000000"/>
                 </a:solidFill>
-                <a:effectLst/>
+                <a:highlight>
+                  <a:srgbClr val="FFFFFF"/>
+                </a:highlight>
                 <a:latin typeface="Consolas" panose="020B0609020204030204" pitchFamily="49" charset="0"/>
               </a:rPr>
               <a:t>];</a:t>
@@ -18750,151 +20136,181 @@
               <a:buNone/>
             </a:pPr>
             <a:r>
-              <a:rPr lang="en-US" sz="1600" b="0" dirty="0">
+              <a:rPr lang="en-US" sz="1600" dirty="0">
                 <a:solidFill>
                   <a:srgbClr val="000000"/>
                 </a:solidFill>
-                <a:effectLst/>
+                <a:highlight>
+                  <a:srgbClr val="FFFFFF"/>
+                </a:highlight>
                 <a:latin typeface="Consolas" panose="020B0609020204030204" pitchFamily="49" charset="0"/>
               </a:rPr>
               <a:t>    </a:t>
             </a:r>
             <a:r>
-              <a:rPr lang="en-US" sz="1600" b="0" dirty="0">
+              <a:rPr lang="en-US" sz="1600" dirty="0">
                 <a:solidFill>
                   <a:srgbClr val="0000FF"/>
                 </a:solidFill>
-                <a:effectLst/>
+                <a:highlight>
+                  <a:srgbClr val="FFFFFF"/>
+                </a:highlight>
                 <a:latin typeface="Consolas" panose="020B0609020204030204" pitchFamily="49" charset="0"/>
               </a:rPr>
               <a:t>for</a:t>
             </a:r>
             <a:r>
-              <a:rPr lang="en-US" sz="1600" b="0" dirty="0">
+              <a:rPr lang="en-US" sz="1600" dirty="0">
                 <a:solidFill>
                   <a:srgbClr val="000000"/>
                 </a:solidFill>
-                <a:effectLst/>
+                <a:highlight>
+                  <a:srgbClr val="FFFFFF"/>
+                </a:highlight>
                 <a:latin typeface="Consolas" panose="020B0609020204030204" pitchFamily="49" charset="0"/>
               </a:rPr>
               <a:t>(</a:t>
             </a:r>
             <a:r>
-              <a:rPr lang="en-US" sz="1600" b="0" dirty="0">
+              <a:rPr lang="en-US" sz="1600" dirty="0">
                 <a:solidFill>
                   <a:srgbClr val="0000FF"/>
                 </a:solidFill>
-                <a:effectLst/>
+                <a:highlight>
+                  <a:srgbClr val="FFFFFF"/>
+                </a:highlight>
                 <a:latin typeface="Consolas" panose="020B0609020204030204" pitchFamily="49" charset="0"/>
               </a:rPr>
               <a:t>int</a:t>
             </a:r>
             <a:r>
-              <a:rPr lang="en-US" sz="1600" b="0" dirty="0">
+              <a:rPr lang="en-US" sz="1600" dirty="0">
                 <a:solidFill>
                   <a:srgbClr val="000000"/>
                 </a:solidFill>
-                <a:effectLst/>
+                <a:highlight>
+                  <a:srgbClr val="FFFFFF"/>
+                </a:highlight>
                 <a:latin typeface="Consolas" panose="020B0609020204030204" pitchFamily="49" charset="0"/>
               </a:rPr>
               <a:t> </a:t>
             </a:r>
             <a:r>
-              <a:rPr lang="en-US" sz="1600" b="0" dirty="0" err="1">
+              <a:rPr lang="en-US" sz="1600" dirty="0" err="1">
                 <a:solidFill>
                   <a:srgbClr val="000000"/>
                 </a:solidFill>
-                <a:effectLst/>
+                <a:highlight>
+                  <a:srgbClr val="FFFFFF"/>
+                </a:highlight>
                 <a:latin typeface="Consolas" panose="020B0609020204030204" pitchFamily="49" charset="0"/>
               </a:rPr>
               <a:t>i</a:t>
             </a:r>
             <a:r>
-              <a:rPr lang="en-US" sz="1600" b="0" dirty="0">
+              <a:rPr lang="en-US" sz="1600" dirty="0">
                 <a:solidFill>
                   <a:srgbClr val="000000"/>
                 </a:solidFill>
-                <a:effectLst/>
+                <a:highlight>
+                  <a:srgbClr val="FFFFFF"/>
+                </a:highlight>
                 <a:latin typeface="Consolas" panose="020B0609020204030204" pitchFamily="49" charset="0"/>
               </a:rPr>
               <a:t> = </a:t>
             </a:r>
             <a:r>
-              <a:rPr lang="en-US" sz="1600" b="0" dirty="0">
+              <a:rPr lang="en-US" sz="1600" dirty="0">
                 <a:solidFill>
                   <a:srgbClr val="098658"/>
                 </a:solidFill>
-                <a:effectLst/>
+                <a:highlight>
+                  <a:srgbClr val="FFFFFF"/>
+                </a:highlight>
                 <a:latin typeface="Consolas" panose="020B0609020204030204" pitchFamily="49" charset="0"/>
               </a:rPr>
               <a:t>0</a:t>
             </a:r>
             <a:r>
-              <a:rPr lang="en-US" sz="1600" b="0" dirty="0">
+              <a:rPr lang="en-US" sz="1600" dirty="0">
                 <a:solidFill>
                   <a:srgbClr val="000000"/>
                 </a:solidFill>
-                <a:effectLst/>
+                <a:highlight>
+                  <a:srgbClr val="FFFFFF"/>
+                </a:highlight>
                 <a:latin typeface="Consolas" panose="020B0609020204030204" pitchFamily="49" charset="0"/>
               </a:rPr>
               <a:t>; </a:t>
             </a:r>
             <a:r>
-              <a:rPr lang="en-US" sz="1600" b="0" dirty="0" err="1">
+              <a:rPr lang="en-US" sz="1600" dirty="0" err="1">
                 <a:solidFill>
                   <a:srgbClr val="000000"/>
                 </a:solidFill>
-                <a:effectLst/>
+                <a:highlight>
+                  <a:srgbClr val="FFFFFF"/>
+                </a:highlight>
                 <a:latin typeface="Consolas" panose="020B0609020204030204" pitchFamily="49" charset="0"/>
               </a:rPr>
               <a:t>i</a:t>
             </a:r>
             <a:r>
-              <a:rPr lang="en-US" sz="1600" b="0" dirty="0">
+              <a:rPr lang="en-US" sz="1600" dirty="0">
                 <a:solidFill>
                   <a:srgbClr val="000000"/>
                 </a:solidFill>
-                <a:effectLst/>
+                <a:highlight>
+                  <a:srgbClr val="FFFFFF"/>
+                </a:highlight>
                 <a:latin typeface="Consolas" panose="020B0609020204030204" pitchFamily="49" charset="0"/>
               </a:rPr>
               <a:t> &lt; </a:t>
             </a:r>
             <a:r>
-              <a:rPr lang="en-US" sz="1600" b="0" dirty="0" err="1">
+              <a:rPr lang="en-US" sz="1600" dirty="0" err="1">
                 <a:solidFill>
                   <a:srgbClr val="000000"/>
                 </a:solidFill>
-                <a:effectLst/>
+                <a:highlight>
+                  <a:srgbClr val="FFFFFF"/>
+                </a:highlight>
                 <a:latin typeface="Consolas" panose="020B0609020204030204" pitchFamily="49" charset="0"/>
               </a:rPr>
               <a:t>oldData.length</a:t>
             </a:r>
             <a:r>
-              <a:rPr lang="en-US" sz="1600" b="0" dirty="0">
+              <a:rPr lang="en-US" sz="1600" dirty="0">
                 <a:solidFill>
                   <a:srgbClr val="000000"/>
                 </a:solidFill>
-                <a:effectLst/>
+                <a:highlight>
+                  <a:srgbClr val="FFFFFF"/>
+                </a:highlight>
                 <a:latin typeface="Consolas" panose="020B0609020204030204" pitchFamily="49" charset="0"/>
               </a:rPr>
               <a:t>; </a:t>
             </a:r>
             <a:r>
-              <a:rPr lang="en-US" sz="1600" b="0" dirty="0" err="1">
+              <a:rPr lang="en-US" sz="1600" dirty="0" err="1">
                 <a:solidFill>
                   <a:srgbClr val="000000"/>
                 </a:solidFill>
-                <a:effectLst/>
+                <a:highlight>
+                  <a:srgbClr val="FFFFFF"/>
+                </a:highlight>
                 <a:latin typeface="Consolas" panose="020B0609020204030204" pitchFamily="49" charset="0"/>
               </a:rPr>
               <a:t>i</a:t>
             </a:r>
             <a:r>
-              <a:rPr lang="en-US" sz="1600" b="0" dirty="0">
+              <a:rPr lang="en-US" sz="1600" dirty="0">
                 <a:solidFill>
                   <a:srgbClr val="000000"/>
                 </a:solidFill>
-                <a:effectLst/>
+                <a:highlight>
+                  <a:srgbClr val="FFFFFF"/>
+                </a:highlight>
                 <a:latin typeface="Consolas" panose="020B0609020204030204" pitchFamily="49" charset="0"/>
               </a:rPr>
               <a:t>++)</a:t>
@@ -18905,71 +20321,85 @@
               <a:buNone/>
             </a:pPr>
             <a:r>
-              <a:rPr lang="en-US" sz="1600" b="0" dirty="0">
+              <a:rPr lang="en-US" sz="1600" dirty="0">
                 <a:solidFill>
                   <a:srgbClr val="000000"/>
                 </a:solidFill>
-                <a:effectLst/>
+                <a:highlight>
+                  <a:srgbClr val="FFFFFF"/>
+                </a:highlight>
                 <a:latin typeface="Consolas" panose="020B0609020204030204" pitchFamily="49" charset="0"/>
               </a:rPr>
               <a:t>        data[</a:t>
             </a:r>
             <a:r>
-              <a:rPr lang="en-US" sz="1600" b="0" dirty="0" err="1">
+              <a:rPr lang="en-US" sz="1600" dirty="0" err="1">
                 <a:solidFill>
                   <a:srgbClr val="000000"/>
                 </a:solidFill>
-                <a:effectLst/>
+                <a:highlight>
+                  <a:srgbClr val="FFFFFF"/>
+                </a:highlight>
                 <a:latin typeface="Consolas" panose="020B0609020204030204" pitchFamily="49" charset="0"/>
               </a:rPr>
               <a:t>i</a:t>
             </a:r>
             <a:r>
-              <a:rPr lang="en-US" sz="1600" b="0" dirty="0">
+              <a:rPr lang="en-US" sz="1600" dirty="0">
                 <a:solidFill>
                   <a:srgbClr val="000000"/>
                 </a:solidFill>
-                <a:effectLst/>
+                <a:highlight>
+                  <a:srgbClr val="FFFFFF"/>
+                </a:highlight>
                 <a:latin typeface="Consolas" panose="020B0609020204030204" pitchFamily="49" charset="0"/>
               </a:rPr>
               <a:t>] = </a:t>
             </a:r>
             <a:r>
-              <a:rPr lang="en-US" sz="1600" b="0" dirty="0" err="1">
+              <a:rPr lang="en-US" sz="1600" dirty="0" err="1">
                 <a:solidFill>
                   <a:srgbClr val="000000"/>
                 </a:solidFill>
-                <a:effectLst/>
+                <a:highlight>
+                  <a:srgbClr val="FFFFFF"/>
+                </a:highlight>
                 <a:latin typeface="Consolas" panose="020B0609020204030204" pitchFamily="49" charset="0"/>
               </a:rPr>
               <a:t>oldData</a:t>
             </a:r>
             <a:r>
-              <a:rPr lang="en-US" sz="1600" b="0" dirty="0">
+              <a:rPr lang="en-US" sz="1600" dirty="0">
                 <a:solidFill>
                   <a:srgbClr val="000000"/>
                 </a:solidFill>
-                <a:effectLst/>
+                <a:highlight>
+                  <a:srgbClr val="FFFFFF"/>
+                </a:highlight>
                 <a:latin typeface="Consolas" panose="020B0609020204030204" pitchFamily="49" charset="0"/>
               </a:rPr>
               <a:t>[</a:t>
             </a:r>
             <a:r>
-              <a:rPr lang="en-US" sz="1600" b="0" dirty="0" err="1">
+              <a:rPr lang="en-US" sz="1600" dirty="0" err="1">
                 <a:solidFill>
                   <a:srgbClr val="000000"/>
                 </a:solidFill>
-                <a:effectLst/>
+                <a:highlight>
+                  <a:srgbClr val="FFFFFF"/>
+                </a:highlight>
                 <a:latin typeface="Consolas" panose="020B0609020204030204" pitchFamily="49" charset="0"/>
               </a:rPr>
               <a:t>i</a:t>
             </a:r>
             <a:r>
-              <a:rPr lang="en-US" sz="1600" b="0" dirty="0">
+              <a:rPr lang="en-US" sz="1600" dirty="0">
                 <a:solidFill>
                   <a:srgbClr val="000000"/>
                 </a:solidFill>
-                <a:effectLst/>
+                <a:highlight>
+                  <a:srgbClr val="FFFFFF"/>
+                </a:highlight>
                 <a:latin typeface="Consolas" panose="020B0609020204030204" pitchFamily="49" charset="0"/>
               </a:rPr>
               <a:t>];</a:t>
@@ -18980,23 +20410,550 @@
               <a:buNone/>
             </a:pPr>
             <a:r>
-              <a:rPr lang="en-US" sz="1600" b="0" dirty="0">
+              <a:rPr lang="en-US" sz="1600" dirty="0">
                 <a:solidFill>
                   <a:srgbClr val="000000"/>
                 </a:solidFill>
-                <a:effectLst/>
+                <a:highlight>
+                  <a:srgbClr val="FFFFFF"/>
+                </a:highlight>
                 <a:latin typeface="Consolas" panose="020B0609020204030204" pitchFamily="49" charset="0"/>
               </a:rPr>
               <a:t>}</a:t>
             </a:r>
-            <a:endParaRPr lang="en-US" sz="1600" dirty="0"/>
+            <a:endParaRPr lang="en-US" sz="1600" dirty="0">
+              <a:highlight>
+                <a:srgbClr val="FFFFFF"/>
+              </a:highlight>
+            </a:endParaRPr>
           </a:p>
         </p:txBody>
       </p:sp>
+      <p:grpSp>
+        <p:nvGrpSpPr>
+          <p:cNvPr id="10" name="Group 9" descr="In the resize method, we double the length of the array using the line:&#10;&#10;data = new int[data.length*2];&#10;&#10;By making the choice to double, we guarantee we will not have to do any more resizing until the size of the ArrayList has double.">
+            <a:extLst>
+              <a:ext uri="{FF2B5EF4-FFF2-40B4-BE49-F238E27FC236}">
+                <a16:creationId xmlns:a16="http://schemas.microsoft.com/office/drawing/2014/main" id="{9C129402-4FE1-5B72-A11C-459E5ABFB08C}"/>
+              </a:ext>
+            </a:extLst>
+          </p:cNvPr>
+          <p:cNvGrpSpPr/>
+          <p:nvPr/>
+        </p:nvGrpSpPr>
+        <p:grpSpPr>
+          <a:xfrm>
+            <a:off x="3603084" y="4899991"/>
+            <a:ext cx="2975957" cy="1873574"/>
+            <a:chOff x="3603084" y="4899991"/>
+            <a:chExt cx="2975957" cy="1873574"/>
+          </a:xfrm>
+        </p:grpSpPr>
+        <p:cxnSp>
+          <p:nvCxnSpPr>
+            <p:cNvPr id="7" name="Straight Arrow Connector 6">
+              <a:extLst>
+                <a:ext uri="{FF2B5EF4-FFF2-40B4-BE49-F238E27FC236}">
+                  <a16:creationId xmlns:a16="http://schemas.microsoft.com/office/drawing/2014/main" id="{1CA4A632-C2AC-7864-4F4E-4A5F61D15BA8}"/>
+                </a:ext>
+              </a:extLst>
+            </p:cNvPr>
+            <p:cNvCxnSpPr>
+              <a:cxnSpLocks/>
+              <a:stCxn id="3" idx="0"/>
+            </p:cNvCxnSpPr>
+            <p:nvPr/>
+          </p:nvCxnSpPr>
+          <p:spPr>
+            <a:xfrm flipH="1" flipV="1">
+              <a:off x="3856383" y="4899991"/>
+              <a:ext cx="1234680" cy="950244"/>
+            </a:xfrm>
+            <a:prstGeom prst="straightConnector1">
+              <a:avLst/>
+            </a:prstGeom>
+            <a:ln>
+              <a:solidFill>
+                <a:srgbClr val="FF0000"/>
+              </a:solidFill>
+              <a:tailEnd type="triangle"/>
+            </a:ln>
+          </p:spPr>
+          <p:style>
+            <a:lnRef idx="1">
+              <a:schemeClr val="accent1"/>
+            </a:lnRef>
+            <a:fillRef idx="0">
+              <a:schemeClr val="accent1"/>
+            </a:fillRef>
+            <a:effectRef idx="0">
+              <a:schemeClr val="accent1"/>
+            </a:effectRef>
+            <a:fontRef idx="minor">
+              <a:schemeClr val="tx1"/>
+            </a:fontRef>
+          </p:style>
+        </p:cxnSp>
+        <p:sp>
+          <p:nvSpPr>
+            <p:cNvPr id="3" name="TextBox 2">
+              <a:extLst>
+                <a:ext uri="{FF2B5EF4-FFF2-40B4-BE49-F238E27FC236}">
+                  <a16:creationId xmlns:a16="http://schemas.microsoft.com/office/drawing/2014/main" id="{16D5D4F1-8370-387D-F6D8-21C5C80D4F42}"/>
+                </a:ext>
+              </a:extLst>
+            </p:cNvPr>
+            <p:cNvSpPr txBox="1"/>
+            <p:nvPr/>
+          </p:nvSpPr>
+          <p:spPr>
+            <a:xfrm>
+              <a:off x="3603084" y="5850235"/>
+              <a:ext cx="2975957" cy="923330"/>
+            </a:xfrm>
+            <a:prstGeom prst="rect">
+              <a:avLst/>
+            </a:prstGeom>
+            <a:noFill/>
+            <a:ln>
+              <a:solidFill>
+                <a:srgbClr val="FF0000"/>
+              </a:solidFill>
+            </a:ln>
+          </p:spPr>
+          <p:txBody>
+            <a:bodyPr wrap="square" rtlCol="0">
+              <a:spAutoFit/>
+            </a:bodyPr>
+            <a:lstStyle/>
+            <a:p>
+              <a:r>
+                <a:rPr lang="en-US" dirty="0">
+                  <a:solidFill>
+                    <a:srgbClr val="FF0000"/>
+                  </a:solidFill>
+                </a:rPr>
+                <a:t>Every time we resize, we earn </a:t>
+              </a:r>
+              <a:r>
+                <a:rPr lang="en-US" dirty="0" err="1">
+                  <a:solidFill>
+                    <a:srgbClr val="FF0000"/>
+                  </a:solidFill>
+                  <a:latin typeface="Consolas" panose="020B0609020204030204" pitchFamily="49" charset="0"/>
+                </a:rPr>
+                <a:t>data.length</a:t>
+              </a:r>
+              <a:r>
+                <a:rPr lang="en-US" dirty="0">
+                  <a:solidFill>
+                    <a:srgbClr val="FF0000"/>
+                  </a:solidFill>
+                </a:rPr>
+                <a:t> more adds before the next resize!</a:t>
+              </a:r>
+            </a:p>
+          </p:txBody>
+        </p:sp>
+      </p:grpSp>
+      <mc:AlternateContent xmlns:mc="http://schemas.openxmlformats.org/markup-compatibility/2006" xmlns:a14="http://schemas.microsoft.com/office/drawing/2010/main">
+        <mc:Choice Requires="a14">
+          <p:sp>
+            <p:nvSpPr>
+              <p:cNvPr id="4" name="Content Placeholder 3">
+                <a:extLst>
+                  <a:ext uri="{FF2B5EF4-FFF2-40B4-BE49-F238E27FC236}">
+                    <a16:creationId xmlns:a16="http://schemas.microsoft.com/office/drawing/2014/main" id="{015840F2-52BA-DB0C-15EC-2298E887A62B}"/>
+                  </a:ext>
+                </a:extLst>
+              </p:cNvPr>
+              <p:cNvSpPr>
+                <a:spLocks noGrp="1"/>
+              </p:cNvSpPr>
+              <p:nvPr>
+                <p:ph sz="half" idx="2"/>
+              </p:nvPr>
+            </p:nvSpPr>
+            <p:spPr/>
+            <p:txBody>
+              <a:bodyPr>
+                <a:normAutofit/>
+              </a:bodyPr>
+              <a:lstStyle/>
+              <a:p>
+                <a:r>
+                  <a:rPr lang="en-US" dirty="0"/>
+                  <a:t>Amortized Analysis Idea:</a:t>
+                </a:r>
+              </a:p>
+              <a:p>
+                <a:pPr lvl="1"/>
+                <a:r>
+                  <a:rPr lang="en-US" dirty="0"/>
+                  <a:t>Suppose we have a program that in total does </a:t>
+                </a:r>
+                <a14:m>
+                  <m:oMath xmlns:m="http://schemas.openxmlformats.org/officeDocument/2006/math">
+                    <m:r>
+                      <a:rPr lang="en-US" b="0" i="1" smtClean="0">
+                        <a:latin typeface="Cambria Math" panose="02040503050406030204" pitchFamily="18" charset="0"/>
+                      </a:rPr>
+                      <m:t>𝑛</m:t>
+                    </m:r>
+                  </m:oMath>
+                </a14:m>
+                <a:r>
+                  <a:rPr lang="en-US" dirty="0"/>
+                  <a:t> adds.</a:t>
+                </a:r>
+              </a:p>
+              <a:p>
+                <a:pPr lvl="1"/>
+                <a:r>
+                  <a:rPr lang="en-US" dirty="0"/>
+                  <a:t>How much time was spent “on average” across all </a:t>
+                </a:r>
+                <a14:m>
+                  <m:oMath xmlns:m="http://schemas.openxmlformats.org/officeDocument/2006/math">
+                    <m:r>
+                      <a:rPr lang="en-US" b="0" i="1" smtClean="0">
+                        <a:latin typeface="Cambria Math" panose="02040503050406030204" pitchFamily="18" charset="0"/>
+                      </a:rPr>
+                      <m:t>𝑛</m:t>
+                    </m:r>
+                  </m:oMath>
+                </a14:m>
+                <a:r>
+                  <a:rPr lang="en-US" dirty="0"/>
+                  <a:t>?</a:t>
+                </a:r>
+              </a:p>
+              <a:p>
+                <a:r>
+                  <a:rPr lang="en-US" dirty="0"/>
+                  <a:t>Let </a:t>
+                </a:r>
+                <a14:m>
+                  <m:oMath xmlns:m="http://schemas.openxmlformats.org/officeDocument/2006/math">
+                    <m:r>
+                      <a:rPr lang="en-US" b="0" i="1" smtClean="0">
+                        <a:latin typeface="Cambria Math" panose="02040503050406030204" pitchFamily="18" charset="0"/>
+                      </a:rPr>
+                      <m:t>𝑐</m:t>
+                    </m:r>
+                  </m:oMath>
+                </a14:m>
+                <a:r>
+                  <a:rPr lang="en-US" dirty="0"/>
+                  <a:t> be the initial size of </a:t>
+                </a:r>
+                <a:r>
+                  <a:rPr lang="en-US" dirty="0">
+                    <a:latin typeface="Consolas" panose="020B0609020204030204" pitchFamily="49" charset="0"/>
+                  </a:rPr>
+                  <a:t>data</a:t>
+                </a:r>
+              </a:p>
+              <a:p>
+                <a:pPr lvl="1"/>
+                <a:r>
+                  <a:rPr lang="en-US" dirty="0"/>
+                  <a:t>The first </a:t>
+                </a:r>
+                <a14:m>
+                  <m:oMath xmlns:m="http://schemas.openxmlformats.org/officeDocument/2006/math">
+                    <m:r>
+                      <a:rPr lang="en-US" b="0" i="1" smtClean="0">
+                        <a:latin typeface="Cambria Math" panose="02040503050406030204" pitchFamily="18" charset="0"/>
+                      </a:rPr>
+                      <m:t>𝑐</m:t>
+                    </m:r>
+                  </m:oMath>
+                </a14:m>
+                <a:r>
+                  <a:rPr lang="en-US" dirty="0"/>
+                  <a:t> adds take: </a:t>
+                </a:r>
+                <a14:m>
+                  <m:oMath xmlns:m="http://schemas.openxmlformats.org/officeDocument/2006/math">
+                    <m:r>
+                      <a:rPr lang="en-US" b="0" i="1" smtClean="0">
+                        <a:latin typeface="Cambria Math" panose="02040503050406030204" pitchFamily="18" charset="0"/>
+                      </a:rPr>
+                      <m:t>𝑐</m:t>
+                    </m:r>
+                    <m:r>
+                      <a:rPr lang="en-US" b="0" i="1" smtClean="0">
+                        <a:latin typeface="Cambria Math" panose="02040503050406030204" pitchFamily="18" charset="0"/>
+                      </a:rPr>
+                      <m:t>+</m:t>
+                    </m:r>
+                    <m:r>
+                      <a:rPr lang="en-US" b="0" i="1" smtClean="0">
+                        <a:latin typeface="Cambria Math" panose="02040503050406030204" pitchFamily="18" charset="0"/>
+                      </a:rPr>
+                      <m:t>𝑐</m:t>
+                    </m:r>
+                    <m:r>
+                      <a:rPr lang="en-US" b="0" i="1" smtClean="0">
+                        <a:latin typeface="Cambria Math" panose="02040503050406030204" pitchFamily="18" charset="0"/>
+                      </a:rPr>
+                      <m:t>=2</m:t>
+                    </m:r>
+                    <m:r>
+                      <a:rPr lang="en-US" b="0" i="1" smtClean="0">
+                        <a:latin typeface="Cambria Math" panose="02040503050406030204" pitchFamily="18" charset="0"/>
+                      </a:rPr>
+                      <m:t>𝑐</m:t>
+                    </m:r>
+                  </m:oMath>
+                </a14:m>
+                <a:endParaRPr lang="en-US" dirty="0"/>
+              </a:p>
+              <a:p>
+                <a:pPr lvl="1"/>
+                <a:r>
+                  <a:rPr lang="en-US" dirty="0"/>
+                  <a:t>The next </a:t>
+                </a:r>
+                <a14:m>
+                  <m:oMath xmlns:m="http://schemas.openxmlformats.org/officeDocument/2006/math">
+                    <m:r>
+                      <a:rPr lang="en-US" b="0" i="1" smtClean="0">
+                        <a:latin typeface="Cambria Math" panose="02040503050406030204" pitchFamily="18" charset="0"/>
+                      </a:rPr>
+                      <m:t>2</m:t>
+                    </m:r>
+                    <m:r>
+                      <a:rPr lang="en-US" b="0" i="1" smtClean="0">
+                        <a:latin typeface="Cambria Math" panose="02040503050406030204" pitchFamily="18" charset="0"/>
+                      </a:rPr>
+                      <m:t>𝑐</m:t>
+                    </m:r>
+                  </m:oMath>
+                </a14:m>
+                <a:r>
+                  <a:rPr lang="en-US" dirty="0"/>
+                  <a:t> adds: </a:t>
+                </a:r>
+                <a14:m>
+                  <m:oMath xmlns:m="http://schemas.openxmlformats.org/officeDocument/2006/math">
+                    <m:r>
+                      <a:rPr lang="en-US" b="0" i="1" smtClean="0">
+                        <a:latin typeface="Cambria Math" panose="02040503050406030204" pitchFamily="18" charset="0"/>
+                      </a:rPr>
+                      <m:t>2</m:t>
+                    </m:r>
+                    <m:r>
+                      <a:rPr lang="en-US" b="0" i="1" smtClean="0">
+                        <a:latin typeface="Cambria Math" panose="02040503050406030204" pitchFamily="18" charset="0"/>
+                      </a:rPr>
+                      <m:t>𝑐</m:t>
+                    </m:r>
+                    <m:r>
+                      <a:rPr lang="en-US" b="0" i="1" smtClean="0">
+                        <a:latin typeface="Cambria Math" panose="02040503050406030204" pitchFamily="18" charset="0"/>
+                      </a:rPr>
+                      <m:t>+2</m:t>
+                    </m:r>
+                    <m:r>
+                      <a:rPr lang="en-US" b="0" i="1" smtClean="0">
+                        <a:latin typeface="Cambria Math" panose="02040503050406030204" pitchFamily="18" charset="0"/>
+                      </a:rPr>
+                      <m:t>𝑐</m:t>
+                    </m:r>
+                    <m:r>
+                      <a:rPr lang="en-US" b="0" i="1" smtClean="0">
+                        <a:latin typeface="Cambria Math" panose="02040503050406030204" pitchFamily="18" charset="0"/>
+                      </a:rPr>
+                      <m:t>=4</m:t>
+                    </m:r>
+                    <m:r>
+                      <a:rPr lang="en-US" b="0" i="1" smtClean="0">
+                        <a:latin typeface="Cambria Math" panose="02040503050406030204" pitchFamily="18" charset="0"/>
+                      </a:rPr>
+                      <m:t>𝑐</m:t>
+                    </m:r>
+                  </m:oMath>
+                </a14:m>
+                <a:endParaRPr lang="en-US" dirty="0"/>
+              </a:p>
+              <a:p>
+                <a:pPr lvl="1"/>
+                <a:r>
+                  <a:rPr lang="en-US" dirty="0"/>
+                  <a:t>The next </a:t>
+                </a:r>
+                <a14:m>
+                  <m:oMath xmlns:m="http://schemas.openxmlformats.org/officeDocument/2006/math">
+                    <m:r>
+                      <a:rPr lang="en-US" b="0" i="1" smtClean="0">
+                        <a:latin typeface="Cambria Math" panose="02040503050406030204" pitchFamily="18" charset="0"/>
+                      </a:rPr>
+                      <m:t>4</m:t>
+                    </m:r>
+                    <m:r>
+                      <a:rPr lang="en-US" b="0" i="1" smtClean="0">
+                        <a:latin typeface="Cambria Math" panose="02040503050406030204" pitchFamily="18" charset="0"/>
+                      </a:rPr>
+                      <m:t>𝑐</m:t>
+                    </m:r>
+                  </m:oMath>
+                </a14:m>
+                <a:r>
+                  <a:rPr lang="en-US" dirty="0"/>
+                  <a:t> adds: </a:t>
+                </a:r>
+                <a14:m>
+                  <m:oMath xmlns:m="http://schemas.openxmlformats.org/officeDocument/2006/math">
+                    <m:r>
+                      <a:rPr lang="en-US" b="0" i="1" smtClean="0">
+                        <a:latin typeface="Cambria Math" panose="02040503050406030204" pitchFamily="18" charset="0"/>
+                      </a:rPr>
+                      <m:t>4</m:t>
+                    </m:r>
+                    <m:r>
+                      <a:rPr lang="en-US" b="0" i="1" smtClean="0">
+                        <a:latin typeface="Cambria Math" panose="02040503050406030204" pitchFamily="18" charset="0"/>
+                      </a:rPr>
+                      <m:t>𝑐</m:t>
+                    </m:r>
+                    <m:r>
+                      <a:rPr lang="en-US" b="0" i="1" smtClean="0">
+                        <a:latin typeface="Cambria Math" panose="02040503050406030204" pitchFamily="18" charset="0"/>
+                      </a:rPr>
+                      <m:t>+4</m:t>
+                    </m:r>
+                    <m:r>
+                      <a:rPr lang="en-US" b="0" i="1" smtClean="0">
+                        <a:latin typeface="Cambria Math" panose="02040503050406030204" pitchFamily="18" charset="0"/>
+                      </a:rPr>
+                      <m:t>𝑐</m:t>
+                    </m:r>
+                    <m:r>
+                      <a:rPr lang="en-US" b="0" i="1" smtClean="0">
+                        <a:latin typeface="Cambria Math" panose="02040503050406030204" pitchFamily="18" charset="0"/>
+                      </a:rPr>
+                      <m:t>=8</m:t>
+                    </m:r>
+                    <m:r>
+                      <a:rPr lang="en-US" b="0" i="1" smtClean="0">
+                        <a:latin typeface="Cambria Math" panose="02040503050406030204" pitchFamily="18" charset="0"/>
+                      </a:rPr>
+                      <m:t>𝑐</m:t>
+                    </m:r>
+                  </m:oMath>
+                </a14:m>
+                <a:endParaRPr lang="en-US" dirty="0"/>
+              </a:p>
+              <a:p>
+                <a:pPr lvl="1"/>
+                <a:r>
+                  <a:rPr lang="en-US" dirty="0"/>
+                  <a:t>Overall: </a:t>
+                </a:r>
+                <a14:m>
+                  <m:oMath xmlns:m="http://schemas.openxmlformats.org/officeDocument/2006/math">
+                    <m:f>
+                      <m:fPr>
+                        <m:ctrlPr>
+                          <a:rPr lang="en-US" b="0" i="1" smtClean="0">
+                            <a:latin typeface="Cambria Math" panose="02040503050406030204" pitchFamily="18" charset="0"/>
+                          </a:rPr>
+                        </m:ctrlPr>
+                      </m:fPr>
+                      <m:num>
+                        <m:r>
+                          <a:rPr lang="en-US" b="0" i="1" smtClean="0">
+                            <a:latin typeface="Cambria Math" panose="02040503050406030204" pitchFamily="18" charset="0"/>
+                          </a:rPr>
+                          <m:t>14</m:t>
+                        </m:r>
+                        <m:r>
+                          <a:rPr lang="en-US" b="0" i="1" smtClean="0">
+                            <a:latin typeface="Cambria Math" panose="02040503050406030204" pitchFamily="18" charset="0"/>
+                          </a:rPr>
+                          <m:t>𝑐</m:t>
+                        </m:r>
+                      </m:num>
+                      <m:den>
+                        <m:r>
+                          <a:rPr lang="en-US" b="0" i="1" smtClean="0">
+                            <a:latin typeface="Cambria Math" panose="02040503050406030204" pitchFamily="18" charset="0"/>
+                          </a:rPr>
+                          <m:t>7</m:t>
+                        </m:r>
+                        <m:r>
+                          <a:rPr lang="en-US" b="0" i="1" smtClean="0">
+                            <a:latin typeface="Cambria Math" panose="02040503050406030204" pitchFamily="18" charset="0"/>
+                          </a:rPr>
+                          <m:t>𝑐</m:t>
+                        </m:r>
+                      </m:den>
+                    </m:f>
+                    <m:r>
+                      <a:rPr lang="en-US" b="0" i="1" smtClean="0">
+                        <a:latin typeface="Cambria Math" panose="02040503050406030204" pitchFamily="18" charset="0"/>
+                      </a:rPr>
+                      <m:t>=2</m:t>
+                    </m:r>
+                    <m:r>
+                      <a:rPr lang="en-US" b="0" i="1" smtClean="0">
+                        <a:latin typeface="Cambria Math" panose="02040503050406030204" pitchFamily="18" charset="0"/>
+                      </a:rPr>
+                      <m:t>𝑐</m:t>
+                    </m:r>
+                  </m:oMath>
+                </a14:m>
+                <a:endParaRPr lang="en-US" dirty="0"/>
+              </a:p>
+            </p:txBody>
+          </p:sp>
+        </mc:Choice>
+        <mc:Fallback xmlns="">
+          <p:sp>
+            <p:nvSpPr>
+              <p:cNvPr id="4" name="Content Placeholder 3">
+                <a:extLst>
+                  <a:ext uri="{FF2B5EF4-FFF2-40B4-BE49-F238E27FC236}">
+                    <a16:creationId xmlns:a16="http://schemas.microsoft.com/office/drawing/2014/main" id="{015840F2-52BA-DB0C-15EC-2298E887A62B}"/>
+                  </a:ext>
+                </a:extLst>
+              </p:cNvPr>
+              <p:cNvSpPr>
+                <a:spLocks noGrp="1" noRot="1" noChangeAspect="1" noMove="1" noResize="1" noEditPoints="1" noAdjustHandles="1" noChangeArrowheads="1" noChangeShapeType="1" noTextEdit="1"/>
+              </p:cNvSpPr>
+              <p:nvPr>
+                <p:ph sz="half" idx="2"/>
+              </p:nvPr>
+            </p:nvSpPr>
+            <p:spPr>
+              <a:blipFill>
+                <a:blip r:embed="rId3"/>
+                <a:stretch>
+                  <a:fillRect l="-2118" t="-2241"/>
+                </a:stretch>
+              </a:blipFill>
+            </p:spPr>
+            <p:txBody>
+              <a:bodyPr/>
+              <a:lstStyle/>
+              <a:p>
+                <a:r>
+                  <a:rPr lang="en-US">
+                    <a:noFill/>
+                  </a:rPr>
+                  <a:t> </a:t>
+                </a:r>
+              </a:p>
+            </p:txBody>
+          </p:sp>
+        </mc:Fallback>
+      </mc:AlternateContent>
     </p:spTree>
     <p:extLst>
       <p:ext uri="{BB962C8B-B14F-4D97-AF65-F5344CB8AC3E}">
-        <p14:creationId xmlns:p14="http://schemas.microsoft.com/office/powerpoint/2010/main" val="1158566627"/>
+        <p14:creationId xmlns:p14="http://schemas.microsoft.com/office/powerpoint/2010/main" val="349862771"/>
       </p:ext>
     </p:extLst>
   </p:cSld>
@@ -19006,7 +20963,1440 @@
 </p:sld>
 </file>
 
-<file path=ppt/slides/slide3.xml><?xml version="1.0" encoding="utf-8"?>
+<file path=ppt/slides/slide33.xml><?xml version="1.0" encoding="utf-8"?>
+<p:sld xmlns:a="http://schemas.openxmlformats.org/drawingml/2006/main" xmlns:r="http://schemas.openxmlformats.org/officeDocument/2006/relationships" xmlns:p="http://schemas.openxmlformats.org/presentationml/2006/main">
+  <p:cSld>
+    <p:spTree>
+      <p:nvGrpSpPr>
+        <p:cNvPr id="1" name=""/>
+        <p:cNvGrpSpPr/>
+        <p:nvPr/>
+      </p:nvGrpSpPr>
+      <p:grpSpPr>
+        <a:xfrm>
+          <a:off x="0" y="0"/>
+          <a:ext cx="0" cy="0"/>
+          <a:chOff x="0" y="0"/>
+          <a:chExt cx="0" cy="0"/>
+        </a:xfrm>
+      </p:grpSpPr>
+      <p:sp>
+        <p:nvSpPr>
+          <p:cNvPr id="2" name="Title 1">
+            <a:extLst>
+              <a:ext uri="{FF2B5EF4-FFF2-40B4-BE49-F238E27FC236}">
+                <a16:creationId xmlns:a16="http://schemas.microsoft.com/office/drawing/2014/main" id="{AE837711-2C9F-C400-7B2E-F7113BCCD397}"/>
+              </a:ext>
+            </a:extLst>
+          </p:cNvPr>
+          <p:cNvSpPr>
+            <a:spLocks noGrp="1"/>
+          </p:cNvSpPr>
+          <p:nvPr>
+            <p:ph type="title"/>
+          </p:nvPr>
+        </p:nvSpPr>
+        <p:spPr/>
+        <p:txBody>
+          <a:bodyPr/>
+          <a:lstStyle/>
+          <a:p>
+            <a:r>
+              <a:rPr lang="en-US" dirty="0"/>
+              <a:t>Amortized Analysis Analogy</a:t>
+            </a:r>
+          </a:p>
+        </p:txBody>
+      </p:sp>
+      <p:sp>
+        <p:nvSpPr>
+          <p:cNvPr id="3" name="Content Placeholder 2">
+            <a:extLst>
+              <a:ext uri="{FF2B5EF4-FFF2-40B4-BE49-F238E27FC236}">
+                <a16:creationId xmlns:a16="http://schemas.microsoft.com/office/drawing/2014/main" id="{E995483E-FA76-F83C-AF97-9517E9B1D9AB}"/>
+              </a:ext>
+            </a:extLst>
+          </p:cNvPr>
+          <p:cNvSpPr>
+            <a:spLocks noGrp="1"/>
+          </p:cNvSpPr>
+          <p:nvPr>
+            <p:ph idx="1"/>
+          </p:nvPr>
+        </p:nvSpPr>
+        <p:spPr/>
+        <p:txBody>
+          <a:bodyPr/>
+          <a:lstStyle/>
+          <a:p>
+            <a:r>
+              <a:rPr lang="en-US" dirty="0"/>
+              <a:t>Suppose I’d like to park in a lot where they charge $10 per day to park</a:t>
+            </a:r>
+          </a:p>
+          <a:p>
+            <a:r>
+              <a:rPr lang="en-US" dirty="0"/>
+              <a:t>If you are caught in the lot without paying you are given a warning</a:t>
+            </a:r>
+          </a:p>
+          <a:p>
+            <a:r>
+              <a:rPr lang="en-US" dirty="0"/>
+              <a:t>If you get 3 warnings, you are charged a $25 fine, and your warnings reset.</a:t>
+            </a:r>
+          </a:p>
+          <a:p>
+            <a:r>
+              <a:rPr lang="en-US" dirty="0"/>
+              <a:t>Should you actually pay to park?</a:t>
+            </a:r>
+          </a:p>
+          <a:p>
+            <a:pPr lvl="1"/>
+            <a:r>
+              <a:rPr lang="en-US" dirty="0"/>
+              <a:t>If you pay every day then you pay an average of $10 per day</a:t>
+            </a:r>
+          </a:p>
+          <a:p>
+            <a:pPr lvl="1"/>
+            <a:r>
+              <a:rPr lang="en-US" dirty="0"/>
+              <a:t>If you do not pay then for every three </a:t>
+            </a:r>
+            <a:r>
+              <a:rPr lang="en-US"/>
+              <a:t>days parking costs $</a:t>
+            </a:r>
+            <a:r>
+              <a:rPr lang="en-US" dirty="0"/>
+              <a:t>0+$0+$25, for an average of $8.33 per day</a:t>
+            </a:r>
+          </a:p>
+          <a:p>
+            <a:pPr lvl="2"/>
+            <a:r>
+              <a:rPr lang="en-US" dirty="0"/>
+              <a:t>This is an amortized analysis</a:t>
+            </a:r>
+          </a:p>
+        </p:txBody>
+      </p:sp>
+    </p:spTree>
+    <p:extLst>
+      <p:ext uri="{BB962C8B-B14F-4D97-AF65-F5344CB8AC3E}">
+        <p14:creationId xmlns:p14="http://schemas.microsoft.com/office/powerpoint/2010/main" val="948737531"/>
+      </p:ext>
+    </p:extLst>
+  </p:cSld>
+  <p:clrMapOvr>
+    <a:masterClrMapping/>
+  </p:clrMapOvr>
+</p:sld>
+</file>
+
+<file path=ppt/slides/slide4.xml><?xml version="1.0" encoding="utf-8"?>
+<p:sld xmlns:a="http://schemas.openxmlformats.org/drawingml/2006/main" xmlns:r="http://schemas.openxmlformats.org/officeDocument/2006/relationships" xmlns:p="http://schemas.openxmlformats.org/presentationml/2006/main">
+  <p:cSld>
+    <p:spTree>
+      <p:nvGrpSpPr>
+        <p:cNvPr id="1" name=""/>
+        <p:cNvGrpSpPr/>
+        <p:nvPr/>
+      </p:nvGrpSpPr>
+      <p:grpSpPr>
+        <a:xfrm>
+          <a:off x="0" y="0"/>
+          <a:ext cx="0" cy="0"/>
+          <a:chOff x="0" y="0"/>
+          <a:chExt cx="0" cy="0"/>
+        </a:xfrm>
+      </p:grpSpPr>
+      <p:sp>
+        <p:nvSpPr>
+          <p:cNvPr id="2" name="Title 1">
+            <a:extLst>
+              <a:ext uri="{FF2B5EF4-FFF2-40B4-BE49-F238E27FC236}">
+                <a16:creationId xmlns:a16="http://schemas.microsoft.com/office/drawing/2014/main" id="{C84B3408-2D56-B58E-F959-CF8F6AE7145D}"/>
+              </a:ext>
+            </a:extLst>
+          </p:cNvPr>
+          <p:cNvSpPr>
+            <a:spLocks noGrp="1"/>
+          </p:cNvSpPr>
+          <p:nvPr>
+            <p:ph type="title"/>
+          </p:nvPr>
+        </p:nvSpPr>
+        <p:spPr/>
+        <p:txBody>
+          <a:bodyPr/>
+          <a:lstStyle/>
+          <a:p>
+            <a:r>
+              <a:rPr lang="en-US" dirty="0"/>
+              <a:t>Linked Queue Data Structure (Idea)</a:t>
+            </a:r>
+          </a:p>
+        </p:txBody>
+      </p:sp>
+      <p:sp>
+        <p:nvSpPr>
+          <p:cNvPr id="3" name="Content Placeholder 2">
+            <a:extLst>
+              <a:ext uri="{FF2B5EF4-FFF2-40B4-BE49-F238E27FC236}">
+                <a16:creationId xmlns:a16="http://schemas.microsoft.com/office/drawing/2014/main" id="{1376FFCF-F09D-CE03-F022-D39AD4A97E9E}"/>
+              </a:ext>
+            </a:extLst>
+          </p:cNvPr>
+          <p:cNvSpPr>
+            <a:spLocks noGrp="1"/>
+          </p:cNvSpPr>
+          <p:nvPr>
+            <p:ph idx="1"/>
+          </p:nvPr>
+        </p:nvSpPr>
+        <p:spPr>
+          <a:xfrm>
+            <a:off x="198120" y="2313305"/>
+            <a:ext cx="7076440" cy="4351338"/>
+          </a:xfrm>
+          <a:ln>
+            <a:noFill/>
+          </a:ln>
+        </p:spPr>
+        <p:txBody>
+          <a:bodyPr>
+            <a:normAutofit fontScale="92500" lnSpcReduction="20000"/>
+          </a:bodyPr>
+          <a:lstStyle/>
+          <a:p>
+            <a:r>
+              <a:rPr lang="en-US" dirty="0"/>
+              <a:t>Queue represented as a “chain” of items</a:t>
+            </a:r>
+          </a:p>
+          <a:p>
+            <a:pPr lvl="1"/>
+            <a:r>
+              <a:rPr lang="en-US" dirty="0">
+                <a:solidFill>
+                  <a:srgbClr val="0070C0"/>
+                </a:solidFill>
+              </a:rPr>
+              <a:t>A “front” reference to the oldest item</a:t>
+            </a:r>
+          </a:p>
+          <a:p>
+            <a:pPr lvl="1"/>
+            <a:r>
+              <a:rPr lang="en-US" dirty="0">
+                <a:solidFill>
+                  <a:schemeClr val="accent2">
+                    <a:lumMod val="75000"/>
+                  </a:schemeClr>
+                </a:solidFill>
+              </a:rPr>
+              <a:t>A “back” reference to the most recent item</a:t>
+            </a:r>
+          </a:p>
+          <a:p>
+            <a:pPr lvl="1"/>
+            <a:r>
+              <a:rPr lang="en-US" dirty="0">
+                <a:solidFill>
+                  <a:srgbClr val="FF0000"/>
+                </a:solidFill>
+              </a:rPr>
+              <a:t>Each Node references the item enqueued after it</a:t>
+            </a:r>
+          </a:p>
+          <a:p>
+            <a:r>
+              <a:rPr lang="en-US" dirty="0"/>
+              <a:t>enqueue Procedure:</a:t>
+            </a:r>
+          </a:p>
+          <a:p>
+            <a:pPr marL="457200" lvl="1" indent="0">
+              <a:buNone/>
+            </a:pPr>
+            <a:endParaRPr lang="en-US" dirty="0"/>
+          </a:p>
+          <a:p>
+            <a:pPr marL="457200" lvl="1" indent="0">
+              <a:buNone/>
+            </a:pPr>
+            <a:endParaRPr lang="en-US" dirty="0"/>
+          </a:p>
+          <a:p>
+            <a:pPr lvl="1"/>
+            <a:endParaRPr lang="en-US" dirty="0"/>
+          </a:p>
+          <a:p>
+            <a:r>
+              <a:rPr lang="en-US" dirty="0"/>
+              <a:t>dequeue Procedure:</a:t>
+            </a:r>
+          </a:p>
+          <a:p>
+            <a:endParaRPr lang="en-US" dirty="0"/>
+          </a:p>
+          <a:p>
+            <a:endParaRPr lang="en-US" dirty="0"/>
+          </a:p>
+          <a:p>
+            <a:r>
+              <a:rPr lang="en-US" dirty="0" err="1"/>
+              <a:t>isEmpty</a:t>
+            </a:r>
+            <a:r>
+              <a:rPr lang="en-US" dirty="0"/>
+              <a:t> Procedure:</a:t>
+            </a:r>
+          </a:p>
+        </p:txBody>
+      </p:sp>
+      <p:grpSp>
+        <p:nvGrpSpPr>
+          <p:cNvPr id="19" name="Group 18" descr="An illustration of a linked queue data structure. The elements of the list are contained in node objects. Each node object has a reference to another node object to establish a sequence of elements. There is also a reference called &quot;front&quot; that points to the first node in the queue, and a reference called &quot;back&quot; that points to the last node in the queue.">
+            <a:extLst>
+              <a:ext uri="{FF2B5EF4-FFF2-40B4-BE49-F238E27FC236}">
+                <a16:creationId xmlns:a16="http://schemas.microsoft.com/office/drawing/2014/main" id="{EC75C82D-E1B4-51B9-7FE9-D680C96B6501}"/>
+              </a:ext>
+            </a:extLst>
+          </p:cNvPr>
+          <p:cNvGrpSpPr/>
+          <p:nvPr/>
+        </p:nvGrpSpPr>
+        <p:grpSpPr>
+          <a:xfrm>
+            <a:off x="838200" y="1554957"/>
+            <a:ext cx="8239760" cy="1718152"/>
+            <a:chOff x="838200" y="1554957"/>
+            <a:chExt cx="8239760" cy="1718152"/>
+          </a:xfrm>
+        </p:grpSpPr>
+        <p:grpSp>
+          <p:nvGrpSpPr>
+            <p:cNvPr id="31" name="Group 30">
+              <a:extLst>
+                <a:ext uri="{FF2B5EF4-FFF2-40B4-BE49-F238E27FC236}">
+                  <a16:creationId xmlns:a16="http://schemas.microsoft.com/office/drawing/2014/main" id="{EE47A3E1-F9C8-C154-58A8-A0F832437092}"/>
+                </a:ext>
+              </a:extLst>
+            </p:cNvPr>
+            <p:cNvGrpSpPr/>
+            <p:nvPr/>
+          </p:nvGrpSpPr>
+          <p:grpSpPr>
+            <a:xfrm>
+              <a:off x="2727960" y="1554957"/>
+              <a:ext cx="6350000" cy="528320"/>
+              <a:chOff x="2727960" y="1554957"/>
+              <a:chExt cx="6350000" cy="528320"/>
+            </a:xfrm>
+          </p:grpSpPr>
+          <p:grpSp>
+            <p:nvGrpSpPr>
+              <p:cNvPr id="6" name="Group 5">
+                <a:extLst>
+                  <a:ext uri="{FF2B5EF4-FFF2-40B4-BE49-F238E27FC236}">
+                    <a16:creationId xmlns:a16="http://schemas.microsoft.com/office/drawing/2014/main" id="{6AFBF987-7851-60B2-CF03-393FC95534F8}"/>
+                  </a:ext>
+                </a:extLst>
+              </p:cNvPr>
+              <p:cNvGrpSpPr/>
+              <p:nvPr/>
+            </p:nvGrpSpPr>
+            <p:grpSpPr>
+              <a:xfrm>
+                <a:off x="4053840" y="1554957"/>
+                <a:ext cx="1056640" cy="528320"/>
+                <a:chOff x="8117840" y="4104640"/>
+                <a:chExt cx="1056640" cy="528320"/>
+              </a:xfrm>
+            </p:grpSpPr>
+            <p:sp>
+              <p:nvSpPr>
+                <p:cNvPr id="4" name="Rectangle 3">
+                  <a:extLst>
+                    <a:ext uri="{FF2B5EF4-FFF2-40B4-BE49-F238E27FC236}">
+                      <a16:creationId xmlns:a16="http://schemas.microsoft.com/office/drawing/2014/main" id="{0D240B2B-22D3-91C7-A99D-36F8C313B7FD}"/>
+                    </a:ext>
+                  </a:extLst>
+                </p:cNvPr>
+                <p:cNvSpPr/>
+                <p:nvPr/>
+              </p:nvSpPr>
+              <p:spPr>
+                <a:xfrm>
+                  <a:off x="8117840" y="4104640"/>
+                  <a:ext cx="528320" cy="528320"/>
+                </a:xfrm>
+                <a:prstGeom prst="rect">
+                  <a:avLst/>
+                </a:prstGeom>
+                <a:solidFill>
+                  <a:schemeClr val="accent4">
+                    <a:lumMod val="40000"/>
+                    <a:lumOff val="60000"/>
+                  </a:schemeClr>
+                </a:solidFill>
+              </p:spPr>
+              <p:style>
+                <a:lnRef idx="2">
+                  <a:schemeClr val="accent1">
+                    <a:shade val="15000"/>
+                  </a:schemeClr>
+                </a:lnRef>
+                <a:fillRef idx="1">
+                  <a:schemeClr val="accent1"/>
+                </a:fillRef>
+                <a:effectRef idx="0">
+                  <a:schemeClr val="accent1"/>
+                </a:effectRef>
+                <a:fontRef idx="minor">
+                  <a:schemeClr val="lt1"/>
+                </a:fontRef>
+              </p:style>
+              <p:txBody>
+                <a:bodyPr rtlCol="0" anchor="ctr"/>
+                <a:lstStyle/>
+                <a:p>
+                  <a:pPr algn="ctr"/>
+                  <a:r>
+                    <a:rPr lang="en-US" dirty="0">
+                      <a:solidFill>
+                        <a:schemeClr val="tx1"/>
+                      </a:solidFill>
+                    </a:rPr>
+                    <a:t>8</a:t>
+                  </a:r>
+                </a:p>
+              </p:txBody>
+            </p:sp>
+            <p:sp>
+              <p:nvSpPr>
+                <p:cNvPr id="5" name="Rectangle 4">
+                  <a:extLst>
+                    <a:ext uri="{FF2B5EF4-FFF2-40B4-BE49-F238E27FC236}">
+                      <a16:creationId xmlns:a16="http://schemas.microsoft.com/office/drawing/2014/main" id="{4B5CC621-6E1F-A3F0-5D55-C08016EAD80D}"/>
+                    </a:ext>
+                  </a:extLst>
+                </p:cNvPr>
+                <p:cNvSpPr/>
+                <p:nvPr/>
+              </p:nvSpPr>
+              <p:spPr>
+                <a:xfrm>
+                  <a:off x="8646160" y="4104640"/>
+                  <a:ext cx="528320" cy="528320"/>
+                </a:xfrm>
+                <a:prstGeom prst="rect">
+                  <a:avLst/>
+                </a:prstGeom>
+                <a:solidFill>
+                  <a:schemeClr val="bg1"/>
+                </a:solidFill>
+              </p:spPr>
+              <p:style>
+                <a:lnRef idx="2">
+                  <a:schemeClr val="accent1">
+                    <a:shade val="15000"/>
+                  </a:schemeClr>
+                </a:lnRef>
+                <a:fillRef idx="1">
+                  <a:schemeClr val="accent1"/>
+                </a:fillRef>
+                <a:effectRef idx="0">
+                  <a:schemeClr val="accent1"/>
+                </a:effectRef>
+                <a:fontRef idx="minor">
+                  <a:schemeClr val="lt1"/>
+                </a:fontRef>
+              </p:style>
+              <p:txBody>
+                <a:bodyPr rtlCol="0" anchor="ctr"/>
+                <a:lstStyle/>
+                <a:p>
+                  <a:pPr algn="ctr"/>
+                  <a:endParaRPr lang="en-US"/>
+                </a:p>
+              </p:txBody>
+            </p:sp>
+          </p:grpSp>
+          <p:grpSp>
+            <p:nvGrpSpPr>
+              <p:cNvPr id="7" name="Group 6">
+                <a:extLst>
+                  <a:ext uri="{FF2B5EF4-FFF2-40B4-BE49-F238E27FC236}">
+                    <a16:creationId xmlns:a16="http://schemas.microsoft.com/office/drawing/2014/main" id="{E5D432AB-1E74-F08B-CEC5-A365264C947C}"/>
+                  </a:ext>
+                </a:extLst>
+              </p:cNvPr>
+              <p:cNvGrpSpPr/>
+              <p:nvPr/>
+            </p:nvGrpSpPr>
+            <p:grpSpPr>
+              <a:xfrm>
+                <a:off x="5374640" y="1554957"/>
+                <a:ext cx="1056640" cy="528320"/>
+                <a:chOff x="8117840" y="4104640"/>
+                <a:chExt cx="1056640" cy="528320"/>
+              </a:xfrm>
+            </p:grpSpPr>
+            <p:sp>
+              <p:nvSpPr>
+                <p:cNvPr id="8" name="Rectangle 7">
+                  <a:extLst>
+                    <a:ext uri="{FF2B5EF4-FFF2-40B4-BE49-F238E27FC236}">
+                      <a16:creationId xmlns:a16="http://schemas.microsoft.com/office/drawing/2014/main" id="{60CA4D0E-42E8-E538-D8FF-DC6E00DFC845}"/>
+                    </a:ext>
+                  </a:extLst>
+                </p:cNvPr>
+                <p:cNvSpPr/>
+                <p:nvPr/>
+              </p:nvSpPr>
+              <p:spPr>
+                <a:xfrm>
+                  <a:off x="8117840" y="4104640"/>
+                  <a:ext cx="528320" cy="528320"/>
+                </a:xfrm>
+                <a:prstGeom prst="rect">
+                  <a:avLst/>
+                </a:prstGeom>
+                <a:solidFill>
+                  <a:schemeClr val="accent4">
+                    <a:lumMod val="40000"/>
+                    <a:lumOff val="60000"/>
+                  </a:schemeClr>
+                </a:solidFill>
+              </p:spPr>
+              <p:style>
+                <a:lnRef idx="2">
+                  <a:schemeClr val="accent1">
+                    <a:shade val="15000"/>
+                  </a:schemeClr>
+                </a:lnRef>
+                <a:fillRef idx="1">
+                  <a:schemeClr val="accent1"/>
+                </a:fillRef>
+                <a:effectRef idx="0">
+                  <a:schemeClr val="accent1"/>
+                </a:effectRef>
+                <a:fontRef idx="minor">
+                  <a:schemeClr val="lt1"/>
+                </a:fontRef>
+              </p:style>
+              <p:txBody>
+                <a:bodyPr rtlCol="0" anchor="ctr"/>
+                <a:lstStyle/>
+                <a:p>
+                  <a:pPr algn="ctr"/>
+                  <a:r>
+                    <a:rPr lang="en-US" dirty="0">
+                      <a:solidFill>
+                        <a:schemeClr val="tx1"/>
+                      </a:solidFill>
+                    </a:rPr>
+                    <a:t>3</a:t>
+                  </a:r>
+                </a:p>
+              </p:txBody>
+            </p:sp>
+            <p:sp>
+              <p:nvSpPr>
+                <p:cNvPr id="9" name="Rectangle 8">
+                  <a:extLst>
+                    <a:ext uri="{FF2B5EF4-FFF2-40B4-BE49-F238E27FC236}">
+                      <a16:creationId xmlns:a16="http://schemas.microsoft.com/office/drawing/2014/main" id="{5852A5BB-697F-7122-8EBB-493FC932062B}"/>
+                    </a:ext>
+                  </a:extLst>
+                </p:cNvPr>
+                <p:cNvSpPr/>
+                <p:nvPr/>
+              </p:nvSpPr>
+              <p:spPr>
+                <a:xfrm>
+                  <a:off x="8646160" y="4104640"/>
+                  <a:ext cx="528320" cy="528320"/>
+                </a:xfrm>
+                <a:prstGeom prst="rect">
+                  <a:avLst/>
+                </a:prstGeom>
+                <a:solidFill>
+                  <a:schemeClr val="bg1"/>
+                </a:solidFill>
+              </p:spPr>
+              <p:style>
+                <a:lnRef idx="2">
+                  <a:schemeClr val="accent1">
+                    <a:shade val="15000"/>
+                  </a:schemeClr>
+                </a:lnRef>
+                <a:fillRef idx="1">
+                  <a:schemeClr val="accent1"/>
+                </a:fillRef>
+                <a:effectRef idx="0">
+                  <a:schemeClr val="accent1"/>
+                </a:effectRef>
+                <a:fontRef idx="minor">
+                  <a:schemeClr val="lt1"/>
+                </a:fontRef>
+              </p:style>
+              <p:txBody>
+                <a:bodyPr rtlCol="0" anchor="ctr"/>
+                <a:lstStyle/>
+                <a:p>
+                  <a:pPr algn="ctr"/>
+                  <a:endParaRPr lang="en-US"/>
+                </a:p>
+              </p:txBody>
+            </p:sp>
+          </p:grpSp>
+          <p:grpSp>
+            <p:nvGrpSpPr>
+              <p:cNvPr id="10" name="Group 9">
+                <a:extLst>
+                  <a:ext uri="{FF2B5EF4-FFF2-40B4-BE49-F238E27FC236}">
+                    <a16:creationId xmlns:a16="http://schemas.microsoft.com/office/drawing/2014/main" id="{6ECA4301-84E7-41A8-4817-7EF969030D46}"/>
+                  </a:ext>
+                </a:extLst>
+              </p:cNvPr>
+              <p:cNvGrpSpPr/>
+              <p:nvPr/>
+            </p:nvGrpSpPr>
+            <p:grpSpPr>
+              <a:xfrm>
+                <a:off x="6700520" y="1554957"/>
+                <a:ext cx="1056640" cy="528320"/>
+                <a:chOff x="8117840" y="4104640"/>
+                <a:chExt cx="1056640" cy="528320"/>
+              </a:xfrm>
+            </p:grpSpPr>
+            <p:sp>
+              <p:nvSpPr>
+                <p:cNvPr id="11" name="Rectangle 10">
+                  <a:extLst>
+                    <a:ext uri="{FF2B5EF4-FFF2-40B4-BE49-F238E27FC236}">
+                      <a16:creationId xmlns:a16="http://schemas.microsoft.com/office/drawing/2014/main" id="{AE88FDA0-F73F-1E24-18F2-F7925E8FC51E}"/>
+                    </a:ext>
+                  </a:extLst>
+                </p:cNvPr>
+                <p:cNvSpPr/>
+                <p:nvPr/>
+              </p:nvSpPr>
+              <p:spPr>
+                <a:xfrm>
+                  <a:off x="8117840" y="4104640"/>
+                  <a:ext cx="528320" cy="528320"/>
+                </a:xfrm>
+                <a:prstGeom prst="rect">
+                  <a:avLst/>
+                </a:prstGeom>
+                <a:solidFill>
+                  <a:schemeClr val="accent4">
+                    <a:lumMod val="40000"/>
+                    <a:lumOff val="60000"/>
+                  </a:schemeClr>
+                </a:solidFill>
+              </p:spPr>
+              <p:style>
+                <a:lnRef idx="2">
+                  <a:schemeClr val="accent1">
+                    <a:shade val="15000"/>
+                  </a:schemeClr>
+                </a:lnRef>
+                <a:fillRef idx="1">
+                  <a:schemeClr val="accent1"/>
+                </a:fillRef>
+                <a:effectRef idx="0">
+                  <a:schemeClr val="accent1"/>
+                </a:effectRef>
+                <a:fontRef idx="minor">
+                  <a:schemeClr val="lt1"/>
+                </a:fontRef>
+              </p:style>
+              <p:txBody>
+                <a:bodyPr rtlCol="0" anchor="ctr"/>
+                <a:lstStyle/>
+                <a:p>
+                  <a:pPr algn="ctr"/>
+                  <a:r>
+                    <a:rPr lang="en-US" dirty="0">
+                      <a:solidFill>
+                        <a:schemeClr val="tx1"/>
+                      </a:solidFill>
+                    </a:rPr>
+                    <a:t>4</a:t>
+                  </a:r>
+                </a:p>
+              </p:txBody>
+            </p:sp>
+            <p:sp>
+              <p:nvSpPr>
+                <p:cNvPr id="12" name="Rectangle 11">
+                  <a:extLst>
+                    <a:ext uri="{FF2B5EF4-FFF2-40B4-BE49-F238E27FC236}">
+                      <a16:creationId xmlns:a16="http://schemas.microsoft.com/office/drawing/2014/main" id="{1DA96747-E578-B3DB-2470-F7243CD49DD5}"/>
+                    </a:ext>
+                  </a:extLst>
+                </p:cNvPr>
+                <p:cNvSpPr/>
+                <p:nvPr/>
+              </p:nvSpPr>
+              <p:spPr>
+                <a:xfrm>
+                  <a:off x="8646160" y="4104640"/>
+                  <a:ext cx="528320" cy="528320"/>
+                </a:xfrm>
+                <a:prstGeom prst="rect">
+                  <a:avLst/>
+                </a:prstGeom>
+                <a:solidFill>
+                  <a:schemeClr val="bg1"/>
+                </a:solidFill>
+              </p:spPr>
+              <p:style>
+                <a:lnRef idx="2">
+                  <a:schemeClr val="accent1">
+                    <a:shade val="15000"/>
+                  </a:schemeClr>
+                </a:lnRef>
+                <a:fillRef idx="1">
+                  <a:schemeClr val="accent1"/>
+                </a:fillRef>
+                <a:effectRef idx="0">
+                  <a:schemeClr val="accent1"/>
+                </a:effectRef>
+                <a:fontRef idx="minor">
+                  <a:schemeClr val="lt1"/>
+                </a:fontRef>
+              </p:style>
+              <p:txBody>
+                <a:bodyPr rtlCol="0" anchor="ctr"/>
+                <a:lstStyle/>
+                <a:p>
+                  <a:pPr algn="ctr"/>
+                  <a:endParaRPr lang="en-US"/>
+                </a:p>
+              </p:txBody>
+            </p:sp>
+          </p:grpSp>
+          <p:grpSp>
+            <p:nvGrpSpPr>
+              <p:cNvPr id="13" name="Group 12">
+                <a:extLst>
+                  <a:ext uri="{FF2B5EF4-FFF2-40B4-BE49-F238E27FC236}">
+                    <a16:creationId xmlns:a16="http://schemas.microsoft.com/office/drawing/2014/main" id="{77951176-168B-B07B-7BE1-8239EFA9C9FE}"/>
+                  </a:ext>
+                </a:extLst>
+              </p:cNvPr>
+              <p:cNvGrpSpPr/>
+              <p:nvPr/>
+            </p:nvGrpSpPr>
+            <p:grpSpPr>
+              <a:xfrm>
+                <a:off x="8021320" y="1554957"/>
+                <a:ext cx="1056640" cy="528320"/>
+                <a:chOff x="8117840" y="4104640"/>
+                <a:chExt cx="1056640" cy="528320"/>
+              </a:xfrm>
+            </p:grpSpPr>
+            <p:sp>
+              <p:nvSpPr>
+                <p:cNvPr id="14" name="Rectangle 13">
+                  <a:extLst>
+                    <a:ext uri="{FF2B5EF4-FFF2-40B4-BE49-F238E27FC236}">
+                      <a16:creationId xmlns:a16="http://schemas.microsoft.com/office/drawing/2014/main" id="{2BA7BE02-D13E-4DA9-2B89-8660802D026E}"/>
+                    </a:ext>
+                  </a:extLst>
+                </p:cNvPr>
+                <p:cNvSpPr/>
+                <p:nvPr/>
+              </p:nvSpPr>
+              <p:spPr>
+                <a:xfrm>
+                  <a:off x="8117840" y="4104640"/>
+                  <a:ext cx="528320" cy="528320"/>
+                </a:xfrm>
+                <a:prstGeom prst="rect">
+                  <a:avLst/>
+                </a:prstGeom>
+                <a:solidFill>
+                  <a:schemeClr val="accent4">
+                    <a:lumMod val="40000"/>
+                    <a:lumOff val="60000"/>
+                  </a:schemeClr>
+                </a:solidFill>
+              </p:spPr>
+              <p:style>
+                <a:lnRef idx="2">
+                  <a:schemeClr val="accent1">
+                    <a:shade val="15000"/>
+                  </a:schemeClr>
+                </a:lnRef>
+                <a:fillRef idx="1">
+                  <a:schemeClr val="accent1"/>
+                </a:fillRef>
+                <a:effectRef idx="0">
+                  <a:schemeClr val="accent1"/>
+                </a:effectRef>
+                <a:fontRef idx="minor">
+                  <a:schemeClr val="lt1"/>
+                </a:fontRef>
+              </p:style>
+              <p:txBody>
+                <a:bodyPr rtlCol="0" anchor="ctr"/>
+                <a:lstStyle/>
+                <a:p>
+                  <a:pPr algn="ctr"/>
+                  <a:r>
+                    <a:rPr lang="en-US" dirty="0">
+                      <a:solidFill>
+                        <a:schemeClr val="tx1"/>
+                      </a:solidFill>
+                    </a:rPr>
+                    <a:t>7</a:t>
+                  </a:r>
+                </a:p>
+              </p:txBody>
+            </p:sp>
+            <p:sp>
+              <p:nvSpPr>
+                <p:cNvPr id="15" name="Rectangle 14">
+                  <a:extLst>
+                    <a:ext uri="{FF2B5EF4-FFF2-40B4-BE49-F238E27FC236}">
+                      <a16:creationId xmlns:a16="http://schemas.microsoft.com/office/drawing/2014/main" id="{1DE038FD-A9AA-D9E1-A1D5-95725C7BEEA5}"/>
+                    </a:ext>
+                  </a:extLst>
+                </p:cNvPr>
+                <p:cNvSpPr/>
+                <p:nvPr/>
+              </p:nvSpPr>
+              <p:spPr>
+                <a:xfrm>
+                  <a:off x="8646160" y="4104640"/>
+                  <a:ext cx="528320" cy="528320"/>
+                </a:xfrm>
+                <a:prstGeom prst="rect">
+                  <a:avLst/>
+                </a:prstGeom>
+                <a:solidFill>
+                  <a:schemeClr val="bg1"/>
+                </a:solidFill>
+              </p:spPr>
+              <p:style>
+                <a:lnRef idx="2">
+                  <a:schemeClr val="accent1">
+                    <a:shade val="15000"/>
+                  </a:schemeClr>
+                </a:lnRef>
+                <a:fillRef idx="1">
+                  <a:schemeClr val="accent1"/>
+                </a:fillRef>
+                <a:effectRef idx="0">
+                  <a:schemeClr val="accent1"/>
+                </a:effectRef>
+                <a:fontRef idx="minor">
+                  <a:schemeClr val="lt1"/>
+                </a:fontRef>
+              </p:style>
+              <p:txBody>
+                <a:bodyPr rtlCol="0" anchor="ctr"/>
+                <a:lstStyle/>
+                <a:p>
+                  <a:pPr algn="ctr"/>
+                  <a:endParaRPr lang="en-US"/>
+                </a:p>
+              </p:txBody>
+            </p:sp>
+          </p:grpSp>
+          <p:grpSp>
+            <p:nvGrpSpPr>
+              <p:cNvPr id="16" name="Group 15">
+                <a:extLst>
+                  <a:ext uri="{FF2B5EF4-FFF2-40B4-BE49-F238E27FC236}">
+                    <a16:creationId xmlns:a16="http://schemas.microsoft.com/office/drawing/2014/main" id="{7DA111CA-6B8C-359A-673A-7D5DE0F70DA5}"/>
+                  </a:ext>
+                </a:extLst>
+              </p:cNvPr>
+              <p:cNvGrpSpPr/>
+              <p:nvPr/>
+            </p:nvGrpSpPr>
+            <p:grpSpPr>
+              <a:xfrm>
+                <a:off x="2727960" y="1554957"/>
+                <a:ext cx="1056640" cy="528320"/>
+                <a:chOff x="8117840" y="4104640"/>
+                <a:chExt cx="1056640" cy="528320"/>
+              </a:xfrm>
+            </p:grpSpPr>
+            <p:sp>
+              <p:nvSpPr>
+                <p:cNvPr id="17" name="Rectangle 16">
+                  <a:extLst>
+                    <a:ext uri="{FF2B5EF4-FFF2-40B4-BE49-F238E27FC236}">
+                      <a16:creationId xmlns:a16="http://schemas.microsoft.com/office/drawing/2014/main" id="{57E8C63A-82D6-CC85-3709-0E2E37F557D0}"/>
+                    </a:ext>
+                  </a:extLst>
+                </p:cNvPr>
+                <p:cNvSpPr/>
+                <p:nvPr/>
+              </p:nvSpPr>
+              <p:spPr>
+                <a:xfrm>
+                  <a:off x="8117840" y="4104640"/>
+                  <a:ext cx="528320" cy="528320"/>
+                </a:xfrm>
+                <a:prstGeom prst="rect">
+                  <a:avLst/>
+                </a:prstGeom>
+                <a:solidFill>
+                  <a:schemeClr val="accent4">
+                    <a:lumMod val="40000"/>
+                    <a:lumOff val="60000"/>
+                  </a:schemeClr>
+                </a:solidFill>
+              </p:spPr>
+              <p:style>
+                <a:lnRef idx="2">
+                  <a:schemeClr val="accent1">
+                    <a:shade val="15000"/>
+                  </a:schemeClr>
+                </a:lnRef>
+                <a:fillRef idx="1">
+                  <a:schemeClr val="accent1"/>
+                </a:fillRef>
+                <a:effectRef idx="0">
+                  <a:schemeClr val="accent1"/>
+                </a:effectRef>
+                <a:fontRef idx="minor">
+                  <a:schemeClr val="lt1"/>
+                </a:fontRef>
+              </p:style>
+              <p:txBody>
+                <a:bodyPr rtlCol="0" anchor="ctr"/>
+                <a:lstStyle/>
+                <a:p>
+                  <a:pPr algn="ctr"/>
+                  <a:r>
+                    <a:rPr lang="en-US" dirty="0">
+                      <a:solidFill>
+                        <a:schemeClr val="tx1"/>
+                      </a:solidFill>
+                    </a:rPr>
+                    <a:t>5</a:t>
+                  </a:r>
+                </a:p>
+              </p:txBody>
+            </p:sp>
+            <p:sp>
+              <p:nvSpPr>
+                <p:cNvPr id="18" name="Rectangle 17">
+                  <a:extLst>
+                    <a:ext uri="{FF2B5EF4-FFF2-40B4-BE49-F238E27FC236}">
+                      <a16:creationId xmlns:a16="http://schemas.microsoft.com/office/drawing/2014/main" id="{3B8F20F7-7B97-9FD1-C14A-D4CD9FE6D9C2}"/>
+                    </a:ext>
+                  </a:extLst>
+                </p:cNvPr>
+                <p:cNvSpPr/>
+                <p:nvPr/>
+              </p:nvSpPr>
+              <p:spPr>
+                <a:xfrm>
+                  <a:off x="8646160" y="4104640"/>
+                  <a:ext cx="528320" cy="528320"/>
+                </a:xfrm>
+                <a:prstGeom prst="rect">
+                  <a:avLst/>
+                </a:prstGeom>
+                <a:solidFill>
+                  <a:schemeClr val="bg1"/>
+                </a:solidFill>
+              </p:spPr>
+              <p:style>
+                <a:lnRef idx="2">
+                  <a:schemeClr val="accent1">
+                    <a:shade val="15000"/>
+                  </a:schemeClr>
+                </a:lnRef>
+                <a:fillRef idx="1">
+                  <a:schemeClr val="accent1"/>
+                </a:fillRef>
+                <a:effectRef idx="0">
+                  <a:schemeClr val="accent1"/>
+                </a:effectRef>
+                <a:fontRef idx="minor">
+                  <a:schemeClr val="lt1"/>
+                </a:fontRef>
+              </p:style>
+              <p:txBody>
+                <a:bodyPr rtlCol="0" anchor="ctr"/>
+                <a:lstStyle/>
+                <a:p>
+                  <a:pPr algn="ctr"/>
+                  <a:endParaRPr lang="en-US"/>
+                </a:p>
+              </p:txBody>
+            </p:sp>
+          </p:grpSp>
+          <p:cxnSp>
+            <p:nvCxnSpPr>
+              <p:cNvPr id="20" name="Straight Arrow Connector 19">
+                <a:extLst>
+                  <a:ext uri="{FF2B5EF4-FFF2-40B4-BE49-F238E27FC236}">
+                    <a16:creationId xmlns:a16="http://schemas.microsoft.com/office/drawing/2014/main" id="{ADAB37D0-E4BC-0B87-3E32-3F87021568CC}"/>
+                  </a:ext>
+                </a:extLst>
+              </p:cNvPr>
+              <p:cNvCxnSpPr>
+                <a:cxnSpLocks/>
+                <a:endCxn id="4" idx="1"/>
+              </p:cNvCxnSpPr>
+              <p:nvPr/>
+            </p:nvCxnSpPr>
+            <p:spPr>
+              <a:xfrm>
+                <a:off x="3520440" y="1819117"/>
+                <a:ext cx="533400" cy="0"/>
+              </a:xfrm>
+              <a:prstGeom prst="straightConnector1">
+                <a:avLst/>
+              </a:prstGeom>
+              <a:ln w="57150">
+                <a:solidFill>
+                  <a:srgbClr val="FF0000"/>
+                </a:solidFill>
+                <a:tailEnd type="triangle"/>
+              </a:ln>
+            </p:spPr>
+            <p:style>
+              <a:lnRef idx="1">
+                <a:schemeClr val="accent1"/>
+              </a:lnRef>
+              <a:fillRef idx="0">
+                <a:schemeClr val="accent1"/>
+              </a:fillRef>
+              <a:effectRef idx="0">
+                <a:schemeClr val="accent1"/>
+              </a:effectRef>
+              <a:fontRef idx="minor">
+                <a:schemeClr val="tx1"/>
+              </a:fontRef>
+            </p:style>
+          </p:cxnSp>
+          <p:cxnSp>
+            <p:nvCxnSpPr>
+              <p:cNvPr id="21" name="Straight Arrow Connector 20">
+                <a:extLst>
+                  <a:ext uri="{FF2B5EF4-FFF2-40B4-BE49-F238E27FC236}">
+                    <a16:creationId xmlns:a16="http://schemas.microsoft.com/office/drawing/2014/main" id="{6080BD9A-B13C-50BF-A4D8-47758C79AC32}"/>
+                  </a:ext>
+                </a:extLst>
+              </p:cNvPr>
+              <p:cNvCxnSpPr>
+                <a:cxnSpLocks/>
+                <a:endCxn id="8" idx="1"/>
+              </p:cNvCxnSpPr>
+              <p:nvPr/>
+            </p:nvCxnSpPr>
+            <p:spPr>
+              <a:xfrm>
+                <a:off x="4846320" y="1819117"/>
+                <a:ext cx="528320" cy="0"/>
+              </a:xfrm>
+              <a:prstGeom prst="straightConnector1">
+                <a:avLst/>
+              </a:prstGeom>
+              <a:ln w="57150">
+                <a:solidFill>
+                  <a:srgbClr val="FF0000"/>
+                </a:solidFill>
+                <a:tailEnd type="triangle"/>
+              </a:ln>
+            </p:spPr>
+            <p:style>
+              <a:lnRef idx="1">
+                <a:schemeClr val="accent1"/>
+              </a:lnRef>
+              <a:fillRef idx="0">
+                <a:schemeClr val="accent1"/>
+              </a:fillRef>
+              <a:effectRef idx="0">
+                <a:schemeClr val="accent1"/>
+              </a:effectRef>
+              <a:fontRef idx="minor">
+                <a:schemeClr val="tx1"/>
+              </a:fontRef>
+            </p:style>
+          </p:cxnSp>
+          <p:cxnSp>
+            <p:nvCxnSpPr>
+              <p:cNvPr id="25" name="Straight Arrow Connector 24">
+                <a:extLst>
+                  <a:ext uri="{FF2B5EF4-FFF2-40B4-BE49-F238E27FC236}">
+                    <a16:creationId xmlns:a16="http://schemas.microsoft.com/office/drawing/2014/main" id="{A59202CE-9F90-F4A7-20C4-388EBA71AF5A}"/>
+                  </a:ext>
+                </a:extLst>
+              </p:cNvPr>
+              <p:cNvCxnSpPr>
+                <a:cxnSpLocks/>
+                <a:endCxn id="11" idx="1"/>
+              </p:cNvCxnSpPr>
+              <p:nvPr/>
+            </p:nvCxnSpPr>
+            <p:spPr>
+              <a:xfrm>
+                <a:off x="6167120" y="1819117"/>
+                <a:ext cx="533400" cy="0"/>
+              </a:xfrm>
+              <a:prstGeom prst="straightConnector1">
+                <a:avLst/>
+              </a:prstGeom>
+              <a:ln w="57150">
+                <a:solidFill>
+                  <a:srgbClr val="FF0000"/>
+                </a:solidFill>
+                <a:tailEnd type="triangle"/>
+              </a:ln>
+            </p:spPr>
+            <p:style>
+              <a:lnRef idx="1">
+                <a:schemeClr val="accent1"/>
+              </a:lnRef>
+              <a:fillRef idx="0">
+                <a:schemeClr val="accent1"/>
+              </a:fillRef>
+              <a:effectRef idx="0">
+                <a:schemeClr val="accent1"/>
+              </a:effectRef>
+              <a:fontRef idx="minor">
+                <a:schemeClr val="tx1"/>
+              </a:fontRef>
+            </p:style>
+          </p:cxnSp>
+          <p:cxnSp>
+            <p:nvCxnSpPr>
+              <p:cNvPr id="28" name="Straight Arrow Connector 27">
+                <a:extLst>
+                  <a:ext uri="{FF2B5EF4-FFF2-40B4-BE49-F238E27FC236}">
+                    <a16:creationId xmlns:a16="http://schemas.microsoft.com/office/drawing/2014/main" id="{D82F20BE-DCF4-D7DF-70AA-D308F3FB3C0A}"/>
+                  </a:ext>
+                </a:extLst>
+              </p:cNvPr>
+              <p:cNvCxnSpPr>
+                <a:cxnSpLocks/>
+                <a:endCxn id="14" idx="1"/>
+              </p:cNvCxnSpPr>
+              <p:nvPr/>
+            </p:nvCxnSpPr>
+            <p:spPr>
+              <a:xfrm>
+                <a:off x="7493000" y="1819117"/>
+                <a:ext cx="528320" cy="0"/>
+              </a:xfrm>
+              <a:prstGeom prst="straightConnector1">
+                <a:avLst/>
+              </a:prstGeom>
+              <a:ln w="57150">
+                <a:solidFill>
+                  <a:srgbClr val="FF0000"/>
+                </a:solidFill>
+                <a:tailEnd type="triangle"/>
+              </a:ln>
+            </p:spPr>
+            <p:style>
+              <a:lnRef idx="1">
+                <a:schemeClr val="accent1"/>
+              </a:lnRef>
+              <a:fillRef idx="0">
+                <a:schemeClr val="accent1"/>
+              </a:fillRef>
+              <a:effectRef idx="0">
+                <a:schemeClr val="accent1"/>
+              </a:effectRef>
+              <a:fontRef idx="minor">
+                <a:schemeClr val="tx1"/>
+              </a:fontRef>
+            </p:style>
+          </p:cxnSp>
+        </p:grpSp>
+        <p:sp>
+          <p:nvSpPr>
+            <p:cNvPr id="32" name="Rectangle 31">
+              <a:extLst>
+                <a:ext uri="{FF2B5EF4-FFF2-40B4-BE49-F238E27FC236}">
+                  <a16:creationId xmlns:a16="http://schemas.microsoft.com/office/drawing/2014/main" id="{71097677-82C3-534D-F0DA-F71F927E9535}"/>
+                </a:ext>
+              </a:extLst>
+            </p:cNvPr>
+            <p:cNvSpPr/>
+            <p:nvPr/>
+          </p:nvSpPr>
+          <p:spPr>
+            <a:xfrm>
+              <a:off x="838200" y="1554957"/>
+              <a:ext cx="949960" cy="528320"/>
+            </a:xfrm>
+            <a:prstGeom prst="rect">
+              <a:avLst/>
+            </a:prstGeom>
+            <a:solidFill>
+              <a:schemeClr val="accent5">
+                <a:lumMod val="60000"/>
+                <a:lumOff val="40000"/>
+              </a:schemeClr>
+            </a:solidFill>
+          </p:spPr>
+          <p:style>
+            <a:lnRef idx="2">
+              <a:schemeClr val="accent1">
+                <a:shade val="15000"/>
+              </a:schemeClr>
+            </a:lnRef>
+            <a:fillRef idx="1">
+              <a:schemeClr val="accent1"/>
+            </a:fillRef>
+            <a:effectRef idx="0">
+              <a:schemeClr val="accent1"/>
+            </a:effectRef>
+            <a:fontRef idx="minor">
+              <a:schemeClr val="lt1"/>
+            </a:fontRef>
+          </p:style>
+          <p:txBody>
+            <a:bodyPr rtlCol="0" anchor="ctr"/>
+            <a:lstStyle/>
+            <a:p>
+              <a:pPr algn="ctr"/>
+              <a:r>
+                <a:rPr lang="en-US" dirty="0">
+                  <a:solidFill>
+                    <a:schemeClr val="tx1"/>
+                  </a:solidFill>
+                </a:rPr>
+                <a:t>front</a:t>
+              </a:r>
+            </a:p>
+          </p:txBody>
+        </p:sp>
+        <p:cxnSp>
+          <p:nvCxnSpPr>
+            <p:cNvPr id="33" name="Straight Arrow Connector 32">
+              <a:extLst>
+                <a:ext uri="{FF2B5EF4-FFF2-40B4-BE49-F238E27FC236}">
+                  <a16:creationId xmlns:a16="http://schemas.microsoft.com/office/drawing/2014/main" id="{DFA11222-D8D6-01E9-FB88-B45F69E27FD3}"/>
+                </a:ext>
+              </a:extLst>
+            </p:cNvPr>
+            <p:cNvCxnSpPr>
+              <a:cxnSpLocks/>
+              <a:stCxn id="32" idx="3"/>
+              <a:endCxn id="17" idx="1"/>
+            </p:cNvCxnSpPr>
+            <p:nvPr/>
+          </p:nvCxnSpPr>
+          <p:spPr>
+            <a:xfrm>
+              <a:off x="1788160" y="1819117"/>
+              <a:ext cx="939800" cy="0"/>
+            </a:xfrm>
+            <a:prstGeom prst="straightConnector1">
+              <a:avLst/>
+            </a:prstGeom>
+            <a:ln w="57150">
+              <a:solidFill>
+                <a:srgbClr val="FF0000"/>
+              </a:solidFill>
+              <a:tailEnd type="triangle"/>
+            </a:ln>
+          </p:spPr>
+          <p:style>
+            <a:lnRef idx="1">
+              <a:schemeClr val="accent1"/>
+            </a:lnRef>
+            <a:fillRef idx="0">
+              <a:schemeClr val="accent1"/>
+            </a:fillRef>
+            <a:effectRef idx="0">
+              <a:schemeClr val="accent1"/>
+            </a:effectRef>
+            <a:fontRef idx="minor">
+              <a:schemeClr val="tx1"/>
+            </a:fontRef>
+          </p:style>
+        </p:cxnSp>
+        <p:sp>
+          <p:nvSpPr>
+            <p:cNvPr id="37" name="Rectangle 36">
+              <a:extLst>
+                <a:ext uri="{FF2B5EF4-FFF2-40B4-BE49-F238E27FC236}">
+                  <a16:creationId xmlns:a16="http://schemas.microsoft.com/office/drawing/2014/main" id="{73EED586-69E7-D3F5-2880-C2F533716668}"/>
+                </a:ext>
+              </a:extLst>
+            </p:cNvPr>
+            <p:cNvSpPr/>
+            <p:nvPr/>
+          </p:nvSpPr>
+          <p:spPr>
+            <a:xfrm>
+              <a:off x="7810500" y="2744789"/>
+              <a:ext cx="949960" cy="528320"/>
+            </a:xfrm>
+            <a:prstGeom prst="rect">
+              <a:avLst/>
+            </a:prstGeom>
+            <a:solidFill>
+              <a:srgbClr val="FFC000"/>
+            </a:solidFill>
+          </p:spPr>
+          <p:style>
+            <a:lnRef idx="2">
+              <a:schemeClr val="accent1">
+                <a:shade val="15000"/>
+              </a:schemeClr>
+            </a:lnRef>
+            <a:fillRef idx="1">
+              <a:schemeClr val="accent1"/>
+            </a:fillRef>
+            <a:effectRef idx="0">
+              <a:schemeClr val="accent1"/>
+            </a:effectRef>
+            <a:fontRef idx="minor">
+              <a:schemeClr val="lt1"/>
+            </a:fontRef>
+          </p:style>
+          <p:txBody>
+            <a:bodyPr rtlCol="0" anchor="ctr"/>
+            <a:lstStyle/>
+            <a:p>
+              <a:pPr algn="ctr"/>
+              <a:r>
+                <a:rPr lang="en-US" dirty="0">
+                  <a:solidFill>
+                    <a:schemeClr val="tx1"/>
+                  </a:solidFill>
+                </a:rPr>
+                <a:t>back</a:t>
+              </a:r>
+            </a:p>
+          </p:txBody>
+        </p:sp>
+        <p:cxnSp>
+          <p:nvCxnSpPr>
+            <p:cNvPr id="38" name="Straight Arrow Connector 37">
+              <a:extLst>
+                <a:ext uri="{FF2B5EF4-FFF2-40B4-BE49-F238E27FC236}">
+                  <a16:creationId xmlns:a16="http://schemas.microsoft.com/office/drawing/2014/main" id="{4015BFBB-A85A-F4E1-2263-4CC9757E5464}"/>
+                </a:ext>
+              </a:extLst>
+            </p:cNvPr>
+            <p:cNvCxnSpPr>
+              <a:cxnSpLocks/>
+              <a:stCxn id="37" idx="0"/>
+              <a:endCxn id="14" idx="2"/>
+            </p:cNvCxnSpPr>
+            <p:nvPr/>
+          </p:nvCxnSpPr>
+          <p:spPr>
+            <a:xfrm flipV="1">
+              <a:off x="8285480" y="2083277"/>
+              <a:ext cx="0" cy="661512"/>
+            </a:xfrm>
+            <a:prstGeom prst="straightConnector1">
+              <a:avLst/>
+            </a:prstGeom>
+            <a:ln w="57150">
+              <a:solidFill>
+                <a:srgbClr val="FF0000"/>
+              </a:solidFill>
+              <a:tailEnd type="triangle"/>
+            </a:ln>
+          </p:spPr>
+          <p:style>
+            <a:lnRef idx="1">
+              <a:schemeClr val="accent1"/>
+            </a:lnRef>
+            <a:fillRef idx="0">
+              <a:schemeClr val="accent1"/>
+            </a:fillRef>
+            <a:effectRef idx="0">
+              <a:schemeClr val="accent1"/>
+            </a:effectRef>
+            <a:fontRef idx="minor">
+              <a:schemeClr val="tx1"/>
+            </a:fontRef>
+          </p:style>
+        </p:cxnSp>
+      </p:grpSp>
+      <mc:AlternateContent xmlns:mc="http://schemas.openxmlformats.org/markup-compatibility/2006">
+        <mc:Choice xmlns:p14="http://schemas.microsoft.com/office/powerpoint/2010/main" Requires="p14">
+          <p:contentPart p14:bwMode="auto" r:id="rId2">
+            <p14:nvContentPartPr>
+              <p14:cNvPr id="22" name="Ink 21">
+                <a:extLst>
+                  <a:ext uri="{FF2B5EF4-FFF2-40B4-BE49-F238E27FC236}">
+                    <a16:creationId xmlns:a16="http://schemas.microsoft.com/office/drawing/2014/main" id="{56FA637C-19C4-C7E2-B3B2-ED12BB5DFFDD}"/>
+                  </a:ext>
+                </a:extLst>
+              </p14:cNvPr>
+              <p14:cNvContentPartPr/>
+              <p14:nvPr/>
+            </p14:nvContentPartPr>
+            <p14:xfrm>
+              <a:off x="485640" y="1163520"/>
+              <a:ext cx="4123440" cy="4966200"/>
+            </p14:xfrm>
+          </p:contentPart>
+        </mc:Choice>
+        <mc:Fallback>
+          <p:pic>
+            <p:nvPicPr>
+              <p:cNvPr id="22" name="Ink 21">
+                <a:extLst>
+                  <a:ext uri="{FF2B5EF4-FFF2-40B4-BE49-F238E27FC236}">
+                    <a16:creationId xmlns:a16="http://schemas.microsoft.com/office/drawing/2014/main" id="{56FA637C-19C4-C7E2-B3B2-ED12BB5DFFDD}"/>
+                  </a:ext>
+                </a:extLst>
+              </p:cNvPr>
+              <p:cNvPicPr/>
+              <p:nvPr/>
+            </p:nvPicPr>
+            <p:blipFill>
+              <a:blip r:embed="rId3"/>
+              <a:stretch>
+                <a:fillRect/>
+              </a:stretch>
+            </p:blipFill>
+            <p:spPr>
+              <a:xfrm>
+                <a:off x="476280" y="1154160"/>
+                <a:ext cx="4142160" cy="4984920"/>
+              </a:xfrm>
+              <a:prstGeom prst="rect">
+                <a:avLst/>
+              </a:prstGeom>
+            </p:spPr>
+          </p:pic>
+        </mc:Fallback>
+      </mc:AlternateContent>
+    </p:spTree>
+    <p:extLst>
+      <p:ext uri="{BB962C8B-B14F-4D97-AF65-F5344CB8AC3E}">
+        <p14:creationId xmlns:p14="http://schemas.microsoft.com/office/powerpoint/2010/main" val="2054228554"/>
+      </p:ext>
+    </p:extLst>
+  </p:cSld>
+  <p:clrMapOvr>
+    <a:masterClrMapping/>
+  </p:clrMapOvr>
+</p:sld>
+</file>
+
+<file path=ppt/slides/slide5.xml><?xml version="1.0" encoding="utf-8"?>
 <p:sld xmlns:a="http://schemas.openxmlformats.org/drawingml/2006/main" xmlns:r="http://schemas.openxmlformats.org/officeDocument/2006/relationships" xmlns:p="http://schemas.openxmlformats.org/presentationml/2006/main">
   <p:cSld>
     <p:spTree>
@@ -20544,7 +23934,7 @@
     </p:spTree>
     <p:extLst>
       <p:ext uri="{BB962C8B-B14F-4D97-AF65-F5344CB8AC3E}">
-        <p14:creationId xmlns:p14="http://schemas.microsoft.com/office/powerpoint/2010/main" val="2494074382"/>
+        <p14:creationId xmlns:p14="http://schemas.microsoft.com/office/powerpoint/2010/main" val="4175234548"/>
       </p:ext>
     </p:extLst>
   </p:cSld>
@@ -20554,1454 +23944,7 @@
 </p:sld>
 </file>
 
-<file path=ppt/slides/slide30.xml><?xml version="1.0" encoding="utf-8"?>
-<p:sld xmlns:a="http://schemas.openxmlformats.org/drawingml/2006/main" xmlns:r="http://schemas.openxmlformats.org/officeDocument/2006/relationships" xmlns:p="http://schemas.openxmlformats.org/presentationml/2006/main">
-  <p:cSld>
-    <p:spTree>
-      <p:nvGrpSpPr>
-        <p:cNvPr id="1" name=""/>
-        <p:cNvGrpSpPr/>
-        <p:nvPr/>
-      </p:nvGrpSpPr>
-      <p:grpSpPr>
-        <a:xfrm>
-          <a:off x="0" y="0"/>
-          <a:ext cx="0" cy="0"/>
-          <a:chOff x="0" y="0"/>
-          <a:chExt cx="0" cy="0"/>
-        </a:xfrm>
-      </p:grpSpPr>
-      <p:sp>
-        <p:nvSpPr>
-          <p:cNvPr id="14" name="Content Placeholder 2">
-            <a:extLst>
-              <a:ext uri="{FF2B5EF4-FFF2-40B4-BE49-F238E27FC236}">
-                <a16:creationId xmlns:a16="http://schemas.microsoft.com/office/drawing/2014/main" id="{959D7957-B208-5E47-448C-922F4E81772F}"/>
-              </a:ext>
-            </a:extLst>
-          </p:cNvPr>
-          <p:cNvSpPr>
-            <a:spLocks noGrp="1"/>
-          </p:cNvSpPr>
-          <p:nvPr>
-            <p:ph sz="half" idx="1"/>
-          </p:nvPr>
-        </p:nvSpPr>
-        <p:spPr>
-          <a:xfrm>
-            <a:off x="349135" y="1825625"/>
-            <a:ext cx="5670665" cy="4667250"/>
-          </a:xfrm>
-        </p:spPr>
-        <p:txBody>
-          <a:bodyPr>
-            <a:normAutofit/>
-          </a:bodyPr>
-          <a:lstStyle/>
-          <a:p>
-            <a:pPr marL="0" indent="0">
-              <a:buNone/>
-            </a:pPr>
-            <a:r>
-              <a:rPr lang="en-US" sz="1600" dirty="0">
-                <a:solidFill>
-                  <a:srgbClr val="0000FF"/>
-                </a:solidFill>
-                <a:highlight>
-                  <a:srgbClr val="FFFFFF"/>
-                </a:highlight>
-                <a:latin typeface="Consolas" panose="020B0609020204030204" pitchFamily="49" charset="0"/>
-              </a:rPr>
-              <a:t>public</a:t>
-            </a:r>
-            <a:r>
-              <a:rPr lang="en-US" sz="1600" dirty="0">
-                <a:solidFill>
-                  <a:srgbClr val="000000"/>
-                </a:solidFill>
-                <a:highlight>
-                  <a:srgbClr val="FFFFFF"/>
-                </a:highlight>
-                <a:latin typeface="Consolas" panose="020B0609020204030204" pitchFamily="49" charset="0"/>
-              </a:rPr>
-              <a:t> </a:t>
-            </a:r>
-            <a:r>
-              <a:rPr lang="en-US" sz="1600" dirty="0">
-                <a:solidFill>
-                  <a:srgbClr val="0000FF"/>
-                </a:solidFill>
-                <a:highlight>
-                  <a:srgbClr val="FFFFFF"/>
-                </a:highlight>
-                <a:latin typeface="Consolas" panose="020B0609020204030204" pitchFamily="49" charset="0"/>
-              </a:rPr>
-              <a:t>void</a:t>
-            </a:r>
-            <a:r>
-              <a:rPr lang="en-US" sz="1600" dirty="0">
-                <a:solidFill>
-                  <a:srgbClr val="000000"/>
-                </a:solidFill>
-                <a:highlight>
-                  <a:srgbClr val="FFFFFF"/>
-                </a:highlight>
-                <a:latin typeface="Consolas" panose="020B0609020204030204" pitchFamily="49" charset="0"/>
-              </a:rPr>
-              <a:t> add(</a:t>
-            </a:r>
-            <a:r>
-              <a:rPr lang="en-US" sz="1600" dirty="0">
-                <a:solidFill>
-                  <a:srgbClr val="0000FF"/>
-                </a:solidFill>
-                <a:highlight>
-                  <a:srgbClr val="FFFFFF"/>
-                </a:highlight>
-                <a:latin typeface="Consolas" panose="020B0609020204030204" pitchFamily="49" charset="0"/>
-              </a:rPr>
-              <a:t>int</a:t>
-            </a:r>
-            <a:r>
-              <a:rPr lang="en-US" sz="1600" dirty="0">
-                <a:solidFill>
-                  <a:srgbClr val="000000"/>
-                </a:solidFill>
-                <a:highlight>
-                  <a:srgbClr val="FFFFFF"/>
-                </a:highlight>
-                <a:latin typeface="Consolas" panose="020B0609020204030204" pitchFamily="49" charset="0"/>
-              </a:rPr>
-              <a:t> value){</a:t>
-            </a:r>
-          </a:p>
-          <a:p>
-            <a:pPr marL="0" indent="0">
-              <a:buNone/>
-            </a:pPr>
-            <a:r>
-              <a:rPr lang="en-US" sz="1600" dirty="0">
-                <a:solidFill>
-                  <a:srgbClr val="000000"/>
-                </a:solidFill>
-                <a:highlight>
-                  <a:srgbClr val="FFFFFF"/>
-                </a:highlight>
-                <a:latin typeface="Consolas" panose="020B0609020204030204" pitchFamily="49" charset="0"/>
-              </a:rPr>
-              <a:t>    </a:t>
-            </a:r>
-            <a:r>
-              <a:rPr lang="en-US" sz="1600" dirty="0">
-                <a:solidFill>
-                  <a:srgbClr val="0000FF"/>
-                </a:solidFill>
-                <a:highlight>
-                  <a:srgbClr val="FFFFFF"/>
-                </a:highlight>
-                <a:latin typeface="Consolas" panose="020B0609020204030204" pitchFamily="49" charset="0"/>
-              </a:rPr>
-              <a:t>if</a:t>
-            </a:r>
-            <a:r>
-              <a:rPr lang="en-US" sz="1600" dirty="0">
-                <a:solidFill>
-                  <a:srgbClr val="000000"/>
-                </a:solidFill>
-                <a:highlight>
-                  <a:srgbClr val="FFFFFF"/>
-                </a:highlight>
-                <a:latin typeface="Consolas" panose="020B0609020204030204" pitchFamily="49" charset="0"/>
-              </a:rPr>
-              <a:t>(</a:t>
-            </a:r>
-            <a:r>
-              <a:rPr lang="en-US" sz="1600" dirty="0" err="1">
-                <a:solidFill>
-                  <a:srgbClr val="000000"/>
-                </a:solidFill>
-                <a:highlight>
-                  <a:srgbClr val="FFFFFF"/>
-                </a:highlight>
-                <a:latin typeface="Consolas" panose="020B0609020204030204" pitchFamily="49" charset="0"/>
-              </a:rPr>
-              <a:t>data.length</a:t>
-            </a:r>
-            <a:r>
-              <a:rPr lang="en-US" sz="1600" dirty="0">
-                <a:solidFill>
-                  <a:srgbClr val="000000"/>
-                </a:solidFill>
-                <a:highlight>
-                  <a:srgbClr val="FFFFFF"/>
-                </a:highlight>
-                <a:latin typeface="Consolas" panose="020B0609020204030204" pitchFamily="49" charset="0"/>
-              </a:rPr>
-              <a:t> == size)</a:t>
-            </a:r>
-          </a:p>
-          <a:p>
-            <a:pPr marL="0" indent="0">
-              <a:buNone/>
-            </a:pPr>
-            <a:r>
-              <a:rPr lang="en-US" sz="1600" dirty="0">
-                <a:solidFill>
-                  <a:srgbClr val="000000"/>
-                </a:solidFill>
-                <a:highlight>
-                  <a:srgbClr val="FFFFFF"/>
-                </a:highlight>
-                <a:latin typeface="Consolas" panose="020B0609020204030204" pitchFamily="49" charset="0"/>
-              </a:rPr>
-              <a:t>        resize();</a:t>
-            </a:r>
-          </a:p>
-          <a:p>
-            <a:pPr marL="0" indent="0">
-              <a:buNone/>
-            </a:pPr>
-            <a:r>
-              <a:rPr lang="en-US" sz="1600" dirty="0">
-                <a:solidFill>
-                  <a:srgbClr val="000000"/>
-                </a:solidFill>
-                <a:highlight>
-                  <a:srgbClr val="FFFFFF"/>
-                </a:highlight>
-                <a:latin typeface="Consolas" panose="020B0609020204030204" pitchFamily="49" charset="0"/>
-              </a:rPr>
-              <a:t>    data[size] = value;</a:t>
-            </a:r>
-          </a:p>
-          <a:p>
-            <a:pPr marL="0" indent="0">
-              <a:buNone/>
-            </a:pPr>
-            <a:r>
-              <a:rPr lang="en-US" sz="1600" dirty="0">
-                <a:solidFill>
-                  <a:srgbClr val="000000"/>
-                </a:solidFill>
-                <a:highlight>
-                  <a:srgbClr val="FFFFFF"/>
-                </a:highlight>
-                <a:latin typeface="Consolas" panose="020B0609020204030204" pitchFamily="49" charset="0"/>
-              </a:rPr>
-              <a:t>    size++;</a:t>
-            </a:r>
-          </a:p>
-          <a:p>
-            <a:pPr marL="0" indent="0">
-              <a:buNone/>
-            </a:pPr>
-            <a:r>
-              <a:rPr lang="en-US" sz="1600" dirty="0">
-                <a:solidFill>
-                  <a:srgbClr val="000000"/>
-                </a:solidFill>
-                <a:highlight>
-                  <a:srgbClr val="FFFFFF"/>
-                </a:highlight>
-                <a:latin typeface="Consolas" panose="020B0609020204030204" pitchFamily="49" charset="0"/>
-              </a:rPr>
-              <a:t>}</a:t>
-            </a:r>
-            <a:endParaRPr lang="en-US" sz="1600" dirty="0">
-              <a:solidFill>
-                <a:srgbClr val="0000FF"/>
-              </a:solidFill>
-              <a:highlight>
-                <a:srgbClr val="FFFFFF"/>
-              </a:highlight>
-              <a:latin typeface="Consolas" panose="020B0609020204030204" pitchFamily="49" charset="0"/>
-            </a:endParaRPr>
-          </a:p>
-          <a:p>
-            <a:pPr marL="0" indent="0">
-              <a:buNone/>
-            </a:pPr>
-            <a:r>
-              <a:rPr lang="en-US" sz="1600" dirty="0">
-                <a:solidFill>
-                  <a:srgbClr val="0000FF"/>
-                </a:solidFill>
-                <a:highlight>
-                  <a:srgbClr val="FFFFFF"/>
-                </a:highlight>
-                <a:latin typeface="Consolas" panose="020B0609020204030204" pitchFamily="49" charset="0"/>
-              </a:rPr>
-              <a:t>private</a:t>
-            </a:r>
-            <a:r>
-              <a:rPr lang="en-US" sz="1600" dirty="0">
-                <a:solidFill>
-                  <a:srgbClr val="000000"/>
-                </a:solidFill>
-                <a:highlight>
-                  <a:srgbClr val="FFFFFF"/>
-                </a:highlight>
-                <a:latin typeface="Consolas" panose="020B0609020204030204" pitchFamily="49" charset="0"/>
-              </a:rPr>
-              <a:t> </a:t>
-            </a:r>
-            <a:r>
-              <a:rPr lang="en-US" sz="1600" dirty="0">
-                <a:solidFill>
-                  <a:srgbClr val="0000FF"/>
-                </a:solidFill>
-                <a:highlight>
-                  <a:srgbClr val="FFFFFF"/>
-                </a:highlight>
-                <a:latin typeface="Consolas" panose="020B0609020204030204" pitchFamily="49" charset="0"/>
-              </a:rPr>
-              <a:t>void</a:t>
-            </a:r>
-            <a:r>
-              <a:rPr lang="en-US" sz="1600" dirty="0">
-                <a:solidFill>
-                  <a:srgbClr val="000000"/>
-                </a:solidFill>
-                <a:highlight>
-                  <a:srgbClr val="FFFFFF"/>
-                </a:highlight>
-                <a:latin typeface="Consolas" panose="020B0609020204030204" pitchFamily="49" charset="0"/>
-              </a:rPr>
-              <a:t> resize(){</a:t>
-            </a:r>
-          </a:p>
-          <a:p>
-            <a:pPr marL="0" indent="0">
-              <a:buNone/>
-            </a:pPr>
-            <a:r>
-              <a:rPr lang="en-US" sz="1600" dirty="0">
-                <a:solidFill>
-                  <a:srgbClr val="000000"/>
-                </a:solidFill>
-                <a:highlight>
-                  <a:srgbClr val="FFFFFF"/>
-                </a:highlight>
-                <a:latin typeface="Consolas" panose="020B0609020204030204" pitchFamily="49" charset="0"/>
-              </a:rPr>
-              <a:t>    </a:t>
-            </a:r>
-            <a:r>
-              <a:rPr lang="en-US" sz="1600" dirty="0">
-                <a:solidFill>
-                  <a:srgbClr val="0000FF"/>
-                </a:solidFill>
-                <a:highlight>
-                  <a:srgbClr val="FFFFFF"/>
-                </a:highlight>
-                <a:latin typeface="Consolas" panose="020B0609020204030204" pitchFamily="49" charset="0"/>
-              </a:rPr>
-              <a:t>int</a:t>
-            </a:r>
-            <a:r>
-              <a:rPr lang="en-US" sz="1600" dirty="0">
-                <a:solidFill>
-                  <a:srgbClr val="000000"/>
-                </a:solidFill>
-                <a:highlight>
-                  <a:srgbClr val="FFFFFF"/>
-                </a:highlight>
-                <a:latin typeface="Consolas" panose="020B0609020204030204" pitchFamily="49" charset="0"/>
-              </a:rPr>
-              <a:t>[] </a:t>
-            </a:r>
-            <a:r>
-              <a:rPr lang="en-US" sz="1600" dirty="0" err="1">
-                <a:solidFill>
-                  <a:srgbClr val="000000"/>
-                </a:solidFill>
-                <a:highlight>
-                  <a:srgbClr val="FFFFFF"/>
-                </a:highlight>
-                <a:latin typeface="Consolas" panose="020B0609020204030204" pitchFamily="49" charset="0"/>
-              </a:rPr>
-              <a:t>oldData</a:t>
-            </a:r>
-            <a:r>
-              <a:rPr lang="en-US" sz="1600" dirty="0">
-                <a:solidFill>
-                  <a:srgbClr val="000000"/>
-                </a:solidFill>
-                <a:highlight>
-                  <a:srgbClr val="FFFFFF"/>
-                </a:highlight>
-                <a:latin typeface="Consolas" panose="020B0609020204030204" pitchFamily="49" charset="0"/>
-              </a:rPr>
-              <a:t> = data;</a:t>
-            </a:r>
-          </a:p>
-          <a:p>
-            <a:pPr marL="0" indent="0">
-              <a:buNone/>
-            </a:pPr>
-            <a:r>
-              <a:rPr lang="en-US" sz="1600" dirty="0">
-                <a:solidFill>
-                  <a:srgbClr val="000000"/>
-                </a:solidFill>
-                <a:highlight>
-                  <a:srgbClr val="FFFFFF"/>
-                </a:highlight>
-                <a:latin typeface="Consolas" panose="020B0609020204030204" pitchFamily="49" charset="0"/>
-              </a:rPr>
-              <a:t>    data = </a:t>
-            </a:r>
-            <a:r>
-              <a:rPr lang="en-US" sz="1600" dirty="0">
-                <a:solidFill>
-                  <a:srgbClr val="0000FF"/>
-                </a:solidFill>
-                <a:highlight>
-                  <a:srgbClr val="FFFFFF"/>
-                </a:highlight>
-                <a:latin typeface="Consolas" panose="020B0609020204030204" pitchFamily="49" charset="0"/>
-              </a:rPr>
-              <a:t>new int</a:t>
-            </a:r>
-            <a:r>
-              <a:rPr lang="en-US" sz="1600" dirty="0">
-                <a:solidFill>
-                  <a:srgbClr val="000000"/>
-                </a:solidFill>
-                <a:highlight>
-                  <a:srgbClr val="FFFFFF"/>
-                </a:highlight>
-                <a:latin typeface="Consolas" panose="020B0609020204030204" pitchFamily="49" charset="0"/>
-              </a:rPr>
-              <a:t>[</a:t>
-            </a:r>
-            <a:r>
-              <a:rPr lang="en-US" sz="1600" dirty="0" err="1">
-                <a:solidFill>
-                  <a:srgbClr val="000000"/>
-                </a:solidFill>
-                <a:highlight>
-                  <a:srgbClr val="FFFFFF"/>
-                </a:highlight>
-                <a:latin typeface="Consolas" panose="020B0609020204030204" pitchFamily="49" charset="0"/>
-              </a:rPr>
-              <a:t>data.length</a:t>
-            </a:r>
-            <a:r>
-              <a:rPr lang="en-US" sz="1600" dirty="0">
-                <a:solidFill>
-                  <a:srgbClr val="000000"/>
-                </a:solidFill>
-                <a:highlight>
-                  <a:srgbClr val="FFFFFF"/>
-                </a:highlight>
-                <a:latin typeface="Consolas" panose="020B0609020204030204" pitchFamily="49" charset="0"/>
-              </a:rPr>
-              <a:t>*</a:t>
-            </a:r>
-            <a:r>
-              <a:rPr lang="en-US" sz="1600" dirty="0">
-                <a:solidFill>
-                  <a:srgbClr val="098658"/>
-                </a:solidFill>
-                <a:highlight>
-                  <a:srgbClr val="FFFFFF"/>
-                </a:highlight>
-                <a:latin typeface="Consolas" panose="020B0609020204030204" pitchFamily="49" charset="0"/>
-              </a:rPr>
-              <a:t>2</a:t>
-            </a:r>
-            <a:r>
-              <a:rPr lang="en-US" sz="1600" dirty="0">
-                <a:solidFill>
-                  <a:srgbClr val="000000"/>
-                </a:solidFill>
-                <a:highlight>
-                  <a:srgbClr val="FFFFFF"/>
-                </a:highlight>
-                <a:latin typeface="Consolas" panose="020B0609020204030204" pitchFamily="49" charset="0"/>
-              </a:rPr>
-              <a:t>];</a:t>
-            </a:r>
-          </a:p>
-          <a:p>
-            <a:pPr marL="0" indent="0">
-              <a:buNone/>
-            </a:pPr>
-            <a:r>
-              <a:rPr lang="en-US" sz="1600" dirty="0">
-                <a:solidFill>
-                  <a:srgbClr val="000000"/>
-                </a:solidFill>
-                <a:highlight>
-                  <a:srgbClr val="FFFFFF"/>
-                </a:highlight>
-                <a:latin typeface="Consolas" panose="020B0609020204030204" pitchFamily="49" charset="0"/>
-              </a:rPr>
-              <a:t>    </a:t>
-            </a:r>
-            <a:r>
-              <a:rPr lang="en-US" sz="1600" dirty="0">
-                <a:solidFill>
-                  <a:srgbClr val="0000FF"/>
-                </a:solidFill>
-                <a:highlight>
-                  <a:srgbClr val="FFFFFF"/>
-                </a:highlight>
-                <a:latin typeface="Consolas" panose="020B0609020204030204" pitchFamily="49" charset="0"/>
-              </a:rPr>
-              <a:t>for</a:t>
-            </a:r>
-            <a:r>
-              <a:rPr lang="en-US" sz="1600" dirty="0">
-                <a:solidFill>
-                  <a:srgbClr val="000000"/>
-                </a:solidFill>
-                <a:highlight>
-                  <a:srgbClr val="FFFFFF"/>
-                </a:highlight>
-                <a:latin typeface="Consolas" panose="020B0609020204030204" pitchFamily="49" charset="0"/>
-              </a:rPr>
-              <a:t>(</a:t>
-            </a:r>
-            <a:r>
-              <a:rPr lang="en-US" sz="1600" dirty="0">
-                <a:solidFill>
-                  <a:srgbClr val="0000FF"/>
-                </a:solidFill>
-                <a:highlight>
-                  <a:srgbClr val="FFFFFF"/>
-                </a:highlight>
-                <a:latin typeface="Consolas" panose="020B0609020204030204" pitchFamily="49" charset="0"/>
-              </a:rPr>
-              <a:t>int</a:t>
-            </a:r>
-            <a:r>
-              <a:rPr lang="en-US" sz="1600" dirty="0">
-                <a:solidFill>
-                  <a:srgbClr val="000000"/>
-                </a:solidFill>
-                <a:highlight>
-                  <a:srgbClr val="FFFFFF"/>
-                </a:highlight>
-                <a:latin typeface="Consolas" panose="020B0609020204030204" pitchFamily="49" charset="0"/>
-              </a:rPr>
-              <a:t> </a:t>
-            </a:r>
-            <a:r>
-              <a:rPr lang="en-US" sz="1600" dirty="0" err="1">
-                <a:solidFill>
-                  <a:srgbClr val="000000"/>
-                </a:solidFill>
-                <a:highlight>
-                  <a:srgbClr val="FFFFFF"/>
-                </a:highlight>
-                <a:latin typeface="Consolas" panose="020B0609020204030204" pitchFamily="49" charset="0"/>
-              </a:rPr>
-              <a:t>i</a:t>
-            </a:r>
-            <a:r>
-              <a:rPr lang="en-US" sz="1600" dirty="0">
-                <a:solidFill>
-                  <a:srgbClr val="000000"/>
-                </a:solidFill>
-                <a:highlight>
-                  <a:srgbClr val="FFFFFF"/>
-                </a:highlight>
-                <a:latin typeface="Consolas" panose="020B0609020204030204" pitchFamily="49" charset="0"/>
-              </a:rPr>
-              <a:t> = </a:t>
-            </a:r>
-            <a:r>
-              <a:rPr lang="en-US" sz="1600" dirty="0">
-                <a:solidFill>
-                  <a:srgbClr val="098658"/>
-                </a:solidFill>
-                <a:highlight>
-                  <a:srgbClr val="FFFFFF"/>
-                </a:highlight>
-                <a:latin typeface="Consolas" panose="020B0609020204030204" pitchFamily="49" charset="0"/>
-              </a:rPr>
-              <a:t>0</a:t>
-            </a:r>
-            <a:r>
-              <a:rPr lang="en-US" sz="1600" dirty="0">
-                <a:solidFill>
-                  <a:srgbClr val="000000"/>
-                </a:solidFill>
-                <a:highlight>
-                  <a:srgbClr val="FFFFFF"/>
-                </a:highlight>
-                <a:latin typeface="Consolas" panose="020B0609020204030204" pitchFamily="49" charset="0"/>
-              </a:rPr>
-              <a:t>; </a:t>
-            </a:r>
-            <a:r>
-              <a:rPr lang="en-US" sz="1600" dirty="0" err="1">
-                <a:solidFill>
-                  <a:srgbClr val="000000"/>
-                </a:solidFill>
-                <a:highlight>
-                  <a:srgbClr val="FFFFFF"/>
-                </a:highlight>
-                <a:latin typeface="Consolas" panose="020B0609020204030204" pitchFamily="49" charset="0"/>
-              </a:rPr>
-              <a:t>i</a:t>
-            </a:r>
-            <a:r>
-              <a:rPr lang="en-US" sz="1600" dirty="0">
-                <a:solidFill>
-                  <a:srgbClr val="000000"/>
-                </a:solidFill>
-                <a:highlight>
-                  <a:srgbClr val="FFFFFF"/>
-                </a:highlight>
-                <a:latin typeface="Consolas" panose="020B0609020204030204" pitchFamily="49" charset="0"/>
-              </a:rPr>
-              <a:t> &lt; </a:t>
-            </a:r>
-            <a:r>
-              <a:rPr lang="en-US" sz="1600" dirty="0" err="1">
-                <a:solidFill>
-                  <a:srgbClr val="000000"/>
-                </a:solidFill>
-                <a:highlight>
-                  <a:srgbClr val="FFFFFF"/>
-                </a:highlight>
-                <a:latin typeface="Consolas" panose="020B0609020204030204" pitchFamily="49" charset="0"/>
-              </a:rPr>
-              <a:t>oldData.length</a:t>
-            </a:r>
-            <a:r>
-              <a:rPr lang="en-US" sz="1600" dirty="0">
-                <a:solidFill>
-                  <a:srgbClr val="000000"/>
-                </a:solidFill>
-                <a:highlight>
-                  <a:srgbClr val="FFFFFF"/>
-                </a:highlight>
-                <a:latin typeface="Consolas" panose="020B0609020204030204" pitchFamily="49" charset="0"/>
-              </a:rPr>
-              <a:t>; </a:t>
-            </a:r>
-            <a:r>
-              <a:rPr lang="en-US" sz="1600" dirty="0" err="1">
-                <a:solidFill>
-                  <a:srgbClr val="000000"/>
-                </a:solidFill>
-                <a:highlight>
-                  <a:srgbClr val="FFFFFF"/>
-                </a:highlight>
-                <a:latin typeface="Consolas" panose="020B0609020204030204" pitchFamily="49" charset="0"/>
-              </a:rPr>
-              <a:t>i</a:t>
-            </a:r>
-            <a:r>
-              <a:rPr lang="en-US" sz="1600" dirty="0">
-                <a:solidFill>
-                  <a:srgbClr val="000000"/>
-                </a:solidFill>
-                <a:highlight>
-                  <a:srgbClr val="FFFFFF"/>
-                </a:highlight>
-                <a:latin typeface="Consolas" panose="020B0609020204030204" pitchFamily="49" charset="0"/>
-              </a:rPr>
-              <a:t>++)</a:t>
-            </a:r>
-          </a:p>
-          <a:p>
-            <a:pPr marL="0" indent="0">
-              <a:buNone/>
-            </a:pPr>
-            <a:r>
-              <a:rPr lang="en-US" sz="1600" dirty="0">
-                <a:solidFill>
-                  <a:srgbClr val="000000"/>
-                </a:solidFill>
-                <a:highlight>
-                  <a:srgbClr val="FFFFFF"/>
-                </a:highlight>
-                <a:latin typeface="Consolas" panose="020B0609020204030204" pitchFamily="49" charset="0"/>
-              </a:rPr>
-              <a:t>        data[</a:t>
-            </a:r>
-            <a:r>
-              <a:rPr lang="en-US" sz="1600" dirty="0" err="1">
-                <a:solidFill>
-                  <a:srgbClr val="000000"/>
-                </a:solidFill>
-                <a:highlight>
-                  <a:srgbClr val="FFFFFF"/>
-                </a:highlight>
-                <a:latin typeface="Consolas" panose="020B0609020204030204" pitchFamily="49" charset="0"/>
-              </a:rPr>
-              <a:t>i</a:t>
-            </a:r>
-            <a:r>
-              <a:rPr lang="en-US" sz="1600" dirty="0">
-                <a:solidFill>
-                  <a:srgbClr val="000000"/>
-                </a:solidFill>
-                <a:highlight>
-                  <a:srgbClr val="FFFFFF"/>
-                </a:highlight>
-                <a:latin typeface="Consolas" panose="020B0609020204030204" pitchFamily="49" charset="0"/>
-              </a:rPr>
-              <a:t>] = </a:t>
-            </a:r>
-            <a:r>
-              <a:rPr lang="en-US" sz="1600" dirty="0" err="1">
-                <a:solidFill>
-                  <a:srgbClr val="000000"/>
-                </a:solidFill>
-                <a:highlight>
-                  <a:srgbClr val="FFFFFF"/>
-                </a:highlight>
-                <a:latin typeface="Consolas" panose="020B0609020204030204" pitchFamily="49" charset="0"/>
-              </a:rPr>
-              <a:t>oldData</a:t>
-            </a:r>
-            <a:r>
-              <a:rPr lang="en-US" sz="1600" dirty="0">
-                <a:solidFill>
-                  <a:srgbClr val="000000"/>
-                </a:solidFill>
-                <a:highlight>
-                  <a:srgbClr val="FFFFFF"/>
-                </a:highlight>
-                <a:latin typeface="Consolas" panose="020B0609020204030204" pitchFamily="49" charset="0"/>
-              </a:rPr>
-              <a:t>[</a:t>
-            </a:r>
-            <a:r>
-              <a:rPr lang="en-US" sz="1600" dirty="0" err="1">
-                <a:solidFill>
-                  <a:srgbClr val="000000"/>
-                </a:solidFill>
-                <a:highlight>
-                  <a:srgbClr val="FFFFFF"/>
-                </a:highlight>
-                <a:latin typeface="Consolas" panose="020B0609020204030204" pitchFamily="49" charset="0"/>
-              </a:rPr>
-              <a:t>i</a:t>
-            </a:r>
-            <a:r>
-              <a:rPr lang="en-US" sz="1600" dirty="0">
-                <a:solidFill>
-                  <a:srgbClr val="000000"/>
-                </a:solidFill>
-                <a:highlight>
-                  <a:srgbClr val="FFFFFF"/>
-                </a:highlight>
-                <a:latin typeface="Consolas" panose="020B0609020204030204" pitchFamily="49" charset="0"/>
-              </a:rPr>
-              <a:t>];</a:t>
-            </a:r>
-          </a:p>
-          <a:p>
-            <a:pPr marL="0" indent="0">
-              <a:buNone/>
-            </a:pPr>
-            <a:r>
-              <a:rPr lang="en-US" sz="1600" dirty="0">
-                <a:solidFill>
-                  <a:srgbClr val="000000"/>
-                </a:solidFill>
-                <a:highlight>
-                  <a:srgbClr val="FFFFFF"/>
-                </a:highlight>
-                <a:latin typeface="Consolas" panose="020B0609020204030204" pitchFamily="49" charset="0"/>
-              </a:rPr>
-              <a:t>}</a:t>
-            </a:r>
-            <a:endParaRPr lang="en-US" sz="1600" dirty="0">
-              <a:highlight>
-                <a:srgbClr val="FFFFFF"/>
-              </a:highlight>
-            </a:endParaRPr>
-          </a:p>
-        </p:txBody>
-      </p:sp>
-      <p:sp>
-        <p:nvSpPr>
-          <p:cNvPr id="2" name="Title 1">
-            <a:extLst>
-              <a:ext uri="{FF2B5EF4-FFF2-40B4-BE49-F238E27FC236}">
-                <a16:creationId xmlns:a16="http://schemas.microsoft.com/office/drawing/2014/main" id="{22E69A94-1220-2804-63AB-870822DBD0D0}"/>
-              </a:ext>
-            </a:extLst>
-          </p:cNvPr>
-          <p:cNvSpPr>
-            <a:spLocks noGrp="1"/>
-          </p:cNvSpPr>
-          <p:nvPr>
-            <p:ph type="title"/>
-          </p:nvPr>
-        </p:nvSpPr>
-        <p:spPr/>
-        <p:txBody>
-          <a:bodyPr/>
-          <a:lstStyle/>
-          <a:p>
-            <a:r>
-              <a:rPr lang="en-US" dirty="0"/>
-              <a:t>Amortized Complexity Example - </a:t>
-            </a:r>
-            <a:r>
-              <a:rPr lang="en-US" dirty="0" err="1"/>
-              <a:t>ArrayList</a:t>
-            </a:r>
-            <a:endParaRPr lang="en-US" dirty="0"/>
-          </a:p>
-        </p:txBody>
-      </p:sp>
-      <mc:AlternateContent xmlns:mc="http://schemas.openxmlformats.org/markup-compatibility/2006" xmlns:a14="http://schemas.microsoft.com/office/drawing/2010/main">
-        <mc:Choice Requires="a14">
-          <p:sp>
-            <p:nvSpPr>
-              <p:cNvPr id="4" name="Content Placeholder 3">
-                <a:extLst>
-                  <a:ext uri="{FF2B5EF4-FFF2-40B4-BE49-F238E27FC236}">
-                    <a16:creationId xmlns:a16="http://schemas.microsoft.com/office/drawing/2014/main" id="{015840F2-52BA-DB0C-15EC-2298E887A62B}"/>
-                  </a:ext>
-                </a:extLst>
-              </p:cNvPr>
-              <p:cNvSpPr>
-                <a:spLocks noGrp="1"/>
-              </p:cNvSpPr>
-              <p:nvPr>
-                <p:ph sz="half" idx="2"/>
-              </p:nvPr>
-            </p:nvSpPr>
-            <p:spPr/>
-            <p:txBody>
-              <a:bodyPr>
-                <a:normAutofit/>
-              </a:bodyPr>
-              <a:lstStyle/>
-              <a:p>
-                <a:r>
-                  <a:rPr lang="en-US" dirty="0"/>
-                  <a:t>Amortized Analysis Idea:</a:t>
-                </a:r>
-              </a:p>
-              <a:p>
-                <a:pPr lvl="1"/>
-                <a:r>
-                  <a:rPr lang="en-US" dirty="0"/>
-                  <a:t>Suppose we have a program that in total does </a:t>
-                </a:r>
-                <a14:m>
-                  <m:oMath xmlns:m="http://schemas.openxmlformats.org/officeDocument/2006/math">
-                    <m:r>
-                      <a:rPr lang="en-US" b="0" i="1" smtClean="0">
-                        <a:latin typeface="Cambria Math" panose="02040503050406030204" pitchFamily="18" charset="0"/>
-                      </a:rPr>
-                      <m:t>𝑛</m:t>
-                    </m:r>
-                  </m:oMath>
-                </a14:m>
-                <a:r>
-                  <a:rPr lang="en-US" dirty="0"/>
-                  <a:t> adds.</a:t>
-                </a:r>
-              </a:p>
-              <a:p>
-                <a:pPr lvl="1"/>
-                <a:r>
-                  <a:rPr lang="en-US" dirty="0"/>
-                  <a:t>How much time was spent “on average” across all </a:t>
-                </a:r>
-                <a14:m>
-                  <m:oMath xmlns:m="http://schemas.openxmlformats.org/officeDocument/2006/math">
-                    <m:r>
-                      <a:rPr lang="en-US" b="0" i="1" smtClean="0">
-                        <a:latin typeface="Cambria Math" panose="02040503050406030204" pitchFamily="18" charset="0"/>
-                      </a:rPr>
-                      <m:t>𝑛</m:t>
-                    </m:r>
-                  </m:oMath>
-                </a14:m>
-                <a:r>
-                  <a:rPr lang="en-US" dirty="0"/>
-                  <a:t>?</a:t>
-                </a:r>
-              </a:p>
-              <a:p>
-                <a:r>
-                  <a:rPr lang="en-US" dirty="0"/>
-                  <a:t>Let </a:t>
-                </a:r>
-                <a14:m>
-                  <m:oMath xmlns:m="http://schemas.openxmlformats.org/officeDocument/2006/math">
-                    <m:r>
-                      <a:rPr lang="en-US" b="0" i="1" smtClean="0">
-                        <a:latin typeface="Cambria Math" panose="02040503050406030204" pitchFamily="18" charset="0"/>
-                      </a:rPr>
-                      <m:t>𝑐</m:t>
-                    </m:r>
-                  </m:oMath>
-                </a14:m>
-                <a:r>
-                  <a:rPr lang="en-US" dirty="0"/>
-                  <a:t> be the initial size of </a:t>
-                </a:r>
-                <a:r>
-                  <a:rPr lang="en-US" dirty="0">
-                    <a:latin typeface="Consolas" panose="020B0609020204030204" pitchFamily="49" charset="0"/>
-                  </a:rPr>
-                  <a:t>data</a:t>
-                </a:r>
-              </a:p>
-              <a:p>
-                <a:pPr lvl="1"/>
-                <a:r>
-                  <a:rPr lang="en-US" dirty="0"/>
-                  <a:t>The first </a:t>
-                </a:r>
-                <a14:m>
-                  <m:oMath xmlns:m="http://schemas.openxmlformats.org/officeDocument/2006/math">
-                    <m:r>
-                      <a:rPr lang="en-US" b="0" i="1" smtClean="0">
-                        <a:latin typeface="Cambria Math" panose="02040503050406030204" pitchFamily="18" charset="0"/>
-                      </a:rPr>
-                      <m:t>𝑐</m:t>
-                    </m:r>
-                  </m:oMath>
-                </a14:m>
-                <a:r>
-                  <a:rPr lang="en-US" dirty="0"/>
-                  <a:t> adds take: </a:t>
-                </a:r>
-                <a14:m>
-                  <m:oMath xmlns:m="http://schemas.openxmlformats.org/officeDocument/2006/math">
-                    <m:r>
-                      <a:rPr lang="en-US" b="0" i="1" smtClean="0">
-                        <a:latin typeface="Cambria Math" panose="02040503050406030204" pitchFamily="18" charset="0"/>
-                      </a:rPr>
-                      <m:t>𝑐</m:t>
-                    </m:r>
-                    <m:r>
-                      <a:rPr lang="en-US" b="0" i="1" smtClean="0">
-                        <a:latin typeface="Cambria Math" panose="02040503050406030204" pitchFamily="18" charset="0"/>
-                      </a:rPr>
-                      <m:t>+</m:t>
-                    </m:r>
-                    <m:r>
-                      <a:rPr lang="en-US" b="0" i="1" smtClean="0">
-                        <a:latin typeface="Cambria Math" panose="02040503050406030204" pitchFamily="18" charset="0"/>
-                      </a:rPr>
-                      <m:t>𝑐</m:t>
-                    </m:r>
-                    <m:r>
-                      <a:rPr lang="en-US" b="0" i="1" smtClean="0">
-                        <a:latin typeface="Cambria Math" panose="02040503050406030204" pitchFamily="18" charset="0"/>
-                      </a:rPr>
-                      <m:t>=2</m:t>
-                    </m:r>
-                    <m:r>
-                      <a:rPr lang="en-US" b="0" i="1" smtClean="0">
-                        <a:latin typeface="Cambria Math" panose="02040503050406030204" pitchFamily="18" charset="0"/>
-                      </a:rPr>
-                      <m:t>𝑐</m:t>
-                    </m:r>
-                  </m:oMath>
-                </a14:m>
-                <a:endParaRPr lang="en-US" dirty="0"/>
-              </a:p>
-              <a:p>
-                <a:pPr lvl="1"/>
-                <a:r>
-                  <a:rPr lang="en-US" dirty="0"/>
-                  <a:t>The next </a:t>
-                </a:r>
-                <a14:m>
-                  <m:oMath xmlns:m="http://schemas.openxmlformats.org/officeDocument/2006/math">
-                    <m:r>
-                      <a:rPr lang="en-US" b="0" i="1" smtClean="0">
-                        <a:latin typeface="Cambria Math" panose="02040503050406030204" pitchFamily="18" charset="0"/>
-                      </a:rPr>
-                      <m:t>2</m:t>
-                    </m:r>
-                    <m:r>
-                      <a:rPr lang="en-US" b="0" i="1" smtClean="0">
-                        <a:latin typeface="Cambria Math" panose="02040503050406030204" pitchFamily="18" charset="0"/>
-                      </a:rPr>
-                      <m:t>𝑐</m:t>
-                    </m:r>
-                  </m:oMath>
-                </a14:m>
-                <a:r>
-                  <a:rPr lang="en-US" dirty="0"/>
-                  <a:t> adds: </a:t>
-                </a:r>
-                <a14:m>
-                  <m:oMath xmlns:m="http://schemas.openxmlformats.org/officeDocument/2006/math">
-                    <m:r>
-                      <a:rPr lang="en-US" b="0" i="1" smtClean="0">
-                        <a:latin typeface="Cambria Math" panose="02040503050406030204" pitchFamily="18" charset="0"/>
-                      </a:rPr>
-                      <m:t>2</m:t>
-                    </m:r>
-                    <m:r>
-                      <a:rPr lang="en-US" b="0" i="1" smtClean="0">
-                        <a:latin typeface="Cambria Math" panose="02040503050406030204" pitchFamily="18" charset="0"/>
-                      </a:rPr>
-                      <m:t>𝑐</m:t>
-                    </m:r>
-                    <m:r>
-                      <a:rPr lang="en-US" b="0" i="1" smtClean="0">
-                        <a:latin typeface="Cambria Math" panose="02040503050406030204" pitchFamily="18" charset="0"/>
-                      </a:rPr>
-                      <m:t>+2</m:t>
-                    </m:r>
-                    <m:r>
-                      <a:rPr lang="en-US" b="0" i="1" smtClean="0">
-                        <a:latin typeface="Cambria Math" panose="02040503050406030204" pitchFamily="18" charset="0"/>
-                      </a:rPr>
-                      <m:t>𝑐</m:t>
-                    </m:r>
-                    <m:r>
-                      <a:rPr lang="en-US" b="0" i="1" smtClean="0">
-                        <a:latin typeface="Cambria Math" panose="02040503050406030204" pitchFamily="18" charset="0"/>
-                      </a:rPr>
-                      <m:t>=4</m:t>
-                    </m:r>
-                    <m:r>
-                      <a:rPr lang="en-US" b="0" i="1" smtClean="0">
-                        <a:latin typeface="Cambria Math" panose="02040503050406030204" pitchFamily="18" charset="0"/>
-                      </a:rPr>
-                      <m:t>𝑐</m:t>
-                    </m:r>
-                  </m:oMath>
-                </a14:m>
-                <a:endParaRPr lang="en-US" dirty="0"/>
-              </a:p>
-              <a:p>
-                <a:pPr lvl="1"/>
-                <a:r>
-                  <a:rPr lang="en-US" dirty="0"/>
-                  <a:t>The next </a:t>
-                </a:r>
-                <a14:m>
-                  <m:oMath xmlns:m="http://schemas.openxmlformats.org/officeDocument/2006/math">
-                    <m:r>
-                      <a:rPr lang="en-US" b="0" i="1" smtClean="0">
-                        <a:latin typeface="Cambria Math" panose="02040503050406030204" pitchFamily="18" charset="0"/>
-                      </a:rPr>
-                      <m:t>4</m:t>
-                    </m:r>
-                    <m:r>
-                      <a:rPr lang="en-US" b="0" i="1" smtClean="0">
-                        <a:latin typeface="Cambria Math" panose="02040503050406030204" pitchFamily="18" charset="0"/>
-                      </a:rPr>
-                      <m:t>𝑐</m:t>
-                    </m:r>
-                  </m:oMath>
-                </a14:m>
-                <a:r>
-                  <a:rPr lang="en-US" dirty="0"/>
-                  <a:t> adds: </a:t>
-                </a:r>
-                <a14:m>
-                  <m:oMath xmlns:m="http://schemas.openxmlformats.org/officeDocument/2006/math">
-                    <m:r>
-                      <a:rPr lang="en-US" b="0" i="1" smtClean="0">
-                        <a:latin typeface="Cambria Math" panose="02040503050406030204" pitchFamily="18" charset="0"/>
-                      </a:rPr>
-                      <m:t>4</m:t>
-                    </m:r>
-                    <m:r>
-                      <a:rPr lang="en-US" b="0" i="1" smtClean="0">
-                        <a:latin typeface="Cambria Math" panose="02040503050406030204" pitchFamily="18" charset="0"/>
-                      </a:rPr>
-                      <m:t>𝑐</m:t>
-                    </m:r>
-                    <m:r>
-                      <a:rPr lang="en-US" b="0" i="1" smtClean="0">
-                        <a:latin typeface="Cambria Math" panose="02040503050406030204" pitchFamily="18" charset="0"/>
-                      </a:rPr>
-                      <m:t>+4</m:t>
-                    </m:r>
-                    <m:r>
-                      <a:rPr lang="en-US" b="0" i="1" smtClean="0">
-                        <a:latin typeface="Cambria Math" panose="02040503050406030204" pitchFamily="18" charset="0"/>
-                      </a:rPr>
-                      <m:t>𝑐</m:t>
-                    </m:r>
-                    <m:r>
-                      <a:rPr lang="en-US" b="0" i="1" smtClean="0">
-                        <a:latin typeface="Cambria Math" panose="02040503050406030204" pitchFamily="18" charset="0"/>
-                      </a:rPr>
-                      <m:t>=8</m:t>
-                    </m:r>
-                    <m:r>
-                      <a:rPr lang="en-US" b="0" i="1" smtClean="0">
-                        <a:latin typeface="Cambria Math" panose="02040503050406030204" pitchFamily="18" charset="0"/>
-                      </a:rPr>
-                      <m:t>𝑐</m:t>
-                    </m:r>
-                  </m:oMath>
-                </a14:m>
-                <a:endParaRPr lang="en-US" dirty="0"/>
-              </a:p>
-              <a:p>
-                <a:pPr lvl="1"/>
-                <a:r>
-                  <a:rPr lang="en-US" dirty="0"/>
-                  <a:t>Overall: </a:t>
-                </a:r>
-                <a14:m>
-                  <m:oMath xmlns:m="http://schemas.openxmlformats.org/officeDocument/2006/math">
-                    <m:f>
-                      <m:fPr>
-                        <m:ctrlPr>
-                          <a:rPr lang="en-US" b="0" i="1" smtClean="0">
-                            <a:latin typeface="Cambria Math" panose="02040503050406030204" pitchFamily="18" charset="0"/>
-                          </a:rPr>
-                        </m:ctrlPr>
-                      </m:fPr>
-                      <m:num>
-                        <m:r>
-                          <a:rPr lang="en-US" b="0" i="1" smtClean="0">
-                            <a:latin typeface="Cambria Math" panose="02040503050406030204" pitchFamily="18" charset="0"/>
-                          </a:rPr>
-                          <m:t>14</m:t>
-                        </m:r>
-                        <m:r>
-                          <a:rPr lang="en-US" b="0" i="1" smtClean="0">
-                            <a:latin typeface="Cambria Math" panose="02040503050406030204" pitchFamily="18" charset="0"/>
-                          </a:rPr>
-                          <m:t>𝑐</m:t>
-                        </m:r>
-                      </m:num>
-                      <m:den>
-                        <m:r>
-                          <a:rPr lang="en-US" b="0" i="1" smtClean="0">
-                            <a:latin typeface="Cambria Math" panose="02040503050406030204" pitchFamily="18" charset="0"/>
-                          </a:rPr>
-                          <m:t>7</m:t>
-                        </m:r>
-                        <m:r>
-                          <a:rPr lang="en-US" b="0" i="1" smtClean="0">
-                            <a:latin typeface="Cambria Math" panose="02040503050406030204" pitchFamily="18" charset="0"/>
-                          </a:rPr>
-                          <m:t>𝑐</m:t>
-                        </m:r>
-                      </m:den>
-                    </m:f>
-                    <m:r>
-                      <a:rPr lang="en-US" b="0" i="1" smtClean="0">
-                        <a:latin typeface="Cambria Math" panose="02040503050406030204" pitchFamily="18" charset="0"/>
-                      </a:rPr>
-                      <m:t>=2</m:t>
-                    </m:r>
-                    <m:r>
-                      <a:rPr lang="en-US" b="0" i="1" smtClean="0">
-                        <a:latin typeface="Cambria Math" panose="02040503050406030204" pitchFamily="18" charset="0"/>
-                      </a:rPr>
-                      <m:t>𝑐</m:t>
-                    </m:r>
-                  </m:oMath>
-                </a14:m>
-                <a:endParaRPr lang="en-US" dirty="0"/>
-              </a:p>
-            </p:txBody>
-          </p:sp>
-        </mc:Choice>
-        <mc:Fallback xmlns="">
-          <p:sp>
-            <p:nvSpPr>
-              <p:cNvPr id="4" name="Content Placeholder 3">
-                <a:extLst>
-                  <a:ext uri="{FF2B5EF4-FFF2-40B4-BE49-F238E27FC236}">
-                    <a16:creationId xmlns:a16="http://schemas.microsoft.com/office/drawing/2014/main" id="{015840F2-52BA-DB0C-15EC-2298E887A62B}"/>
-                  </a:ext>
-                </a:extLst>
-              </p:cNvPr>
-              <p:cNvSpPr>
-                <a:spLocks noGrp="1" noRot="1" noChangeAspect="1" noMove="1" noResize="1" noEditPoints="1" noAdjustHandles="1" noChangeArrowheads="1" noChangeShapeType="1" noTextEdit="1"/>
-              </p:cNvSpPr>
-              <p:nvPr>
-                <p:ph sz="half" idx="2"/>
-              </p:nvPr>
-            </p:nvSpPr>
-            <p:spPr>
-              <a:blipFill>
-                <a:blip r:embed="rId3"/>
-                <a:stretch>
-                  <a:fillRect l="-2118" t="-2241"/>
-                </a:stretch>
-              </a:blipFill>
-            </p:spPr>
-            <p:txBody>
-              <a:bodyPr/>
-              <a:lstStyle/>
-              <a:p>
-                <a:r>
-                  <a:rPr lang="en-US">
-                    <a:noFill/>
-                  </a:rPr>
-                  <a:t> </a:t>
-                </a:r>
-              </a:p>
-            </p:txBody>
-          </p:sp>
-        </mc:Fallback>
-      </mc:AlternateContent>
-      <p:sp>
-        <p:nvSpPr>
-          <p:cNvPr id="3" name="TextBox 2">
-            <a:extLst>
-              <a:ext uri="{FF2B5EF4-FFF2-40B4-BE49-F238E27FC236}">
-                <a16:creationId xmlns:a16="http://schemas.microsoft.com/office/drawing/2014/main" id="{16D5D4F1-8370-387D-F6D8-21C5C80D4F42}"/>
-              </a:ext>
-            </a:extLst>
-          </p:cNvPr>
-          <p:cNvSpPr txBox="1"/>
-          <p:nvPr/>
-        </p:nvSpPr>
-        <p:spPr>
-          <a:xfrm>
-            <a:off x="3394362" y="2766559"/>
-            <a:ext cx="2975957" cy="923330"/>
-          </a:xfrm>
-          <a:prstGeom prst="rect">
-            <a:avLst/>
-          </a:prstGeom>
-          <a:noFill/>
-          <a:ln>
-            <a:solidFill>
-              <a:srgbClr val="FF0000"/>
-            </a:solidFill>
-          </a:ln>
-        </p:spPr>
-        <p:txBody>
-          <a:bodyPr wrap="square" rtlCol="0">
-            <a:spAutoFit/>
-          </a:bodyPr>
-          <a:lstStyle/>
-          <a:p>
-            <a:r>
-              <a:rPr lang="en-US" dirty="0">
-                <a:solidFill>
-                  <a:srgbClr val="FF0000"/>
-                </a:solidFill>
-              </a:rPr>
-              <a:t>Every time we resize, we earn </a:t>
-            </a:r>
-            <a:r>
-              <a:rPr lang="en-US" dirty="0" err="1">
-                <a:solidFill>
-                  <a:srgbClr val="FF0000"/>
-                </a:solidFill>
-                <a:latin typeface="Consolas" panose="020B0609020204030204" pitchFamily="49" charset="0"/>
-              </a:rPr>
-              <a:t>data.length</a:t>
-            </a:r>
-            <a:r>
-              <a:rPr lang="en-US" dirty="0">
-                <a:solidFill>
-                  <a:srgbClr val="FF0000"/>
-                </a:solidFill>
-              </a:rPr>
-              <a:t> more adds before the next resize!</a:t>
-            </a:r>
-          </a:p>
-        </p:txBody>
-      </p:sp>
-      <p:cxnSp>
-        <p:nvCxnSpPr>
-          <p:cNvPr id="7" name="Straight Arrow Connector 6">
-            <a:extLst>
-              <a:ext uri="{FF2B5EF4-FFF2-40B4-BE49-F238E27FC236}">
-                <a16:creationId xmlns:a16="http://schemas.microsoft.com/office/drawing/2014/main" id="{1CA4A632-C2AC-7864-4F4E-4A5F61D15BA8}"/>
-              </a:ext>
-            </a:extLst>
-          </p:cNvPr>
-          <p:cNvCxnSpPr>
-            <a:cxnSpLocks/>
-            <a:stCxn id="3" idx="2"/>
-          </p:cNvCxnSpPr>
-          <p:nvPr/>
-        </p:nvCxnSpPr>
-        <p:spPr>
-          <a:xfrm flipH="1">
-            <a:off x="4339244" y="3689889"/>
-            <a:ext cx="543097" cy="907049"/>
-          </a:xfrm>
-          <a:prstGeom prst="straightConnector1">
-            <a:avLst/>
-          </a:prstGeom>
-          <a:ln>
-            <a:solidFill>
-              <a:srgbClr val="FF0000"/>
-            </a:solidFill>
-            <a:tailEnd type="triangle"/>
-          </a:ln>
-        </p:spPr>
-        <p:style>
-          <a:lnRef idx="1">
-            <a:schemeClr val="accent1"/>
-          </a:lnRef>
-          <a:fillRef idx="0">
-            <a:schemeClr val="accent1"/>
-          </a:fillRef>
-          <a:effectRef idx="0">
-            <a:schemeClr val="accent1"/>
-          </a:effectRef>
-          <a:fontRef idx="minor">
-            <a:schemeClr val="tx1"/>
-          </a:fontRef>
-        </p:style>
-      </p:cxnSp>
-    </p:spTree>
-    <p:extLst>
-      <p:ext uri="{BB962C8B-B14F-4D97-AF65-F5344CB8AC3E}">
-        <p14:creationId xmlns:p14="http://schemas.microsoft.com/office/powerpoint/2010/main" val="349862771"/>
-      </p:ext>
-    </p:extLst>
-  </p:cSld>
-  <p:clrMapOvr>
-    <a:masterClrMapping/>
-  </p:clrMapOvr>
-</p:sld>
-</file>
-
-<file path=ppt/slides/slide31.xml><?xml version="1.0" encoding="utf-8"?>
-<p:sld xmlns:a="http://schemas.openxmlformats.org/drawingml/2006/main" xmlns:r="http://schemas.openxmlformats.org/officeDocument/2006/relationships" xmlns:p="http://schemas.openxmlformats.org/presentationml/2006/main">
-  <p:cSld>
-    <p:spTree>
-      <p:nvGrpSpPr>
-        <p:cNvPr id="1" name=""/>
-        <p:cNvGrpSpPr/>
-        <p:nvPr/>
-      </p:nvGrpSpPr>
-      <p:grpSpPr>
-        <a:xfrm>
-          <a:off x="0" y="0"/>
-          <a:ext cx="0" cy="0"/>
-          <a:chOff x="0" y="0"/>
-          <a:chExt cx="0" cy="0"/>
-        </a:xfrm>
-      </p:grpSpPr>
-      <p:sp>
-        <p:nvSpPr>
-          <p:cNvPr id="2" name="Title 1">
-            <a:extLst>
-              <a:ext uri="{FF2B5EF4-FFF2-40B4-BE49-F238E27FC236}">
-                <a16:creationId xmlns:a16="http://schemas.microsoft.com/office/drawing/2014/main" id="{AE837711-2C9F-C400-7B2E-F7113BCCD397}"/>
-              </a:ext>
-            </a:extLst>
-          </p:cNvPr>
-          <p:cNvSpPr>
-            <a:spLocks noGrp="1"/>
-          </p:cNvSpPr>
-          <p:nvPr>
-            <p:ph type="title"/>
-          </p:nvPr>
-        </p:nvSpPr>
-        <p:spPr/>
-        <p:txBody>
-          <a:bodyPr/>
-          <a:lstStyle/>
-          <a:p>
-            <a:r>
-              <a:rPr lang="en-US" dirty="0"/>
-              <a:t>Amortized Analysis Analogy</a:t>
-            </a:r>
-          </a:p>
-        </p:txBody>
-      </p:sp>
-      <p:sp>
-        <p:nvSpPr>
-          <p:cNvPr id="3" name="Content Placeholder 2">
-            <a:extLst>
-              <a:ext uri="{FF2B5EF4-FFF2-40B4-BE49-F238E27FC236}">
-                <a16:creationId xmlns:a16="http://schemas.microsoft.com/office/drawing/2014/main" id="{E995483E-FA76-F83C-AF97-9517E9B1D9AB}"/>
-              </a:ext>
-            </a:extLst>
-          </p:cNvPr>
-          <p:cNvSpPr>
-            <a:spLocks noGrp="1"/>
-          </p:cNvSpPr>
-          <p:nvPr>
-            <p:ph idx="1"/>
-          </p:nvPr>
-        </p:nvSpPr>
-        <p:spPr/>
-        <p:txBody>
-          <a:bodyPr/>
-          <a:lstStyle/>
-          <a:p>
-            <a:r>
-              <a:rPr lang="en-US" dirty="0"/>
-              <a:t>Suppose I’d like to park in a lot where they charge $10 per day to park</a:t>
-            </a:r>
-          </a:p>
-          <a:p>
-            <a:r>
-              <a:rPr lang="en-US" dirty="0"/>
-              <a:t>If you are caught in the lot without paying you are given a warning</a:t>
-            </a:r>
-          </a:p>
-          <a:p>
-            <a:r>
-              <a:rPr lang="en-US" dirty="0"/>
-              <a:t>If you get 3 warnings, you are charged a $25 fine, and your warnings reset.</a:t>
-            </a:r>
-          </a:p>
-          <a:p>
-            <a:r>
-              <a:rPr lang="en-US" dirty="0"/>
-              <a:t>Should you actually pay to park?</a:t>
-            </a:r>
-          </a:p>
-          <a:p>
-            <a:pPr lvl="1"/>
-            <a:r>
-              <a:rPr lang="en-US" dirty="0"/>
-              <a:t>If you pay every day then you pay an average of $10 per day</a:t>
-            </a:r>
-          </a:p>
-          <a:p>
-            <a:pPr lvl="1"/>
-            <a:r>
-              <a:rPr lang="en-US" dirty="0"/>
-              <a:t>If you do not pay then for every three </a:t>
-            </a:r>
-            <a:r>
-              <a:rPr lang="en-US"/>
-              <a:t>days parking costs $</a:t>
-            </a:r>
-            <a:r>
-              <a:rPr lang="en-US" dirty="0"/>
-              <a:t>0+$0+$25, for an average of $8.33 per day</a:t>
-            </a:r>
-          </a:p>
-          <a:p>
-            <a:pPr lvl="2"/>
-            <a:r>
-              <a:rPr lang="en-US" dirty="0"/>
-              <a:t>This is an amortized analysis</a:t>
-            </a:r>
-          </a:p>
-        </p:txBody>
-      </p:sp>
-    </p:spTree>
-    <p:extLst>
-      <p:ext uri="{BB962C8B-B14F-4D97-AF65-F5344CB8AC3E}">
-        <p14:creationId xmlns:p14="http://schemas.microsoft.com/office/powerpoint/2010/main" val="948737531"/>
-      </p:ext>
-    </p:extLst>
-  </p:cSld>
-  <p:clrMapOvr>
-    <a:masterClrMapping/>
-  </p:clrMapOvr>
-</p:sld>
-</file>
-
-<file path=ppt/slides/slide4.xml><?xml version="1.0" encoding="utf-8"?>
+<file path=ppt/slides/slide6.xml><?xml version="1.0" encoding="utf-8"?>
 <p:sld xmlns:a="http://schemas.openxmlformats.org/drawingml/2006/main" xmlns:r="http://schemas.openxmlformats.org/officeDocument/2006/relationships" xmlns:p="http://schemas.openxmlformats.org/presentationml/2006/main">
   <p:cSld>
     <p:spTree>
@@ -23470,10 +25413,61 @@
           </p:txBody>
         </p:sp>
       </p:grpSp>
+      <mc:AlternateContent xmlns:mc="http://schemas.openxmlformats.org/markup-compatibility/2006">
+        <mc:Choice xmlns:p14="http://schemas.microsoft.com/office/powerpoint/2010/main" Requires="p14">
+          <p:contentPart p14:bwMode="auto" r:id="rId2">
+            <p14:nvContentPartPr>
+              <p14:cNvPr id="29" name="Ink 28">
+                <a:extLst>
+                  <a:ext uri="{FF2B5EF4-FFF2-40B4-BE49-F238E27FC236}">
+                    <a16:creationId xmlns:a16="http://schemas.microsoft.com/office/drawing/2014/main" id="{AAF819BE-13F7-1D13-2ED3-C6F9F169622F}"/>
+                  </a:ext>
+                </a:extLst>
+              </p14:cNvPr>
+              <p14:cNvContentPartPr/>
+              <p14:nvPr/>
+            </p14:nvContentPartPr>
+            <p14:xfrm>
+              <a:off x="921600" y="1206360"/>
+              <a:ext cx="5610960" cy="1295280"/>
+            </p14:xfrm>
+          </p:contentPart>
+        </mc:Choice>
+        <mc:Fallback>
+          <p:pic>
+            <p:nvPicPr>
+              <p:cNvPr id="29" name="Ink 28">
+                <a:extLst>
+                  <a:ext uri="{FF2B5EF4-FFF2-40B4-BE49-F238E27FC236}">
+                    <a16:creationId xmlns:a16="http://schemas.microsoft.com/office/drawing/2014/main" id="{AAF819BE-13F7-1D13-2ED3-C6F9F169622F}"/>
+                  </a:ext>
+                </a:extLst>
+              </p:cNvPr>
+              <p:cNvPicPr/>
+              <p:nvPr/>
+            </p:nvPicPr>
+            <p:blipFill>
+              <a:blip r:embed="rId3"/>
+              <a:stretch>
+                <a:fillRect/>
+              </a:stretch>
+            </p:blipFill>
+            <p:spPr>
+              <a:xfrm>
+                <a:off x="912240" y="1197000"/>
+                <a:ext cx="5629680" cy="1314000"/>
+              </a:xfrm>
+              <a:prstGeom prst="rect">
+                <a:avLst/>
+              </a:prstGeom>
+            </p:spPr>
+          </p:pic>
+        </mc:Fallback>
+      </mc:AlternateContent>
     </p:spTree>
     <p:extLst>
       <p:ext uri="{BB962C8B-B14F-4D97-AF65-F5344CB8AC3E}">
-        <p14:creationId xmlns:p14="http://schemas.microsoft.com/office/powerpoint/2010/main" val="2562382216"/>
+        <p14:creationId xmlns:p14="http://schemas.microsoft.com/office/powerpoint/2010/main" val="2952960087"/>
       </p:ext>
     </p:extLst>
   </p:cSld>
@@ -23483,7 +25477,7 @@
 </p:sld>
 </file>
 
-<file path=ppt/slides/slide5.xml><?xml version="1.0" encoding="utf-8"?>
+<file path=ppt/slides/slide7.xml><?xml version="1.0" encoding="utf-8"?>
 <p:sld xmlns:a="http://schemas.openxmlformats.org/drawingml/2006/main" xmlns:r="http://schemas.openxmlformats.org/officeDocument/2006/relationships" xmlns:p="http://schemas.openxmlformats.org/presentationml/2006/main">
   <p:cSld>
     <p:spTree>
@@ -26385,7 +28379,7 @@
               <p14:cNvPr id="29" name="Ink 28">
                 <a:extLst>
                   <a:ext uri="{FF2B5EF4-FFF2-40B4-BE49-F238E27FC236}">
-                    <a16:creationId xmlns:a16="http://schemas.microsoft.com/office/drawing/2014/main" id="{6AF09ADB-426B-2647-2A2D-5ACFF2811C12}"/>
+                    <a16:creationId xmlns:a16="http://schemas.microsoft.com/office/drawing/2014/main" id="{977DD563-0481-2877-BFB1-FC65E3252C42}"/>
                   </a:ext>
                 </a:extLst>
               </p14:cNvPr>
@@ -26393,8 +28387,8 @@
               <p14:nvPr/>
             </p14:nvContentPartPr>
             <p14:xfrm>
-              <a:off x="270360" y="2363400"/>
-              <a:ext cx="8993880" cy="3959280"/>
+              <a:off x="506880" y="2391120"/>
+              <a:ext cx="9795960" cy="4204080"/>
             </p14:xfrm>
           </p:contentPart>
         </mc:Choice>
@@ -26404,7 +28398,7 @@
               <p:cNvPr id="29" name="Ink 28">
                 <a:extLst>
                   <a:ext uri="{FF2B5EF4-FFF2-40B4-BE49-F238E27FC236}">
-                    <a16:creationId xmlns:a16="http://schemas.microsoft.com/office/drawing/2014/main" id="{6AF09ADB-426B-2647-2A2D-5ACFF2811C12}"/>
+                    <a16:creationId xmlns:a16="http://schemas.microsoft.com/office/drawing/2014/main" id="{977DD563-0481-2877-BFB1-FC65E3252C42}"/>
                   </a:ext>
                 </a:extLst>
               </p:cNvPr>
@@ -26419,8 +28413,8 @@
             </p:blipFill>
             <p:spPr>
               <a:xfrm>
-                <a:off x="261000" y="2354040"/>
-                <a:ext cx="9012600" cy="3978000"/>
+                <a:off x="497520" y="2381760"/>
+                <a:ext cx="9814680" cy="4222800"/>
               </a:xfrm>
               <a:prstGeom prst="rect">
                 <a:avLst/>
@@ -26432,7 +28426,7 @@
     </p:spTree>
     <p:extLst>
       <p:ext uri="{BB962C8B-B14F-4D97-AF65-F5344CB8AC3E}">
-        <p14:creationId xmlns:p14="http://schemas.microsoft.com/office/powerpoint/2010/main" val="2254727802"/>
+        <p14:creationId xmlns:p14="http://schemas.microsoft.com/office/powerpoint/2010/main" val="2023668565"/>
       </p:ext>
     </p:extLst>
   </p:cSld>
@@ -26442,7 +28436,7 @@
 </p:sld>
 </file>
 
-<file path=ppt/slides/slide6.xml><?xml version="1.0" encoding="utf-8"?>
+<file path=ppt/slides/slide8.xml><?xml version="1.0" encoding="utf-8"?>
 <p:sld xmlns:a="http://schemas.openxmlformats.org/drawingml/2006/main" xmlns:r="http://schemas.openxmlformats.org/officeDocument/2006/relationships" xmlns:p="http://schemas.openxmlformats.org/presentationml/2006/main">
   <p:cSld>
     <p:spTree>
@@ -26486,94 +28480,6 @@
             <a:r>
               <a:rPr lang="en-US" dirty="0"/>
               <a:t>“Circular” Array Queue (Algorithms)</a:t>
-            </a:r>
-          </a:p>
-        </p:txBody>
-      </p:sp>
-      <p:sp>
-        <p:nvSpPr>
-          <p:cNvPr id="3" name="Content Placeholder 2">
-            <a:extLst>
-              <a:ext uri="{FF2B5EF4-FFF2-40B4-BE49-F238E27FC236}">
-                <a16:creationId xmlns:a16="http://schemas.microsoft.com/office/drawing/2014/main" id="{1376FFCF-F09D-CE03-F022-D39AD4A97E9E}"/>
-              </a:ext>
-              <a:ext uri="{C183D7F6-B498-43B3-948B-1728B52AA6E4}">
-                <adec:decorative xmlns:adec="http://schemas.microsoft.com/office/drawing/2017/decorative" val="0"/>
-              </a:ext>
-            </a:extLst>
-          </p:cNvPr>
-          <p:cNvSpPr>
-            <a:spLocks noGrp="1"/>
-          </p:cNvSpPr>
-          <p:nvPr>
-            <p:ph idx="1"/>
-          </p:nvPr>
-        </p:nvSpPr>
-        <p:spPr>
-          <a:xfrm>
-            <a:off x="268946" y="2505200"/>
-            <a:ext cx="10515600" cy="4351338"/>
-          </a:xfrm>
-        </p:spPr>
-        <p:txBody>
-          <a:bodyPr/>
-          <a:lstStyle/>
-          <a:p>
-            <a:r>
-              <a:rPr lang="en-US" dirty="0"/>
-              <a:t>Queue represented as an array of items</a:t>
-            </a:r>
-          </a:p>
-          <a:p>
-            <a:pPr lvl="1"/>
-            <a:r>
-              <a:rPr lang="en-US" dirty="0">
-                <a:solidFill>
-                  <a:srgbClr val="0070C0"/>
-                </a:solidFill>
-              </a:rPr>
-              <a:t>A “front” index to indicate the oldest item in the queue</a:t>
-            </a:r>
-          </a:p>
-          <a:p>
-            <a:pPr lvl="1"/>
-            <a:r>
-              <a:rPr lang="en-US" dirty="0">
-                <a:solidFill>
-                  <a:schemeClr val="accent2">
-                    <a:lumMod val="75000"/>
-                  </a:schemeClr>
-                </a:solidFill>
-              </a:rPr>
-              <a:t>A “back” index to indicate the most recent item in the queue</a:t>
-            </a:r>
-          </a:p>
-          <a:p>
-            <a:r>
-              <a:rPr lang="en-US" dirty="0"/>
-              <a:t>enqueue Procedure:</a:t>
-            </a:r>
-          </a:p>
-          <a:p>
-            <a:endParaRPr lang="en-US" dirty="0"/>
-          </a:p>
-          <a:p>
-            <a:r>
-              <a:rPr lang="en-US" dirty="0"/>
-              <a:t>dequeue Procedure:</a:t>
-            </a:r>
-          </a:p>
-          <a:p>
-            <a:endParaRPr lang="en-US" dirty="0"/>
-          </a:p>
-          <a:p>
-            <a:r>
-              <a:rPr lang="en-US" dirty="0" err="1"/>
-              <a:t>isEmpty</a:t>
-            </a:r>
-            <a:r>
-              <a:rPr lang="en-US" dirty="0"/>
-              <a:t> Procedure:</a:t>
             </a:r>
           </a:p>
         </p:txBody>
@@ -27909,6 +29815,94 @@
       </p:grpSp>
       <p:sp>
         <p:nvSpPr>
+          <p:cNvPr id="3" name="Content Placeholder 2">
+            <a:extLst>
+              <a:ext uri="{FF2B5EF4-FFF2-40B4-BE49-F238E27FC236}">
+                <a16:creationId xmlns:a16="http://schemas.microsoft.com/office/drawing/2014/main" id="{1376FFCF-F09D-CE03-F022-D39AD4A97E9E}"/>
+              </a:ext>
+              <a:ext uri="{C183D7F6-B498-43B3-948B-1728B52AA6E4}">
+                <adec:decorative xmlns:adec="http://schemas.microsoft.com/office/drawing/2017/decorative" val="0"/>
+              </a:ext>
+            </a:extLst>
+          </p:cNvPr>
+          <p:cNvSpPr>
+            <a:spLocks noGrp="1"/>
+          </p:cNvSpPr>
+          <p:nvPr>
+            <p:ph idx="1"/>
+          </p:nvPr>
+        </p:nvSpPr>
+        <p:spPr>
+          <a:xfrm>
+            <a:off x="268946" y="2291840"/>
+            <a:ext cx="10515600" cy="4351338"/>
+          </a:xfrm>
+        </p:spPr>
+        <p:txBody>
+          <a:bodyPr/>
+          <a:lstStyle/>
+          <a:p>
+            <a:r>
+              <a:rPr lang="en-US" dirty="0"/>
+              <a:t>Queue represented as an array of items</a:t>
+            </a:r>
+          </a:p>
+          <a:p>
+            <a:pPr lvl="1"/>
+            <a:r>
+              <a:rPr lang="en-US" dirty="0">
+                <a:solidFill>
+                  <a:srgbClr val="0070C0"/>
+                </a:solidFill>
+              </a:rPr>
+              <a:t>A “front” index to indicate the oldest item in the queue</a:t>
+            </a:r>
+          </a:p>
+          <a:p>
+            <a:pPr lvl="1"/>
+            <a:r>
+              <a:rPr lang="en-US" dirty="0">
+                <a:solidFill>
+                  <a:schemeClr val="accent2">
+                    <a:lumMod val="75000"/>
+                  </a:schemeClr>
+                </a:solidFill>
+              </a:rPr>
+              <a:t>A “back” index to indicate the most recent item in the queue</a:t>
+            </a:r>
+          </a:p>
+          <a:p>
+            <a:r>
+              <a:rPr lang="en-US" dirty="0"/>
+              <a:t>enqueue Procedure:</a:t>
+            </a:r>
+          </a:p>
+          <a:p>
+            <a:endParaRPr lang="en-US" dirty="0"/>
+          </a:p>
+          <a:p>
+            <a:r>
+              <a:rPr lang="en-US" dirty="0"/>
+              <a:t>dequeue Procedure:</a:t>
+            </a:r>
+          </a:p>
+          <a:p>
+            <a:endParaRPr lang="en-US" dirty="0"/>
+          </a:p>
+          <a:p>
+            <a:r>
+              <a:rPr lang="en-US" dirty="0" err="1"/>
+              <a:t>isEmpty</a:t>
+            </a:r>
+            <a:r>
+              <a:rPr lang="en-US" dirty="0"/>
+              <a:t> Procedure:</a:t>
+            </a:r>
+          </a:p>
+        </p:txBody>
+      </p:sp>
+      <p:sp>
+        <p:nvSpPr>
           <p:cNvPr id="28" name="TextBox 27">
             <a:extLst>
               <a:ext uri="{FF2B5EF4-FFF2-40B4-BE49-F238E27FC236}">
@@ -27924,7 +29918,7 @@
         </p:nvSpPr>
         <p:spPr>
           <a:xfrm>
-            <a:off x="3717972" y="3671711"/>
+            <a:off x="4998426" y="3556474"/>
             <a:ext cx="4668140" cy="1169551"/>
           </a:xfrm>
           <a:prstGeom prst="rect">
@@ -28022,7 +30016,7 @@
         </p:nvSpPr>
         <p:spPr>
           <a:xfrm>
-            <a:off x="4879046" y="4619018"/>
+            <a:off x="4998426" y="4650213"/>
             <a:ext cx="4828372" cy="1600438"/>
           </a:xfrm>
           <a:prstGeom prst="rect">
@@ -28137,7 +30131,7 @@
         </p:nvSpPr>
         <p:spPr>
           <a:xfrm>
-            <a:off x="3413466" y="5976795"/>
+            <a:off x="4998426" y="6147441"/>
             <a:ext cx="3677566" cy="738664"/>
           </a:xfrm>
           <a:prstGeom prst="rect">
@@ -28204,8 +30198,8 @@
         </p:nvSpPr>
         <p:spPr>
           <a:xfrm>
-            <a:off x="8805672" y="4517136"/>
-            <a:ext cx="2971326" cy="369332"/>
+            <a:off x="10196034" y="4327047"/>
+            <a:ext cx="1813086" cy="646331"/>
           </a:xfrm>
           <a:prstGeom prst="rect">
             <a:avLst/>
@@ -28218,7 +30212,7 @@
           </a:ln>
         </p:spPr>
         <p:txBody>
-          <a:bodyPr wrap="none" rtlCol="0">
+          <a:bodyPr wrap="square" rtlCol="0">
             <a:spAutoFit/>
           </a:bodyPr>
           <a:lstStyle/>
@@ -28234,10 +30228,61 @@
           </a:p>
         </p:txBody>
       </p:sp>
+      <mc:AlternateContent xmlns:mc="http://schemas.openxmlformats.org/markup-compatibility/2006">
+        <mc:Choice xmlns:p14="http://schemas.microsoft.com/office/powerpoint/2010/main" Requires="p14">
+          <p:contentPart p14:bwMode="auto" r:id="rId2">
+            <p14:nvContentPartPr>
+              <p14:cNvPr id="33" name="Ink 32">
+                <a:extLst>
+                  <a:ext uri="{FF2B5EF4-FFF2-40B4-BE49-F238E27FC236}">
+                    <a16:creationId xmlns:a16="http://schemas.microsoft.com/office/drawing/2014/main" id="{B6F6B55A-F0F8-FB82-24C4-3DBBEC4A8CA9}"/>
+                  </a:ext>
+                </a:extLst>
+              </p14:cNvPr>
+              <p14:cNvContentPartPr/>
+              <p14:nvPr/>
+            </p14:nvContentPartPr>
+            <p14:xfrm>
+              <a:off x="5109840" y="3468960"/>
+              <a:ext cx="3908520" cy="2948400"/>
+            </p14:xfrm>
+          </p:contentPart>
+        </mc:Choice>
+        <mc:Fallback>
+          <p:pic>
+            <p:nvPicPr>
+              <p:cNvPr id="33" name="Ink 32">
+                <a:extLst>
+                  <a:ext uri="{FF2B5EF4-FFF2-40B4-BE49-F238E27FC236}">
+                    <a16:creationId xmlns:a16="http://schemas.microsoft.com/office/drawing/2014/main" id="{B6F6B55A-F0F8-FB82-24C4-3DBBEC4A8CA9}"/>
+                  </a:ext>
+                </a:extLst>
+              </p:cNvPr>
+              <p:cNvPicPr/>
+              <p:nvPr/>
+            </p:nvPicPr>
+            <p:blipFill>
+              <a:blip r:embed="rId3"/>
+              <a:stretch>
+                <a:fillRect/>
+              </a:stretch>
+            </p:blipFill>
+            <p:spPr>
+              <a:xfrm>
+                <a:off x="5100480" y="3459600"/>
+                <a:ext cx="3927240" cy="2967120"/>
+              </a:xfrm>
+              <a:prstGeom prst="rect">
+                <a:avLst/>
+              </a:prstGeom>
+            </p:spPr>
+          </p:pic>
+        </mc:Fallback>
+      </mc:AlternateContent>
     </p:spTree>
     <p:extLst>
       <p:ext uri="{BB962C8B-B14F-4D97-AF65-F5344CB8AC3E}">
-        <p14:creationId xmlns:p14="http://schemas.microsoft.com/office/powerpoint/2010/main" val="1165435876"/>
+        <p14:creationId xmlns:p14="http://schemas.microsoft.com/office/powerpoint/2010/main" val="3348092633"/>
       </p:ext>
     </p:extLst>
   </p:cSld>
@@ -28333,7 +30378,7 @@
 </p:sld>
 </file>
 
-<file path=ppt/slides/slide7.xml><?xml version="1.0" encoding="utf-8"?>
+<file path=ppt/slides/slide9.xml><?xml version="1.0" encoding="utf-8"?>
 <p:sld xmlns:a="http://schemas.openxmlformats.org/drawingml/2006/main" xmlns:r="http://schemas.openxmlformats.org/officeDocument/2006/relationships" xmlns:p="http://schemas.openxmlformats.org/presentationml/2006/main">
   <p:cSld>
     <p:spTree>
@@ -28378,91 +30423,6 @@
           </a:p>
         </p:txBody>
       </p:sp>
-      <p:sp>
-        <p:nvSpPr>
-          <p:cNvPr id="3" name="Content Placeholder 2">
-            <a:extLst>
-              <a:ext uri="{FF2B5EF4-FFF2-40B4-BE49-F238E27FC236}">
-                <a16:creationId xmlns:a16="http://schemas.microsoft.com/office/drawing/2014/main" id="{1376FFCF-F09D-CE03-F022-D39AD4A97E9E}"/>
-              </a:ext>
-            </a:extLst>
-          </p:cNvPr>
-          <p:cNvSpPr>
-            <a:spLocks noGrp="1"/>
-          </p:cNvSpPr>
-          <p:nvPr>
-            <p:ph idx="1"/>
-          </p:nvPr>
-        </p:nvSpPr>
-        <p:spPr>
-          <a:xfrm>
-            <a:off x="268946" y="2505200"/>
-            <a:ext cx="10515600" cy="4351338"/>
-          </a:xfrm>
-        </p:spPr>
-        <p:txBody>
-          <a:bodyPr/>
-          <a:lstStyle/>
-          <a:p>
-            <a:r>
-              <a:rPr lang="en-US" dirty="0"/>
-              <a:t>Queue represented as an array of items</a:t>
-            </a:r>
-          </a:p>
-          <a:p>
-            <a:pPr lvl="1"/>
-            <a:r>
-              <a:rPr lang="en-US" dirty="0">
-                <a:solidFill>
-                  <a:srgbClr val="0070C0"/>
-                </a:solidFill>
-              </a:rPr>
-              <a:t>A “front” index to indicate the oldest item in the queue</a:t>
-            </a:r>
-          </a:p>
-          <a:p>
-            <a:pPr lvl="1"/>
-            <a:r>
-              <a:rPr lang="en-US" dirty="0">
-                <a:solidFill>
-                  <a:schemeClr val="accent2">
-                    <a:lumMod val="75000"/>
-                  </a:schemeClr>
-                </a:solidFill>
-              </a:rPr>
-              <a:t>A “back” index to indicate the most recent item in the queue</a:t>
-            </a:r>
-          </a:p>
-          <a:p>
-            <a:r>
-              <a:rPr lang="en-US" dirty="0"/>
-              <a:t>enqueue Procedure:</a:t>
-            </a:r>
-          </a:p>
-          <a:p>
-            <a:endParaRPr lang="en-US" dirty="0"/>
-          </a:p>
-          <a:p>
-            <a:r>
-              <a:rPr lang="en-US" dirty="0"/>
-              <a:t>dequeue Procedure:</a:t>
-            </a:r>
-          </a:p>
-          <a:p>
-            <a:endParaRPr lang="en-US" dirty="0"/>
-          </a:p>
-          <a:p>
-            <a:r>
-              <a:rPr lang="en-US" dirty="0" err="1"/>
-              <a:t>isEmpty</a:t>
-            </a:r>
-            <a:r>
-              <a:rPr lang="en-US" dirty="0"/>
-              <a:t> Procedure:</a:t>
-            </a:r>
-          </a:p>
-        </p:txBody>
-      </p:sp>
       <p:grpSp>
         <p:nvGrpSpPr>
           <p:cNvPr id="29" name="Group 28" descr="An illustration of a circular array queue data structure. The elements of the queue are contained in an array. Because the array will not necessarily be occupied starting from index 0, we additionally have a field called &quot;front&quot; that indicates which index of the array contains the first item in the queue, and a field called &quot;back&quot; that indicates which index in teh array contains the last item in the queue.">
@@ -28477,7 +30437,7 @@
         </p:nvGrpSpPr>
         <p:grpSpPr>
           <a:xfrm>
-            <a:off x="1300186" y="1403212"/>
+            <a:off x="1300186" y="1266578"/>
             <a:ext cx="6519765" cy="1221610"/>
             <a:chOff x="1300186" y="1403212"/>
             <a:chExt cx="6519765" cy="1221610"/>
@@ -29791,6 +31751,91 @@
       </p:grpSp>
       <p:sp>
         <p:nvSpPr>
+          <p:cNvPr id="3" name="Content Placeholder 2">
+            <a:extLst>
+              <a:ext uri="{FF2B5EF4-FFF2-40B4-BE49-F238E27FC236}">
+                <a16:creationId xmlns:a16="http://schemas.microsoft.com/office/drawing/2014/main" id="{1376FFCF-F09D-CE03-F022-D39AD4A97E9E}"/>
+              </a:ext>
+            </a:extLst>
+          </p:cNvPr>
+          <p:cNvSpPr>
+            <a:spLocks noGrp="1"/>
+          </p:cNvSpPr>
+          <p:nvPr>
+            <p:ph idx="1"/>
+          </p:nvPr>
+        </p:nvSpPr>
+        <p:spPr>
+          <a:xfrm>
+            <a:off x="268946" y="2316011"/>
+            <a:ext cx="10515600" cy="4351338"/>
+          </a:xfrm>
+        </p:spPr>
+        <p:txBody>
+          <a:bodyPr/>
+          <a:lstStyle/>
+          <a:p>
+            <a:r>
+              <a:rPr lang="en-US" dirty="0"/>
+              <a:t>Queue represented as an array of items</a:t>
+            </a:r>
+          </a:p>
+          <a:p>
+            <a:pPr lvl="1"/>
+            <a:r>
+              <a:rPr lang="en-US" dirty="0">
+                <a:solidFill>
+                  <a:srgbClr val="0070C0"/>
+                </a:solidFill>
+              </a:rPr>
+              <a:t>A “front” index to indicate the oldest item in the queue</a:t>
+            </a:r>
+          </a:p>
+          <a:p>
+            <a:pPr lvl="1"/>
+            <a:r>
+              <a:rPr lang="en-US" dirty="0">
+                <a:solidFill>
+                  <a:schemeClr val="accent2">
+                    <a:lumMod val="75000"/>
+                  </a:schemeClr>
+                </a:solidFill>
+              </a:rPr>
+              <a:t>A “back” index to indicate the most recent item in the queue</a:t>
+            </a:r>
+          </a:p>
+          <a:p>
+            <a:r>
+              <a:rPr lang="en-US" dirty="0"/>
+              <a:t>enqueue Procedure:</a:t>
+            </a:r>
+          </a:p>
+          <a:p>
+            <a:endParaRPr lang="en-US" dirty="0"/>
+          </a:p>
+          <a:p>
+            <a:r>
+              <a:rPr lang="en-US" dirty="0"/>
+              <a:t>dequeue Procedure:</a:t>
+            </a:r>
+          </a:p>
+          <a:p>
+            <a:endParaRPr lang="en-US" dirty="0"/>
+          </a:p>
+          <a:p>
+            <a:r>
+              <a:rPr lang="en-US" dirty="0" err="1"/>
+              <a:t>isEmpty</a:t>
+            </a:r>
+            <a:r>
+              <a:rPr lang="en-US" dirty="0"/>
+              <a:t> Procedure:</a:t>
+            </a:r>
+          </a:p>
+        </p:txBody>
+      </p:sp>
+      <p:sp>
+        <p:nvSpPr>
           <p:cNvPr id="32" name="TextBox 31">
             <a:extLst>
               <a:ext uri="{FF2B5EF4-FFF2-40B4-BE49-F238E27FC236}">
@@ -29803,7 +31848,7 @@
         </p:nvSpPr>
         <p:spPr>
           <a:xfrm>
-            <a:off x="3717972" y="3671711"/>
+            <a:off x="5725443" y="3440486"/>
             <a:ext cx="5150352" cy="1384995"/>
           </a:xfrm>
           <a:prstGeom prst="rect">
@@ -29919,7 +31964,7 @@
         </p:nvSpPr>
         <p:spPr>
           <a:xfrm>
-            <a:off x="5790906" y="4772906"/>
+            <a:off x="5725443" y="4661212"/>
             <a:ext cx="5327136" cy="1600438"/>
           </a:xfrm>
           <a:prstGeom prst="rect">
@@ -30034,7 +32079,7 @@
         </p:nvSpPr>
         <p:spPr>
           <a:xfrm>
-            <a:off x="3413466" y="5976795"/>
+            <a:off x="5790906" y="6182846"/>
             <a:ext cx="4057454" cy="738664"/>
           </a:xfrm>
           <a:prstGeom prst="rect">
@@ -30101,7 +32146,7 @@
         </p:nvSpPr>
         <p:spPr>
           <a:xfrm>
-            <a:off x="9082568" y="2182501"/>
+            <a:off x="9868969" y="2262995"/>
             <a:ext cx="2117759" cy="923330"/>
           </a:xfrm>
           <a:prstGeom prst="rect">
@@ -30153,10 +32198,61 @@
           </a:p>
         </p:txBody>
       </p:sp>
+      <mc:AlternateContent xmlns:mc="http://schemas.openxmlformats.org/markup-compatibility/2006">
+        <mc:Choice xmlns:p14="http://schemas.microsoft.com/office/powerpoint/2010/main" Requires="p14">
+          <p:contentPart p14:bwMode="auto" r:id="rId2">
+            <p14:nvContentPartPr>
+              <p14:cNvPr id="30" name="Ink 29">
+                <a:extLst>
+                  <a:ext uri="{FF2B5EF4-FFF2-40B4-BE49-F238E27FC236}">
+                    <a16:creationId xmlns:a16="http://schemas.microsoft.com/office/drawing/2014/main" id="{FF4DFCDC-1634-93C8-C4C6-D354E8C6CEDF}"/>
+                  </a:ext>
+                </a:extLst>
+              </p14:cNvPr>
+              <p14:cNvContentPartPr/>
+              <p14:nvPr/>
+            </p14:nvContentPartPr>
+            <p14:xfrm>
+              <a:off x="1096920" y="1319400"/>
+              <a:ext cx="10127520" cy="2697840"/>
+            </p14:xfrm>
+          </p:contentPart>
+        </mc:Choice>
+        <mc:Fallback>
+          <p:pic>
+            <p:nvPicPr>
+              <p:cNvPr id="30" name="Ink 29">
+                <a:extLst>
+                  <a:ext uri="{FF2B5EF4-FFF2-40B4-BE49-F238E27FC236}">
+                    <a16:creationId xmlns:a16="http://schemas.microsoft.com/office/drawing/2014/main" id="{FF4DFCDC-1634-93C8-C4C6-D354E8C6CEDF}"/>
+                  </a:ext>
+                </a:extLst>
+              </p:cNvPr>
+              <p:cNvPicPr/>
+              <p:nvPr/>
+            </p:nvPicPr>
+            <p:blipFill>
+              <a:blip r:embed="rId3"/>
+              <a:stretch>
+                <a:fillRect/>
+              </a:stretch>
+            </p:blipFill>
+            <p:spPr>
+              <a:xfrm>
+                <a:off x="1087560" y="1310040"/>
+                <a:ext cx="10146240" cy="2716560"/>
+              </a:xfrm>
+              <a:prstGeom prst="rect">
+                <a:avLst/>
+              </a:prstGeom>
+            </p:spPr>
+          </p:pic>
+        </mc:Fallback>
+      </mc:AlternateContent>
     </p:spTree>
     <p:extLst>
       <p:ext uri="{BB962C8B-B14F-4D97-AF65-F5344CB8AC3E}">
-        <p14:creationId xmlns:p14="http://schemas.microsoft.com/office/powerpoint/2010/main" val="2538202624"/>
+        <p14:creationId xmlns:p14="http://schemas.microsoft.com/office/powerpoint/2010/main" val="4037612449"/>
       </p:ext>
     </p:extLst>
   </p:cSld>
@@ -30249,306 +32345,6 @@
       <p:bldP spid="28" grpId="0" animBg="1"/>
     </p:bldLst>
   </p:timing>
-</p:sld>
-</file>
-
-<file path=ppt/slides/slide8.xml><?xml version="1.0" encoding="utf-8"?>
-<p:sld xmlns:a="http://schemas.openxmlformats.org/drawingml/2006/main" xmlns:r="http://schemas.openxmlformats.org/officeDocument/2006/relationships" xmlns:p="http://schemas.openxmlformats.org/presentationml/2006/main">
-  <p:cSld>
-    <p:spTree>
-      <p:nvGrpSpPr>
-        <p:cNvPr id="1" name=""/>
-        <p:cNvGrpSpPr/>
-        <p:nvPr/>
-      </p:nvGrpSpPr>
-      <p:grpSpPr>
-        <a:xfrm>
-          <a:off x="0" y="0"/>
-          <a:ext cx="0" cy="0"/>
-          <a:chOff x="0" y="0"/>
-          <a:chExt cx="0" cy="0"/>
-        </a:xfrm>
-      </p:grpSpPr>
-      <p:sp>
-        <p:nvSpPr>
-          <p:cNvPr id="2" name="Title 1">
-            <a:extLst>
-              <a:ext uri="{FF2B5EF4-FFF2-40B4-BE49-F238E27FC236}">
-                <a16:creationId xmlns:a16="http://schemas.microsoft.com/office/drawing/2014/main" id="{FB3450B6-F0B1-452F-736A-CBAD5DE567E1}"/>
-              </a:ext>
-            </a:extLst>
-          </p:cNvPr>
-          <p:cNvSpPr>
-            <a:spLocks noGrp="1"/>
-          </p:cNvSpPr>
-          <p:nvPr>
-            <p:ph type="title"/>
-          </p:nvPr>
-        </p:nvSpPr>
-        <p:spPr/>
-        <p:txBody>
-          <a:bodyPr/>
-          <a:lstStyle/>
-          <a:p>
-            <a:r>
-              <a:rPr lang="en-US" dirty="0"/>
-              <a:t>Linked List vs. Circular Array</a:t>
-            </a:r>
-          </a:p>
-        </p:txBody>
-      </p:sp>
-      <p:sp>
-        <p:nvSpPr>
-          <p:cNvPr id="3" name="Content Placeholder 2">
-            <a:extLst>
-              <a:ext uri="{FF2B5EF4-FFF2-40B4-BE49-F238E27FC236}">
-                <a16:creationId xmlns:a16="http://schemas.microsoft.com/office/drawing/2014/main" id="{E1FB6DFD-BFD3-6A83-79CC-23335BC24C61}"/>
-              </a:ext>
-            </a:extLst>
-          </p:cNvPr>
-          <p:cNvSpPr>
-            <a:spLocks noGrp="1"/>
-          </p:cNvSpPr>
-          <p:nvPr>
-            <p:ph idx="1"/>
-          </p:nvPr>
-        </p:nvSpPr>
-        <p:spPr/>
-        <p:txBody>
-          <a:bodyPr/>
-          <a:lstStyle/>
-          <a:p>
-            <a:r>
-              <a:rPr lang="en-US" dirty="0"/>
-              <a:t>Let’s Summarize the benefits and drawbacks of each</a:t>
-            </a:r>
-          </a:p>
-          <a:p>
-            <a:pPr lvl="1"/>
-            <a:r>
-              <a:rPr lang="en-US" dirty="0"/>
-              <a:t>Circular array uses more space if the data you’re storing is big</a:t>
-            </a:r>
-          </a:p>
-          <a:p>
-            <a:pPr lvl="1"/>
-            <a:r>
-              <a:rPr lang="en-US" dirty="0"/>
-              <a:t>Linked nodes doesn’t need resizing</a:t>
-            </a:r>
-          </a:p>
-          <a:p>
-            <a:pPr lvl="1"/>
-            <a:r>
-              <a:rPr lang="en-US" dirty="0"/>
-              <a:t>Linked nodes have worse special locality (bad thing)</a:t>
-            </a:r>
-          </a:p>
-          <a:p>
-            <a:pPr lvl="2"/>
-            <a:r>
-              <a:rPr lang="en-US" dirty="0"/>
-              <a:t>Data is not used contiguous</a:t>
-            </a:r>
-          </a:p>
-          <a:p>
-            <a:pPr lvl="1"/>
-            <a:r>
-              <a:rPr lang="en-US" dirty="0"/>
-              <a:t>Circular array is less consistent in how long an enqueue operation takes</a:t>
-            </a:r>
-          </a:p>
-          <a:p>
-            <a:pPr lvl="1"/>
-            <a:r>
-              <a:rPr lang="en-US" dirty="0"/>
-              <a:t>Circular array makes it easy to get access elements in the middle</a:t>
-            </a:r>
-          </a:p>
-          <a:p>
-            <a:pPr lvl="1"/>
-            <a:r>
-              <a:rPr lang="en-US" dirty="0"/>
-              <a:t>Easier to convert to ____ other data structure</a:t>
-            </a:r>
-          </a:p>
-          <a:p>
-            <a:pPr lvl="1"/>
-            <a:r>
-              <a:rPr lang="en-US" dirty="0"/>
-              <a:t>Storage of null?</a:t>
-            </a:r>
-          </a:p>
-        </p:txBody>
-      </p:sp>
-    </p:spTree>
-    <p:extLst>
-      <p:ext uri="{BB962C8B-B14F-4D97-AF65-F5344CB8AC3E}">
-        <p14:creationId xmlns:p14="http://schemas.microsoft.com/office/powerpoint/2010/main" val="1374528974"/>
-      </p:ext>
-    </p:extLst>
-  </p:cSld>
-  <p:clrMapOvr>
-    <a:masterClrMapping/>
-  </p:clrMapOvr>
-</p:sld>
-</file>
-
-<file path=ppt/slides/slide9.xml><?xml version="1.0" encoding="utf-8"?>
-<p:sld xmlns:a="http://schemas.openxmlformats.org/drawingml/2006/main" xmlns:r="http://schemas.openxmlformats.org/officeDocument/2006/relationships" xmlns:p="http://schemas.openxmlformats.org/presentationml/2006/main">
-  <p:cSld>
-    <p:spTree>
-      <p:nvGrpSpPr>
-        <p:cNvPr id="1" name=""/>
-        <p:cNvGrpSpPr/>
-        <p:nvPr/>
-      </p:nvGrpSpPr>
-      <p:grpSpPr>
-        <a:xfrm>
-          <a:off x="0" y="0"/>
-          <a:ext cx="0" cy="0"/>
-          <a:chOff x="0" y="0"/>
-          <a:chExt cx="0" cy="0"/>
-        </a:xfrm>
-      </p:grpSpPr>
-      <p:sp>
-        <p:nvSpPr>
-          <p:cNvPr id="2" name="Title 1">
-            <a:extLst>
-              <a:ext uri="{FF2B5EF4-FFF2-40B4-BE49-F238E27FC236}">
-                <a16:creationId xmlns:a16="http://schemas.microsoft.com/office/drawing/2014/main" id="{D70D41E5-465C-EBB5-E9CD-029376B833DF}"/>
-              </a:ext>
-            </a:extLst>
-          </p:cNvPr>
-          <p:cNvSpPr>
-            <a:spLocks noGrp="1"/>
-          </p:cNvSpPr>
-          <p:nvPr>
-            <p:ph type="title"/>
-          </p:nvPr>
-        </p:nvSpPr>
-        <p:spPr/>
-        <p:txBody>
-          <a:bodyPr/>
-          <a:lstStyle/>
-          <a:p>
-            <a:r>
-              <a:rPr lang="en-US" dirty="0"/>
-              <a:t>ADT: Stack</a:t>
-            </a:r>
-          </a:p>
-        </p:txBody>
-      </p:sp>
-      <p:sp>
-        <p:nvSpPr>
-          <p:cNvPr id="3" name="Content Placeholder 2">
-            <a:extLst>
-              <a:ext uri="{FF2B5EF4-FFF2-40B4-BE49-F238E27FC236}">
-                <a16:creationId xmlns:a16="http://schemas.microsoft.com/office/drawing/2014/main" id="{B5EF048E-DA88-5227-7793-0EE138E7390F}"/>
-              </a:ext>
-            </a:extLst>
-          </p:cNvPr>
-          <p:cNvSpPr>
-            <a:spLocks noGrp="1"/>
-          </p:cNvSpPr>
-          <p:nvPr>
-            <p:ph idx="1"/>
-          </p:nvPr>
-        </p:nvSpPr>
-        <p:spPr/>
-        <p:txBody>
-          <a:bodyPr>
-            <a:normAutofit/>
-          </a:bodyPr>
-          <a:lstStyle/>
-          <a:p>
-            <a:r>
-              <a:rPr lang="en-US" dirty="0"/>
-              <a:t>What is it?</a:t>
-            </a:r>
-          </a:p>
-          <a:p>
-            <a:pPr lvl="1"/>
-            <a:r>
-              <a:rPr lang="en-US" dirty="0"/>
-              <a:t>A “Last In First Out” (LIFO) collection of items (sometimes called FILO)</a:t>
-            </a:r>
-          </a:p>
-          <a:p>
-            <a:r>
-              <a:rPr lang="en-US" dirty="0"/>
-              <a:t>What operations do we need?</a:t>
-            </a:r>
-          </a:p>
-          <a:p>
-            <a:pPr lvl="1"/>
-            <a:r>
-              <a:rPr lang="en-US" dirty="0"/>
-              <a:t>push</a:t>
-            </a:r>
-          </a:p>
-          <a:p>
-            <a:pPr lvl="2"/>
-            <a:r>
-              <a:rPr lang="en-US" dirty="0"/>
-              <a:t>Add a new item onto the stack</a:t>
-            </a:r>
-          </a:p>
-          <a:p>
-            <a:pPr lvl="1"/>
-            <a:r>
-              <a:rPr lang="en-US" dirty="0"/>
-              <a:t>peek</a:t>
-            </a:r>
-          </a:p>
-          <a:p>
-            <a:pPr lvl="2"/>
-            <a:r>
-              <a:rPr lang="en-US" dirty="0"/>
-              <a:t>Return the value of the most recently pushed item</a:t>
-            </a:r>
-          </a:p>
-          <a:p>
-            <a:pPr lvl="1"/>
-            <a:r>
-              <a:rPr lang="en-US" dirty="0"/>
-              <a:t>pop</a:t>
-            </a:r>
-          </a:p>
-          <a:p>
-            <a:pPr lvl="2"/>
-            <a:r>
-              <a:rPr lang="en-US" dirty="0"/>
-              <a:t>Return the value of the most recently pushed item and remove it from the stack</a:t>
-            </a:r>
-          </a:p>
-          <a:p>
-            <a:pPr lvl="1"/>
-            <a:r>
-              <a:rPr lang="en-US" dirty="0" err="1"/>
-              <a:t>isEmpty</a:t>
-            </a:r>
-            <a:endParaRPr lang="en-US" dirty="0"/>
-          </a:p>
-          <a:p>
-            <a:pPr lvl="2"/>
-            <a:r>
-              <a:rPr lang="en-US" dirty="0"/>
-              <a:t>Indicate whether or not there are items still on the stack</a:t>
-            </a:r>
-          </a:p>
-        </p:txBody>
-      </p:sp>
-    </p:spTree>
-    <p:extLst>
-      <p:ext uri="{BB962C8B-B14F-4D97-AF65-F5344CB8AC3E}">
-        <p14:creationId xmlns:p14="http://schemas.microsoft.com/office/powerpoint/2010/main" val="39125618"/>
-      </p:ext>
-    </p:extLst>
-  </p:cSld>
-  <p:clrMapOvr>
-    <a:masterClrMapping/>
-  </p:clrMapOvr>
 </p:sld>
 </file>
 
